--- a/程式介紹與展示.pptx
+++ b/程式介紹與展示.pptx
@@ -5,7 +5,7 @@
     <p:sldMasterId id="2147483674" r:id="rId1"/>
   </p:sldMasterIdLst>
   <p:notesMasterIdLst>
-    <p:notesMasterId r:id="rId12"/>
+    <p:notesMasterId r:id="rId13"/>
   </p:notesMasterIdLst>
   <p:sldIdLst>
     <p:sldId id="256" r:id="rId2"/>
@@ -15,33 +15,34 @@
     <p:sldId id="306" r:id="rId6"/>
     <p:sldId id="307" r:id="rId7"/>
     <p:sldId id="304" r:id="rId8"/>
-    <p:sldId id="257" r:id="rId9"/>
-    <p:sldId id="261" r:id="rId10"/>
-    <p:sldId id="284" r:id="rId11"/>
+    <p:sldId id="308" r:id="rId9"/>
+    <p:sldId id="257" r:id="rId10"/>
+    <p:sldId id="261" r:id="rId11"/>
+    <p:sldId id="284" r:id="rId12"/>
   </p:sldIdLst>
   <p:sldSz cx="9144000" cy="5143500" type="screen16x9"/>
   <p:notesSz cx="6858000" cy="9144000"/>
   <p:embeddedFontLst>
     <p:embeddedFont>
       <p:font typeface="Bebas Neue" panose="020B0606020202050201" pitchFamily="34" charset="0"/>
-      <p:regular r:id="rId13"/>
+      <p:regular r:id="rId14"/>
     </p:embeddedFont>
     <p:embeddedFont>
       <p:font typeface="Mulish" panose="02020500000000000000" charset="0"/>
-      <p:regular r:id="rId14"/>
-      <p:bold r:id="rId15"/>
-      <p:italic r:id="rId16"/>
-      <p:boldItalic r:id="rId17"/>
+      <p:regular r:id="rId15"/>
+      <p:bold r:id="rId16"/>
+      <p:italic r:id="rId17"/>
+      <p:boldItalic r:id="rId18"/>
     </p:embeddedFont>
     <p:embeddedFont>
       <p:font typeface="Nunito Light" pitchFamily="2" charset="0"/>
-      <p:regular r:id="rId18"/>
-      <p:italic r:id="rId19"/>
+      <p:regular r:id="rId19"/>
+      <p:italic r:id="rId20"/>
     </p:embeddedFont>
     <p:embeddedFont>
       <p:font typeface="Quicksand" panose="02020500000000000000" charset="0"/>
-      <p:regular r:id="rId20"/>
-      <p:bold r:id="rId21"/>
+      <p:regular r:id="rId21"/>
+      <p:bold r:id="rId22"/>
     </p:embeddedFont>
   </p:embeddedFontLst>
   <p:defaultTextStyle>
@@ -852,6 +853,117 @@
 </p:notes>
 </file>
 
+<file path=ppt/notesSlides/notesSlide10.xml><?xml version="1.0" encoding="utf-8"?>
+<p:notes xmlns:a="http://schemas.openxmlformats.org/drawingml/2006/main" xmlns:r="http://schemas.openxmlformats.org/officeDocument/2006/relationships" xmlns:p="http://schemas.openxmlformats.org/presentationml/2006/main" showMasterSp="0" showMasterPhAnim="0">
+  <p:cSld>
+    <p:spTree>
+      <p:nvGrpSpPr>
+        <p:cNvPr id="1" name="Shape 819"/>
+        <p:cNvGrpSpPr/>
+        <p:nvPr/>
+      </p:nvGrpSpPr>
+      <p:grpSpPr>
+        <a:xfrm>
+          <a:off x="0" y="0"/>
+          <a:ext cx="0" cy="0"/>
+          <a:chOff x="0" y="0"/>
+          <a:chExt cx="0" cy="0"/>
+        </a:xfrm>
+      </p:grpSpPr>
+      <p:sp>
+        <p:nvSpPr>
+          <p:cNvPr id="820" name="Google Shape;820;gd44c0c1fca_0_138:notes"/>
+          <p:cNvSpPr>
+            <a:spLocks noGrp="1" noRot="1" noChangeAspect="1"/>
+          </p:cNvSpPr>
+          <p:nvPr>
+            <p:ph type="sldImg" idx="2"/>
+          </p:nvPr>
+        </p:nvSpPr>
+        <p:spPr>
+          <a:xfrm>
+            <a:off x="381000" y="685800"/>
+            <a:ext cx="6096000" cy="3429000"/>
+          </a:xfrm>
+          <a:custGeom>
+            <a:avLst/>
+            <a:gdLst/>
+            <a:ahLst/>
+            <a:cxnLst/>
+            <a:rect l="l" t="t" r="r" b="b"/>
+            <a:pathLst>
+              <a:path w="120000" h="120000" extrusionOk="0">
+                <a:moveTo>
+                  <a:pt x="0" y="0"/>
+                </a:moveTo>
+                <a:lnTo>
+                  <a:pt x="120000" y="0"/>
+                </a:lnTo>
+                <a:lnTo>
+                  <a:pt x="120000" y="120000"/>
+                </a:lnTo>
+                <a:lnTo>
+                  <a:pt x="0" y="120000"/>
+                </a:lnTo>
+                <a:close/>
+              </a:path>
+            </a:pathLst>
+          </a:custGeom>
+        </p:spPr>
+        <p:txBody>
+          <a:bodyPr/>
+          <a:lstStyle/>
+          <a:p>
+            <a:endParaRPr lang="zh-TW" altLang="en-US"/>
+          </a:p>
+        </p:txBody>
+      </p:sp>
+      <p:sp>
+        <p:nvSpPr>
+          <p:cNvPr id="821" name="Google Shape;821;gd44c0c1fca_0_138:notes"/>
+          <p:cNvSpPr txBox="1">
+            <a:spLocks noGrp="1"/>
+          </p:cNvSpPr>
+          <p:nvPr>
+            <p:ph type="body" idx="1"/>
+          </p:nvPr>
+        </p:nvSpPr>
+        <p:spPr>
+          <a:xfrm>
+            <a:off x="685800" y="4343400"/>
+            <a:ext cx="5486400" cy="4114800"/>
+          </a:xfrm>
+          <a:prstGeom prst="rect">
+            <a:avLst/>
+          </a:prstGeom>
+        </p:spPr>
+        <p:txBody>
+          <a:bodyPr spcFirstLastPara="1" wrap="square" lIns="91425" tIns="91425" rIns="91425" bIns="91425" anchor="t" anchorCtr="0">
+            <a:noAutofit/>
+          </a:bodyPr>
+          <a:lstStyle/>
+          <a:p>
+            <a:pPr marL="0" lvl="0" indent="0" algn="l" rtl="0">
+              <a:spcBef>
+                <a:spcPts val="0"/>
+              </a:spcBef>
+              <a:spcAft>
+                <a:spcPts val="0"/>
+              </a:spcAft>
+              <a:buNone/>
+            </a:pPr>
+            <a:endParaRPr/>
+          </a:p>
+        </p:txBody>
+      </p:sp>
+    </p:spTree>
+  </p:cSld>
+  <p:clrMapOvr>
+    <a:masterClrMapping/>
+  </p:clrMapOvr>
+</p:notes>
+</file>
+
 <file path=ppt/notesSlides/notesSlide2.xml><?xml version="1.0" encoding="utf-8"?>
 <p:notes xmlns:a="http://schemas.openxmlformats.org/drawingml/2006/main" xmlns:r="http://schemas.openxmlformats.org/officeDocument/2006/relationships" xmlns:p="http://schemas.openxmlformats.org/presentationml/2006/main" showMasterSp="0" showMasterPhAnim="0">
   <p:cSld>
@@ -1481,6 +1593,140 @@
   <p:cSld>
     <p:spTree>
       <p:nvGrpSpPr>
+        <p:cNvPr id="1" name="Shape 349">
+          <a:extLst>
+            <a:ext uri="{FF2B5EF4-FFF2-40B4-BE49-F238E27FC236}">
+              <a16:creationId xmlns:a16="http://schemas.microsoft.com/office/drawing/2014/main" id="{4B8B47C6-0DE6-7E5D-DDE9-57518D26E18D}"/>
+            </a:ext>
+          </a:extLst>
+        </p:cNvPr>
+        <p:cNvGrpSpPr/>
+        <p:nvPr/>
+      </p:nvGrpSpPr>
+      <p:grpSpPr>
+        <a:xfrm>
+          <a:off x="0" y="0"/>
+          <a:ext cx="0" cy="0"/>
+          <a:chOff x="0" y="0"/>
+          <a:chExt cx="0" cy="0"/>
+        </a:xfrm>
+      </p:grpSpPr>
+      <p:sp>
+        <p:nvSpPr>
+          <p:cNvPr id="350" name="Google Shape;350;ged9256fe6f_0_23:notes">
+            <a:extLst>
+              <a:ext uri="{FF2B5EF4-FFF2-40B4-BE49-F238E27FC236}">
+                <a16:creationId xmlns:a16="http://schemas.microsoft.com/office/drawing/2014/main" id="{8139641A-7950-E38F-F172-4F8A5250E8AE}"/>
+              </a:ext>
+            </a:extLst>
+          </p:cNvPr>
+          <p:cNvSpPr>
+            <a:spLocks noGrp="1" noRot="1" noChangeAspect="1"/>
+          </p:cNvSpPr>
+          <p:nvPr>
+            <p:ph type="sldImg" idx="2"/>
+          </p:nvPr>
+        </p:nvSpPr>
+        <p:spPr>
+          <a:xfrm>
+            <a:off x="381000" y="685800"/>
+            <a:ext cx="6096000" cy="3429000"/>
+          </a:xfrm>
+          <a:custGeom>
+            <a:avLst/>
+            <a:gdLst/>
+            <a:ahLst/>
+            <a:cxnLst/>
+            <a:rect l="l" t="t" r="r" b="b"/>
+            <a:pathLst>
+              <a:path w="120000" h="120000" extrusionOk="0">
+                <a:moveTo>
+                  <a:pt x="0" y="0"/>
+                </a:moveTo>
+                <a:lnTo>
+                  <a:pt x="120000" y="0"/>
+                </a:lnTo>
+                <a:lnTo>
+                  <a:pt x="120000" y="120000"/>
+                </a:lnTo>
+                <a:lnTo>
+                  <a:pt x="0" y="120000"/>
+                </a:lnTo>
+                <a:close/>
+              </a:path>
+            </a:pathLst>
+          </a:custGeom>
+        </p:spPr>
+        <p:txBody>
+          <a:bodyPr/>
+          <a:lstStyle/>
+          <a:p>
+            <a:endParaRPr lang="zh-TW" altLang="en-US"/>
+          </a:p>
+        </p:txBody>
+      </p:sp>
+      <p:sp>
+        <p:nvSpPr>
+          <p:cNvPr id="351" name="Google Shape;351;ged9256fe6f_0_23:notes">
+            <a:extLst>
+              <a:ext uri="{FF2B5EF4-FFF2-40B4-BE49-F238E27FC236}">
+                <a16:creationId xmlns:a16="http://schemas.microsoft.com/office/drawing/2014/main" id="{07C478F5-38FF-FCC6-6B02-3A98895327D3}"/>
+              </a:ext>
+            </a:extLst>
+          </p:cNvPr>
+          <p:cNvSpPr txBox="1">
+            <a:spLocks noGrp="1"/>
+          </p:cNvSpPr>
+          <p:nvPr>
+            <p:ph type="body" idx="1"/>
+          </p:nvPr>
+        </p:nvSpPr>
+        <p:spPr>
+          <a:xfrm>
+            <a:off x="685800" y="4343400"/>
+            <a:ext cx="5486400" cy="4114800"/>
+          </a:xfrm>
+          <a:prstGeom prst="rect">
+            <a:avLst/>
+          </a:prstGeom>
+        </p:spPr>
+        <p:txBody>
+          <a:bodyPr spcFirstLastPara="1" wrap="square" lIns="91425" tIns="91425" rIns="91425" bIns="91425" anchor="t" anchorCtr="0">
+            <a:noAutofit/>
+          </a:bodyPr>
+          <a:lstStyle/>
+          <a:p>
+            <a:pPr marL="0" lvl="0" indent="0" algn="l" rtl="0">
+              <a:spcBef>
+                <a:spcPts val="0"/>
+              </a:spcBef>
+              <a:spcAft>
+                <a:spcPts val="0"/>
+              </a:spcAft>
+              <a:buNone/>
+            </a:pPr>
+            <a:endParaRPr/>
+          </a:p>
+        </p:txBody>
+      </p:sp>
+    </p:spTree>
+    <p:extLst>
+      <p:ext uri="{BB962C8B-B14F-4D97-AF65-F5344CB8AC3E}">
+        <p14:creationId xmlns:p14="http://schemas.microsoft.com/office/powerpoint/2010/main" val="3265544753"/>
+      </p:ext>
+    </p:extLst>
+  </p:cSld>
+  <p:clrMapOvr>
+    <a:masterClrMapping/>
+  </p:clrMapOvr>
+</p:notes>
+</file>
+
+<file path=ppt/notesSlides/notesSlide8.xml><?xml version="1.0" encoding="utf-8"?>
+<p:notes xmlns:a="http://schemas.openxmlformats.org/drawingml/2006/main" xmlns:r="http://schemas.openxmlformats.org/officeDocument/2006/relationships" xmlns:p="http://schemas.openxmlformats.org/presentationml/2006/main" showMasterSp="0" showMasterPhAnim="0">
+  <p:cSld>
+    <p:spTree>
+      <p:nvGrpSpPr>
         <p:cNvPr id="1" name="Shape 291"/>
         <p:cNvGrpSpPr/>
         <p:nvPr/>
@@ -1587,7 +1833,7 @@
 </p:notes>
 </file>
 
-<file path=ppt/notesSlides/notesSlide8.xml><?xml version="1.0" encoding="utf-8"?>
+<file path=ppt/notesSlides/notesSlide9.xml><?xml version="1.0" encoding="utf-8"?>
 <p:notes xmlns:a="http://schemas.openxmlformats.org/drawingml/2006/main" xmlns:r="http://schemas.openxmlformats.org/officeDocument/2006/relationships" xmlns:p="http://schemas.openxmlformats.org/presentationml/2006/main" showMasterSp="0" showMasterPhAnim="0">
   <p:cSld>
     <p:spTree>
@@ -1655,117 +1901,6 @@
       <p:sp>
         <p:nvSpPr>
           <p:cNvPr id="351" name="Google Shape;351;ged9256fe6f_0_23:notes"/>
-          <p:cNvSpPr txBox="1">
-            <a:spLocks noGrp="1"/>
-          </p:cNvSpPr>
-          <p:nvPr>
-            <p:ph type="body" idx="1"/>
-          </p:nvPr>
-        </p:nvSpPr>
-        <p:spPr>
-          <a:xfrm>
-            <a:off x="685800" y="4343400"/>
-            <a:ext cx="5486400" cy="4114800"/>
-          </a:xfrm>
-          <a:prstGeom prst="rect">
-            <a:avLst/>
-          </a:prstGeom>
-        </p:spPr>
-        <p:txBody>
-          <a:bodyPr spcFirstLastPara="1" wrap="square" lIns="91425" tIns="91425" rIns="91425" bIns="91425" anchor="t" anchorCtr="0">
-            <a:noAutofit/>
-          </a:bodyPr>
-          <a:lstStyle/>
-          <a:p>
-            <a:pPr marL="0" lvl="0" indent="0" algn="l" rtl="0">
-              <a:spcBef>
-                <a:spcPts val="0"/>
-              </a:spcBef>
-              <a:spcAft>
-                <a:spcPts val="0"/>
-              </a:spcAft>
-              <a:buNone/>
-            </a:pPr>
-            <a:endParaRPr/>
-          </a:p>
-        </p:txBody>
-      </p:sp>
-    </p:spTree>
-  </p:cSld>
-  <p:clrMapOvr>
-    <a:masterClrMapping/>
-  </p:clrMapOvr>
-</p:notes>
-</file>
-
-<file path=ppt/notesSlides/notesSlide9.xml><?xml version="1.0" encoding="utf-8"?>
-<p:notes xmlns:a="http://schemas.openxmlformats.org/drawingml/2006/main" xmlns:r="http://schemas.openxmlformats.org/officeDocument/2006/relationships" xmlns:p="http://schemas.openxmlformats.org/presentationml/2006/main" showMasterSp="0" showMasterPhAnim="0">
-  <p:cSld>
-    <p:spTree>
-      <p:nvGrpSpPr>
-        <p:cNvPr id="1" name="Shape 819"/>
-        <p:cNvGrpSpPr/>
-        <p:nvPr/>
-      </p:nvGrpSpPr>
-      <p:grpSpPr>
-        <a:xfrm>
-          <a:off x="0" y="0"/>
-          <a:ext cx="0" cy="0"/>
-          <a:chOff x="0" y="0"/>
-          <a:chExt cx="0" cy="0"/>
-        </a:xfrm>
-      </p:grpSpPr>
-      <p:sp>
-        <p:nvSpPr>
-          <p:cNvPr id="820" name="Google Shape;820;gd44c0c1fca_0_138:notes"/>
-          <p:cNvSpPr>
-            <a:spLocks noGrp="1" noRot="1" noChangeAspect="1"/>
-          </p:cNvSpPr>
-          <p:nvPr>
-            <p:ph type="sldImg" idx="2"/>
-          </p:nvPr>
-        </p:nvSpPr>
-        <p:spPr>
-          <a:xfrm>
-            <a:off x="381000" y="685800"/>
-            <a:ext cx="6096000" cy="3429000"/>
-          </a:xfrm>
-          <a:custGeom>
-            <a:avLst/>
-            <a:gdLst/>
-            <a:ahLst/>
-            <a:cxnLst/>
-            <a:rect l="l" t="t" r="r" b="b"/>
-            <a:pathLst>
-              <a:path w="120000" h="120000" extrusionOk="0">
-                <a:moveTo>
-                  <a:pt x="0" y="0"/>
-                </a:moveTo>
-                <a:lnTo>
-                  <a:pt x="120000" y="0"/>
-                </a:lnTo>
-                <a:lnTo>
-                  <a:pt x="120000" y="120000"/>
-                </a:lnTo>
-                <a:lnTo>
-                  <a:pt x="0" y="120000"/>
-                </a:lnTo>
-                <a:close/>
-              </a:path>
-            </a:pathLst>
-          </a:custGeom>
-        </p:spPr>
-        <p:txBody>
-          <a:bodyPr/>
-          <a:lstStyle/>
-          <a:p>
-            <a:endParaRPr lang="zh-TW" altLang="en-US"/>
-          </a:p>
-        </p:txBody>
-      </p:sp>
-      <p:sp>
-        <p:nvSpPr>
-          <p:cNvPr id="821" name="Google Shape;821;gd44c0c1fca_0_138:notes"/>
           <p:cNvSpPr txBox="1">
             <a:spLocks noGrp="1"/>
           </p:cNvSpPr>
@@ -12297,6 +12432,212 @@
   <p:cSld>
     <p:spTree>
       <p:nvGrpSpPr>
+        <p:cNvPr id="1" name="Shape 352"/>
+        <p:cNvGrpSpPr/>
+        <p:nvPr/>
+      </p:nvGrpSpPr>
+      <p:grpSpPr>
+        <a:xfrm>
+          <a:off x="0" y="0"/>
+          <a:ext cx="0" cy="0"/>
+          <a:chOff x="0" y="0"/>
+          <a:chExt cx="0" cy="0"/>
+        </a:xfrm>
+      </p:grpSpPr>
+      <p:sp>
+        <p:nvSpPr>
+          <p:cNvPr id="353" name="Google Shape;353;p34"/>
+          <p:cNvSpPr txBox="1">
+            <a:spLocks noGrp="1"/>
+          </p:cNvSpPr>
+          <p:nvPr>
+            <p:ph type="subTitle" idx="1"/>
+          </p:nvPr>
+        </p:nvSpPr>
+        <p:spPr>
+          <a:xfrm>
+            <a:off x="969900" y="1312625"/>
+            <a:ext cx="7204200" cy="1478400"/>
+          </a:xfrm>
+          <a:prstGeom prst="rect">
+            <a:avLst/>
+          </a:prstGeom>
+        </p:spPr>
+        <p:txBody>
+          <a:bodyPr spcFirstLastPara="1" wrap="square" lIns="91425" tIns="91425" rIns="91425" bIns="91425" anchor="ctr" anchorCtr="0">
+            <a:noAutofit/>
+          </a:bodyPr>
+          <a:lstStyle/>
+          <a:p>
+            <a:pPr marL="0" lvl="0" indent="0" algn="ctr" rtl="0">
+              <a:spcBef>
+                <a:spcPts val="0"/>
+              </a:spcBef>
+              <a:spcAft>
+                <a:spcPts val="0"/>
+              </a:spcAft>
+              <a:buNone/>
+            </a:pPr>
+            <a:r>
+              <a:rPr lang="en" dirty="0"/>
+              <a:t>“This is a quote. Words full of wisdom that someone important said and can make the reader get inspired.”</a:t>
+            </a:r>
+            <a:endParaRPr dirty="0"/>
+          </a:p>
+        </p:txBody>
+      </p:sp>
+      <p:sp>
+        <p:nvSpPr>
+          <p:cNvPr id="354" name="Google Shape;354;p34"/>
+          <p:cNvSpPr txBox="1">
+            <a:spLocks noGrp="1"/>
+          </p:cNvSpPr>
+          <p:nvPr>
+            <p:ph type="title"/>
+          </p:nvPr>
+        </p:nvSpPr>
+        <p:spPr>
+          <a:xfrm>
+            <a:off x="969900" y="3387600"/>
+            <a:ext cx="7204200" cy="531900"/>
+          </a:xfrm>
+          <a:prstGeom prst="rect">
+            <a:avLst/>
+          </a:prstGeom>
+          <a:ln>
+            <a:noFill/>
+          </a:ln>
+        </p:spPr>
+        <p:txBody>
+          <a:bodyPr spcFirstLastPara="1" wrap="square" lIns="91425" tIns="91425" rIns="91425" bIns="91425" anchor="ctr" anchorCtr="0">
+            <a:noAutofit/>
+          </a:bodyPr>
+          <a:lstStyle/>
+          <a:p>
+            <a:pPr marL="0" lvl="0" indent="0" algn="ctr" rtl="0">
+              <a:spcBef>
+                <a:spcPts val="0"/>
+              </a:spcBef>
+              <a:spcAft>
+                <a:spcPts val="0"/>
+              </a:spcAft>
+              <a:buNone/>
+            </a:pPr>
+            <a:r>
+              <a:rPr lang="en"/>
+              <a:t>—Someone Famous</a:t>
+            </a:r>
+            <a:endParaRPr/>
+          </a:p>
+        </p:txBody>
+      </p:sp>
+      <p:sp>
+        <p:nvSpPr>
+          <p:cNvPr id="355" name="Google Shape;355;p34"/>
+          <p:cNvSpPr txBox="1">
+            <a:spLocks noGrp="1"/>
+          </p:cNvSpPr>
+          <p:nvPr>
+            <p:ph type="sldNum" idx="12"/>
+          </p:nvPr>
+        </p:nvSpPr>
+        <p:spPr>
+          <a:xfrm>
+            <a:off x="4297650" y="4602875"/>
+            <a:ext cx="548700" cy="333600"/>
+          </a:xfrm>
+          <a:prstGeom prst="rect">
+            <a:avLst/>
+          </a:prstGeom>
+        </p:spPr>
+        <p:txBody>
+          <a:bodyPr spcFirstLastPara="1" wrap="square" lIns="91425" tIns="91425" rIns="91425" bIns="91425" anchor="t" anchorCtr="0">
+            <a:noAutofit/>
+          </a:bodyPr>
+          <a:lstStyle/>
+          <a:p>
+            <a:pPr marL="0" lvl="0" indent="0" algn="ctr" rtl="0">
+              <a:spcBef>
+                <a:spcPts val="0"/>
+              </a:spcBef>
+              <a:spcAft>
+                <a:spcPts val="0"/>
+              </a:spcAft>
+              <a:buNone/>
+            </a:pPr>
+            <a:fld id="{00000000-1234-1234-1234-123412341234}" type="slidenum">
+              <a:rPr lang="en"/>
+              <a:t>10</a:t>
+            </a:fld>
+            <a:endParaRPr/>
+          </a:p>
+        </p:txBody>
+      </p:sp>
+      <p:cxnSp>
+        <p:nvCxnSpPr>
+          <p:cNvPr id="356" name="Google Shape;356;p34"/>
+          <p:cNvCxnSpPr/>
+          <p:nvPr/>
+        </p:nvCxnSpPr>
+        <p:spPr>
+          <a:xfrm rot="10800000" flipH="1">
+            <a:off x="2553150" y="3923150"/>
+            <a:ext cx="4037700" cy="6600"/>
+          </a:xfrm>
+          <a:prstGeom prst="straightConnector1">
+            <a:avLst/>
+          </a:prstGeom>
+          <a:noFill/>
+          <a:ln w="19050" cap="flat" cmpd="sng">
+            <a:solidFill>
+              <a:schemeClr val="lt1"/>
+            </a:solidFill>
+            <a:prstDash val="solid"/>
+            <a:round/>
+            <a:headEnd type="oval" w="med" len="med"/>
+            <a:tailEnd type="oval" w="med" len="med"/>
+          </a:ln>
+        </p:spPr>
+      </p:cxnSp>
+      <p:cxnSp>
+        <p:nvCxnSpPr>
+          <p:cNvPr id="357" name="Google Shape;357;p34"/>
+          <p:cNvCxnSpPr/>
+          <p:nvPr/>
+        </p:nvCxnSpPr>
+        <p:spPr>
+          <a:xfrm rot="10800000" flipH="1">
+            <a:off x="2553150" y="3325025"/>
+            <a:ext cx="4037700" cy="6600"/>
+          </a:xfrm>
+          <a:prstGeom prst="straightConnector1">
+            <a:avLst/>
+          </a:prstGeom>
+          <a:noFill/>
+          <a:ln w="19050" cap="flat" cmpd="sng">
+            <a:solidFill>
+              <a:schemeClr val="lt1"/>
+            </a:solidFill>
+            <a:prstDash val="solid"/>
+            <a:round/>
+            <a:headEnd type="oval" w="med" len="med"/>
+            <a:tailEnd type="oval" w="med" len="med"/>
+          </a:ln>
+        </p:spPr>
+      </p:cxnSp>
+    </p:spTree>
+  </p:cSld>
+  <p:clrMapOvr>
+    <a:masterClrMapping/>
+  </p:clrMapOvr>
+</p:sld>
+</file>
+
+<file path=ppt/slides/slide11.xml><?xml version="1.0" encoding="utf-8"?>
+<p:sld xmlns:a="http://schemas.openxmlformats.org/drawingml/2006/main" xmlns:r="http://schemas.openxmlformats.org/officeDocument/2006/relationships" xmlns:p="http://schemas.openxmlformats.org/presentationml/2006/main">
+  <p:cSld>
+    <p:spTree>
+      <p:nvGrpSpPr>
         <p:cNvPr id="1" name="Shape 822"/>
         <p:cNvGrpSpPr/>
         <p:nvPr/>
@@ -12345,7 +12686,7 @@
             </a:pPr>
             <a:fld id="{00000000-1234-1234-1234-123412341234}" type="slidenum">
               <a:rPr lang="en"/>
-              <a:t>10</a:t>
+              <a:t>11</a:t>
             </a:fld>
             <a:endParaRPr/>
           </a:p>
@@ -17220,11 +17561,11 @@
       </p:sp>
       <p:pic>
         <p:nvPicPr>
-          <p:cNvPr id="3" name="Picture" title="This slide contains the following visuals: textbox ,textbox ,核心職能需求 ,工具需求. Please refer to the notes on this slide for details">
+          <p:cNvPr id="4" name="Picture" title="This slide contains the following visuals: textbox ,textbox ,Top 15 Skills ,Top 15 Tools. Please refer to the notes on this slide for details">
             <a:hlinkClick r:id="rId2"/>
             <a:extLst>
               <a:ext uri="{FF2B5EF4-FFF2-40B4-BE49-F238E27FC236}">
-                <a16:creationId xmlns:a16="http://schemas.microsoft.com/office/drawing/2014/main" id="{55E2FB74-CE14-866D-2281-76F1F6833790}"/>
+                <a16:creationId xmlns:a16="http://schemas.microsoft.com/office/drawing/2014/main" id="{44AF0090-901E-A0E3-95CB-DFDBC29E897D}"/>
               </a:ext>
             </a:extLst>
           </p:cNvPr>
@@ -17235,15 +17576,15 @@
         </p:nvPicPr>
         <p:blipFill>
           <a:blip r:embed="rId3"/>
-          <a:srcRect l="5305" t="3678" r="1331" b="6665"/>
+          <a:srcRect t="3274" r="1344" b="6425"/>
           <a:stretch>
             <a:fillRect/>
           </a:stretch>
         </p:blipFill>
         <p:spPr>
           <a:xfrm>
-            <a:off x="1167880" y="884937"/>
-            <a:ext cx="6808240" cy="3730046"/>
+            <a:off x="973112" y="927127"/>
+            <a:ext cx="7197777" cy="3758638"/>
           </a:xfrm>
           <a:prstGeom prst="rect">
             <a:avLst/>
@@ -17272,6 +17613,213 @@
 </file>
 
 <file path=ppt/slides/slide8.xml><?xml version="1.0" encoding="utf-8"?>
+<p:sld xmlns:a="http://schemas.openxmlformats.org/drawingml/2006/main" xmlns:r="http://schemas.openxmlformats.org/officeDocument/2006/relationships" xmlns:p="http://schemas.openxmlformats.org/presentationml/2006/main">
+  <p:cSld>
+    <p:spTree>
+      <p:nvGrpSpPr>
+        <p:cNvPr id="1" name="Shape 352">
+          <a:extLst>
+            <a:ext uri="{FF2B5EF4-FFF2-40B4-BE49-F238E27FC236}">
+              <a16:creationId xmlns:a16="http://schemas.microsoft.com/office/drawing/2014/main" id="{F5B0BC03-2AA9-600D-FBBE-77D998CEAE9E}"/>
+            </a:ext>
+          </a:extLst>
+        </p:cNvPr>
+        <p:cNvGrpSpPr/>
+        <p:nvPr/>
+      </p:nvGrpSpPr>
+      <p:grpSpPr>
+        <a:xfrm>
+          <a:off x="0" y="0"/>
+          <a:ext cx="0" cy="0"/>
+          <a:chOff x="0" y="0"/>
+          <a:chExt cx="0" cy="0"/>
+        </a:xfrm>
+      </p:grpSpPr>
+      <p:sp>
+        <p:nvSpPr>
+          <p:cNvPr id="355" name="Google Shape;355;p34">
+            <a:extLst>
+              <a:ext uri="{FF2B5EF4-FFF2-40B4-BE49-F238E27FC236}">
+                <a16:creationId xmlns:a16="http://schemas.microsoft.com/office/drawing/2014/main" id="{4A7A125A-0EE4-A7D0-00F1-EFBA1EC76214}"/>
+              </a:ext>
+            </a:extLst>
+          </p:cNvPr>
+          <p:cNvSpPr txBox="1">
+            <a:spLocks noGrp="1"/>
+          </p:cNvSpPr>
+          <p:nvPr>
+            <p:ph type="sldNum" idx="12"/>
+          </p:nvPr>
+        </p:nvSpPr>
+        <p:spPr>
+          <a:xfrm>
+            <a:off x="4297650" y="4602875"/>
+            <a:ext cx="548700" cy="333600"/>
+          </a:xfrm>
+          <a:prstGeom prst="rect">
+            <a:avLst/>
+          </a:prstGeom>
+        </p:spPr>
+        <p:txBody>
+          <a:bodyPr spcFirstLastPara="1" wrap="square" lIns="91425" tIns="91425" rIns="91425" bIns="91425" anchor="t" anchorCtr="0">
+            <a:noAutofit/>
+          </a:bodyPr>
+          <a:lstStyle/>
+          <a:p>
+            <a:pPr marL="0" lvl="0" indent="0" algn="ctr" rtl="0">
+              <a:spcBef>
+                <a:spcPts val="0"/>
+              </a:spcBef>
+              <a:spcAft>
+                <a:spcPts val="0"/>
+              </a:spcAft>
+              <a:buNone/>
+            </a:pPr>
+            <a:fld id="{00000000-1234-1234-1234-123412341234}" type="slidenum">
+              <a:rPr lang="en"/>
+              <a:t>8</a:t>
+            </a:fld>
+            <a:endParaRPr/>
+          </a:p>
+        </p:txBody>
+      </p:sp>
+      <p:pic>
+        <p:nvPicPr>
+          <p:cNvPr id="11" name="圖片 10">
+            <a:extLst>
+              <a:ext uri="{FF2B5EF4-FFF2-40B4-BE49-F238E27FC236}">
+                <a16:creationId xmlns:a16="http://schemas.microsoft.com/office/drawing/2014/main" id="{9137114D-2CD8-AD80-EACD-6589E5B1DE94}"/>
+              </a:ext>
+            </a:extLst>
+          </p:cNvPr>
+          <p:cNvPicPr>
+            <a:picLocks noChangeAspect="1"/>
+          </p:cNvPicPr>
+          <p:nvPr/>
+        </p:nvPicPr>
+        <p:blipFill>
+          <a:blip r:embed="rId3"/>
+          <a:stretch>
+            <a:fillRect/>
+          </a:stretch>
+        </p:blipFill>
+        <p:spPr>
+          <a:xfrm>
+            <a:off x="217898" y="967990"/>
+            <a:ext cx="4354101" cy="3359499"/>
+          </a:xfrm>
+          <a:prstGeom prst="rect">
+            <a:avLst/>
+          </a:prstGeom>
+          <a:ln>
+            <a:solidFill>
+              <a:schemeClr val="bg1">
+                <a:lumMod val="10000"/>
+              </a:schemeClr>
+            </a:solidFill>
+          </a:ln>
+        </p:spPr>
+      </p:pic>
+      <p:pic>
+        <p:nvPicPr>
+          <p:cNvPr id="13" name="圖片 12">
+            <a:extLst>
+              <a:ext uri="{FF2B5EF4-FFF2-40B4-BE49-F238E27FC236}">
+                <a16:creationId xmlns:a16="http://schemas.microsoft.com/office/drawing/2014/main" id="{0DB0C4A7-E7E1-0F2F-2A0A-80B1216CA969}"/>
+              </a:ext>
+            </a:extLst>
+          </p:cNvPr>
+          <p:cNvPicPr>
+            <a:picLocks noChangeAspect="1"/>
+          </p:cNvPicPr>
+          <p:nvPr/>
+        </p:nvPicPr>
+        <p:blipFill>
+          <a:blip r:embed="rId4"/>
+          <a:stretch>
+            <a:fillRect/>
+          </a:stretch>
+        </p:blipFill>
+        <p:spPr>
+          <a:xfrm>
+            <a:off x="4572000" y="967991"/>
+            <a:ext cx="4354100" cy="3359498"/>
+          </a:xfrm>
+          <a:prstGeom prst="rect">
+            <a:avLst/>
+          </a:prstGeom>
+          <a:ln>
+            <a:solidFill>
+              <a:schemeClr val="bg1">
+                <a:lumMod val="10000"/>
+              </a:schemeClr>
+            </a:solidFill>
+          </a:ln>
+        </p:spPr>
+      </p:pic>
+      <p:sp>
+        <p:nvSpPr>
+          <p:cNvPr id="14" name="文字方塊 13">
+            <a:extLst>
+              <a:ext uri="{FF2B5EF4-FFF2-40B4-BE49-F238E27FC236}">
+                <a16:creationId xmlns:a16="http://schemas.microsoft.com/office/drawing/2014/main" id="{E7C98D4C-83D3-20C7-FEBF-D561132C09C7}"/>
+              </a:ext>
+            </a:extLst>
+          </p:cNvPr>
+          <p:cNvSpPr txBox="1"/>
+          <p:nvPr/>
+        </p:nvSpPr>
+        <p:spPr>
+          <a:xfrm>
+            <a:off x="2286000" y="376464"/>
+            <a:ext cx="4572000" cy="523220"/>
+          </a:xfrm>
+          <a:prstGeom prst="rect">
+            <a:avLst/>
+          </a:prstGeom>
+          <a:noFill/>
+        </p:spPr>
+        <p:txBody>
+          <a:bodyPr wrap="square">
+            <a:spAutoFit/>
+          </a:bodyPr>
+          <a:lstStyle/>
+          <a:p>
+            <a:pPr algn="ctr"/>
+            <a:r>
+              <a:rPr lang="zh-TW" altLang="en-US" sz="2800" dirty="0">
+                <a:ln w="0"/>
+                <a:gradFill>
+                  <a:gsLst>
+                    <a:gs pos="21000">
+                      <a:srgbClr val="53575C"/>
+                    </a:gs>
+                    <a:gs pos="88000">
+                      <a:srgbClr val="C5C7CA"/>
+                    </a:gs>
+                  </a:gsLst>
+                  <a:lin ang="5400000"/>
+                </a:gradFill>
+              </a:rPr>
+              <a:t>圖表展示</a:t>
+            </a:r>
+          </a:p>
+        </p:txBody>
+      </p:sp>
+    </p:spTree>
+    <p:extLst>
+      <p:ext uri="{BB962C8B-B14F-4D97-AF65-F5344CB8AC3E}">
+        <p14:creationId xmlns:p14="http://schemas.microsoft.com/office/powerpoint/2010/main" val="2726357564"/>
+      </p:ext>
+    </p:extLst>
+  </p:cSld>
+  <p:clrMapOvr>
+    <a:masterClrMapping/>
+  </p:clrMapOvr>
+</p:sld>
+</file>
+
+<file path=ppt/slides/slide9.xml><?xml version="1.0" encoding="utf-8"?>
 <p:sld xmlns:a="http://schemas.openxmlformats.org/drawingml/2006/main" xmlns:r="http://schemas.openxmlformats.org/officeDocument/2006/relationships" xmlns:p="http://schemas.openxmlformats.org/presentationml/2006/main">
   <p:cSld>
     <p:spTree>
@@ -17324,7 +17872,7 @@
             </a:pPr>
             <a:fld id="{00000000-1234-1234-1234-123412341234}" type="slidenum">
               <a:rPr lang="en"/>
-              <a:t>8</a:t>
+              <a:t>9</a:t>
             </a:fld>
             <a:endParaRPr/>
           </a:p>
@@ -17416,212 +17964,6 @@
           </a:ln>
         </p:spPr>
       </p:pic>
-    </p:spTree>
-  </p:cSld>
-  <p:clrMapOvr>
-    <a:masterClrMapping/>
-  </p:clrMapOvr>
-</p:sld>
-</file>
-
-<file path=ppt/slides/slide9.xml><?xml version="1.0" encoding="utf-8"?>
-<p:sld xmlns:a="http://schemas.openxmlformats.org/drawingml/2006/main" xmlns:r="http://schemas.openxmlformats.org/officeDocument/2006/relationships" xmlns:p="http://schemas.openxmlformats.org/presentationml/2006/main">
-  <p:cSld>
-    <p:spTree>
-      <p:nvGrpSpPr>
-        <p:cNvPr id="1" name="Shape 352"/>
-        <p:cNvGrpSpPr/>
-        <p:nvPr/>
-      </p:nvGrpSpPr>
-      <p:grpSpPr>
-        <a:xfrm>
-          <a:off x="0" y="0"/>
-          <a:ext cx="0" cy="0"/>
-          <a:chOff x="0" y="0"/>
-          <a:chExt cx="0" cy="0"/>
-        </a:xfrm>
-      </p:grpSpPr>
-      <p:sp>
-        <p:nvSpPr>
-          <p:cNvPr id="353" name="Google Shape;353;p34"/>
-          <p:cNvSpPr txBox="1">
-            <a:spLocks noGrp="1"/>
-          </p:cNvSpPr>
-          <p:nvPr>
-            <p:ph type="subTitle" idx="1"/>
-          </p:nvPr>
-        </p:nvSpPr>
-        <p:spPr>
-          <a:xfrm>
-            <a:off x="969900" y="1312625"/>
-            <a:ext cx="7204200" cy="1478400"/>
-          </a:xfrm>
-          <a:prstGeom prst="rect">
-            <a:avLst/>
-          </a:prstGeom>
-        </p:spPr>
-        <p:txBody>
-          <a:bodyPr spcFirstLastPara="1" wrap="square" lIns="91425" tIns="91425" rIns="91425" bIns="91425" anchor="ctr" anchorCtr="0">
-            <a:noAutofit/>
-          </a:bodyPr>
-          <a:lstStyle/>
-          <a:p>
-            <a:pPr marL="0" lvl="0" indent="0" algn="ctr" rtl="0">
-              <a:spcBef>
-                <a:spcPts val="0"/>
-              </a:spcBef>
-              <a:spcAft>
-                <a:spcPts val="0"/>
-              </a:spcAft>
-              <a:buNone/>
-            </a:pPr>
-            <a:r>
-              <a:rPr lang="en" dirty="0"/>
-              <a:t>“This is a quote. Words full of wisdom that someone important said and can make the reader get inspired.”</a:t>
-            </a:r>
-            <a:endParaRPr dirty="0"/>
-          </a:p>
-        </p:txBody>
-      </p:sp>
-      <p:sp>
-        <p:nvSpPr>
-          <p:cNvPr id="354" name="Google Shape;354;p34"/>
-          <p:cNvSpPr txBox="1">
-            <a:spLocks noGrp="1"/>
-          </p:cNvSpPr>
-          <p:nvPr>
-            <p:ph type="title"/>
-          </p:nvPr>
-        </p:nvSpPr>
-        <p:spPr>
-          <a:xfrm>
-            <a:off x="969900" y="3387600"/>
-            <a:ext cx="7204200" cy="531900"/>
-          </a:xfrm>
-          <a:prstGeom prst="rect">
-            <a:avLst/>
-          </a:prstGeom>
-          <a:ln>
-            <a:noFill/>
-          </a:ln>
-        </p:spPr>
-        <p:txBody>
-          <a:bodyPr spcFirstLastPara="1" wrap="square" lIns="91425" tIns="91425" rIns="91425" bIns="91425" anchor="ctr" anchorCtr="0">
-            <a:noAutofit/>
-          </a:bodyPr>
-          <a:lstStyle/>
-          <a:p>
-            <a:pPr marL="0" lvl="0" indent="0" algn="ctr" rtl="0">
-              <a:spcBef>
-                <a:spcPts val="0"/>
-              </a:spcBef>
-              <a:spcAft>
-                <a:spcPts val="0"/>
-              </a:spcAft>
-              <a:buNone/>
-            </a:pPr>
-            <a:r>
-              <a:rPr lang="en"/>
-              <a:t>—Someone Famous</a:t>
-            </a:r>
-            <a:endParaRPr/>
-          </a:p>
-        </p:txBody>
-      </p:sp>
-      <p:sp>
-        <p:nvSpPr>
-          <p:cNvPr id="355" name="Google Shape;355;p34"/>
-          <p:cNvSpPr txBox="1">
-            <a:spLocks noGrp="1"/>
-          </p:cNvSpPr>
-          <p:nvPr>
-            <p:ph type="sldNum" idx="12"/>
-          </p:nvPr>
-        </p:nvSpPr>
-        <p:spPr>
-          <a:xfrm>
-            <a:off x="4297650" y="4602875"/>
-            <a:ext cx="548700" cy="333600"/>
-          </a:xfrm>
-          <a:prstGeom prst="rect">
-            <a:avLst/>
-          </a:prstGeom>
-        </p:spPr>
-        <p:txBody>
-          <a:bodyPr spcFirstLastPara="1" wrap="square" lIns="91425" tIns="91425" rIns="91425" bIns="91425" anchor="t" anchorCtr="0">
-            <a:noAutofit/>
-          </a:bodyPr>
-          <a:lstStyle/>
-          <a:p>
-            <a:pPr marL="0" lvl="0" indent="0" algn="ctr" rtl="0">
-              <a:spcBef>
-                <a:spcPts val="0"/>
-              </a:spcBef>
-              <a:spcAft>
-                <a:spcPts val="0"/>
-              </a:spcAft>
-              <a:buNone/>
-            </a:pPr>
-            <a:fld id="{00000000-1234-1234-1234-123412341234}" type="slidenum">
-              <a:rPr lang="en"/>
-              <a:t>9</a:t>
-            </a:fld>
-            <a:endParaRPr/>
-          </a:p>
-        </p:txBody>
-      </p:sp>
-      <p:cxnSp>
-        <p:nvCxnSpPr>
-          <p:cNvPr id="356" name="Google Shape;356;p34"/>
-          <p:cNvCxnSpPr/>
-          <p:nvPr/>
-        </p:nvCxnSpPr>
-        <p:spPr>
-          <a:xfrm rot="10800000" flipH="1">
-            <a:off x="2553150" y="3923150"/>
-            <a:ext cx="4037700" cy="6600"/>
-          </a:xfrm>
-          <a:prstGeom prst="straightConnector1">
-            <a:avLst/>
-          </a:prstGeom>
-          <a:noFill/>
-          <a:ln w="19050" cap="flat" cmpd="sng">
-            <a:solidFill>
-              <a:schemeClr val="lt1"/>
-            </a:solidFill>
-            <a:prstDash val="solid"/>
-            <a:round/>
-            <a:headEnd type="oval" w="med" len="med"/>
-            <a:tailEnd type="oval" w="med" len="med"/>
-          </a:ln>
-        </p:spPr>
-      </p:cxnSp>
-      <p:cxnSp>
-        <p:nvCxnSpPr>
-          <p:cNvPr id="357" name="Google Shape;357;p34"/>
-          <p:cNvCxnSpPr/>
-          <p:nvPr/>
-        </p:nvCxnSpPr>
-        <p:spPr>
-          <a:xfrm rot="10800000" flipH="1">
-            <a:off x="2553150" y="3325025"/>
-            <a:ext cx="4037700" cy="6600"/>
-          </a:xfrm>
-          <a:prstGeom prst="straightConnector1">
-            <a:avLst/>
-          </a:prstGeom>
-          <a:noFill/>
-          <a:ln w="19050" cap="flat" cmpd="sng">
-            <a:solidFill>
-              <a:schemeClr val="lt1"/>
-            </a:solidFill>
-            <a:prstDash val="solid"/>
-            <a:round/>
-            <a:headEnd type="oval" w="med" len="med"/>
-            <a:tailEnd type="oval" w="med" len="med"/>
-          </a:ln>
-        </p:spPr>
-      </p:cxnSp>
     </p:spTree>
   </p:cSld>
   <p:clrMapOvr>

--- a/程式介紹與展示.pptx
+++ b/程式介紹與展示.pptx
@@ -12168,7 +12168,7 @@
             </a:pPr>
             <a:r>
               <a:rPr lang="zh-TW" altLang="en-US" sz="3800" dirty="0"/>
-              <a:t>求職市場資料觀察</a:t>
+              <a:t>求職市場資料蒐集系統</a:t>
             </a:r>
             <a:endParaRPr sz="3800" dirty="0">
               <a:solidFill>
@@ -12296,7 +12296,7 @@
         </p:nvSpPr>
         <p:spPr>
           <a:xfrm>
-            <a:off x="2422825" y="1865525"/>
+            <a:off x="1953433" y="1865525"/>
             <a:ext cx="239400" cy="239400"/>
           </a:xfrm>
           <a:prstGeom prst="star4">
@@ -12342,7 +12342,7 @@
         </p:nvSpPr>
         <p:spPr>
           <a:xfrm>
-            <a:off x="6733600" y="1865525"/>
+            <a:off x="7133712" y="1865525"/>
             <a:ext cx="239400" cy="239400"/>
           </a:xfrm>
           <a:prstGeom prst="star4">
@@ -14417,11 +14417,11 @@
               </a:spcAft>
               <a:buNone/>
             </a:pPr>
-            <a:fld id="{00000000-1234-1234-1234-123412341234}" type="slidenum">
-              <a:rPr lang="en"/>
-              <a:t>2</a:t>
-            </a:fld>
-            <a:endParaRPr/>
+            <a:r>
+              <a:rPr lang="en" dirty="0"/>
+              <a:t>1</a:t>
+            </a:r>
+            <a:endParaRPr dirty="0"/>
           </a:p>
         </p:txBody>
       </p:sp>
@@ -14439,7 +14439,7 @@
         </p:nvSpPr>
         <p:spPr>
           <a:xfrm>
-            <a:off x="1608965" y="321719"/>
+            <a:off x="3658377" y="336959"/>
             <a:ext cx="1827246" cy="523220"/>
           </a:xfrm>
           <a:prstGeom prst="rect">
@@ -14487,7 +14487,7 @@
         </p:nvSpPr>
         <p:spPr>
           <a:xfrm>
-            <a:off x="1274064" y="1864573"/>
+            <a:off x="1642873" y="2601468"/>
             <a:ext cx="2350008" cy="1169551"/>
           </a:xfrm>
           <a:prstGeom prst="rect">
@@ -14582,7 +14582,7 @@
         </p:nvSpPr>
         <p:spPr>
           <a:xfrm>
-            <a:off x="1274064" y="794683"/>
+            <a:off x="1642873" y="1531578"/>
             <a:ext cx="2350008" cy="954107"/>
           </a:xfrm>
           <a:prstGeom prst="rect">
@@ -14638,10 +14638,10 @@
       </p:sp>
       <p:sp>
         <p:nvSpPr>
-          <p:cNvPr id="17" name="文字方塊 16">
+          <p:cNvPr id="12" name="文字方塊 11">
             <a:extLst>
               <a:ext uri="{FF2B5EF4-FFF2-40B4-BE49-F238E27FC236}">
-                <a16:creationId xmlns:a16="http://schemas.microsoft.com/office/drawing/2014/main" id="{A513E50B-1697-FD89-FF55-E286429F17DD}"/>
+                <a16:creationId xmlns:a16="http://schemas.microsoft.com/office/drawing/2014/main" id="{E9D94660-5172-6D36-10F5-00A1FE31C079}"/>
               </a:ext>
             </a:extLst>
           </p:cNvPr>
@@ -14650,8 +14650,8 @@
         </p:nvSpPr>
         <p:spPr>
           <a:xfrm>
-            <a:off x="1274064" y="3069336"/>
-            <a:ext cx="3075432" cy="1815882"/>
+            <a:off x="5047489" y="1531578"/>
+            <a:ext cx="3102864" cy="2410596"/>
           </a:xfrm>
           <a:prstGeom prst="rect">
             <a:avLst/>
@@ -14659,123 +14659,266 @@
           <a:noFill/>
         </p:spPr>
         <p:txBody>
-          <a:bodyPr wrap="square" rtlCol="0">
+          <a:bodyPr wrap="square">
             <a:spAutoFit/>
           </a:bodyPr>
           <a:lstStyle/>
           <a:p>
+            <a:pPr>
+              <a:lnSpc>
+                <a:spcPct val="115000"/>
+              </a:lnSpc>
+              <a:spcAft>
+                <a:spcPts val="800"/>
+              </a:spcAft>
+              <a:buNone/>
+            </a:pPr>
             <a:r>
-              <a:rPr lang="zh-TW" altLang="en-US" dirty="0"/>
+              <a:rPr lang="zh-TW" altLang="zh-TW" sz="1400" kern="100" dirty="0">
+                <a:effectLst/>
+                <a:latin typeface="Arial" panose="020B0604020202020204" pitchFamily="34" charset="0"/>
+                <a:ea typeface="新細明體" panose="02020500000000000000" pitchFamily="18" charset="-120"/>
+                <a:cs typeface="Arial" panose="020B0604020202020204" pitchFamily="34" charset="0"/>
+              </a:rPr>
               <a:t>專案使用到的技術</a:t>
             </a:r>
-            <a:endParaRPr lang="en-US" altLang="zh-TW" dirty="0"/>
+            <a:endParaRPr lang="zh-TW" altLang="zh-TW" sz="1200" kern="100" dirty="0">
+              <a:effectLst/>
+              <a:latin typeface="Aptos" panose="020B0004020202020204" pitchFamily="34" charset="0"/>
+              <a:ea typeface="新細明體" panose="02020500000000000000" pitchFamily="18" charset="-120"/>
+              <a:cs typeface="Times New Roman" panose="02020603050405020304" pitchFamily="18" charset="0"/>
+            </a:endParaRPr>
           </a:p>
           <a:p>
-            <a:pPr marL="285750" indent="-285750">
+            <a:pPr marL="342900" lvl="0" indent="-342900">
+              <a:lnSpc>
+                <a:spcPct val="115000"/>
+              </a:lnSpc>
               <a:buFont typeface="Wingdings" panose="05000000000000000000" pitchFamily="2" charset="2"/>
-              <a:buChar char="Ø"/>
+              <a:buChar char=""/>
             </a:pPr>
             <a:r>
-              <a:rPr lang="en-US" altLang="zh-TW" dirty="0"/>
+              <a:rPr lang="en-US" altLang="zh-TW" sz="1400" kern="100" dirty="0">
+                <a:effectLst/>
+                <a:latin typeface="Arial" panose="020B0604020202020204" pitchFamily="34" charset="0"/>
+                <a:ea typeface="新細明體" panose="02020500000000000000" pitchFamily="18" charset="-120"/>
+                <a:cs typeface="Times New Roman" panose="02020603050405020304" pitchFamily="18" charset="0"/>
+              </a:rPr>
               <a:t>Python</a:t>
             </a:r>
+            <a:endParaRPr lang="zh-TW" altLang="zh-TW" sz="1200" kern="100" dirty="0">
+              <a:effectLst/>
+              <a:latin typeface="Aptos" panose="020B0004020202020204" pitchFamily="34" charset="0"/>
+              <a:ea typeface="新細明體" panose="02020500000000000000" pitchFamily="18" charset="-120"/>
+              <a:cs typeface="Times New Roman" panose="02020603050405020304" pitchFamily="18" charset="0"/>
+            </a:endParaRPr>
           </a:p>
           <a:p>
-            <a:pPr marL="285750" indent="-285750">
-              <a:buFont typeface="Wingdings" panose="05000000000000000000" pitchFamily="2" charset="2"/>
-              <a:buChar char="Ø"/>
+            <a:pPr marL="742950" lvl="1" indent="-285750">
+              <a:lnSpc>
+                <a:spcPct val="115000"/>
+              </a:lnSpc>
+              <a:buFont typeface="Aptos" panose="020B0004020202020204" pitchFamily="34" charset="0"/>
+              <a:buChar char="-"/>
             </a:pPr>
             <a:r>
-              <a:rPr lang="en-US" altLang="zh-TW" dirty="0"/>
+              <a:rPr lang="en-US" altLang="zh-TW" sz="1400" kern="100" dirty="0">
+                <a:effectLst/>
+                <a:latin typeface="Arial" panose="020B0604020202020204" pitchFamily="34" charset="0"/>
+                <a:ea typeface="新細明體" panose="02020500000000000000" pitchFamily="18" charset="-120"/>
+                <a:cs typeface="Times New Roman" panose="02020603050405020304" pitchFamily="18" charset="0"/>
+              </a:rPr>
+              <a:t>requests</a:t>
+            </a:r>
+            <a:endParaRPr lang="zh-TW" altLang="zh-TW" sz="1200" kern="100" dirty="0">
+              <a:effectLst/>
+              <a:latin typeface="Aptos" panose="020B0004020202020204" pitchFamily="34" charset="0"/>
+              <a:ea typeface="新細明體" panose="02020500000000000000" pitchFamily="18" charset="-120"/>
+              <a:cs typeface="Times New Roman" panose="02020603050405020304" pitchFamily="18" charset="0"/>
+            </a:endParaRPr>
+          </a:p>
+          <a:p>
+            <a:pPr marL="742950" lvl="1" indent="-285750">
+              <a:lnSpc>
+                <a:spcPct val="115000"/>
+              </a:lnSpc>
+              <a:buFont typeface="Aptos" panose="020B0004020202020204" pitchFamily="34" charset="0"/>
+              <a:buChar char="-"/>
+            </a:pPr>
+            <a:r>
+              <a:rPr lang="en-US" altLang="zh-TW" sz="1400" kern="100" dirty="0">
+                <a:effectLst/>
+                <a:latin typeface="Arial" panose="020B0604020202020204" pitchFamily="34" charset="0"/>
+                <a:ea typeface="新細明體" panose="02020500000000000000" pitchFamily="18" charset="-120"/>
+                <a:cs typeface="Times New Roman" panose="02020603050405020304" pitchFamily="18" charset="0"/>
+              </a:rPr>
+              <a:t>pymongo</a:t>
+            </a:r>
+            <a:endParaRPr lang="zh-TW" altLang="zh-TW" sz="1200" kern="100" dirty="0">
+              <a:effectLst/>
+              <a:latin typeface="Aptos" panose="020B0004020202020204" pitchFamily="34" charset="0"/>
+              <a:ea typeface="新細明體" panose="02020500000000000000" pitchFamily="18" charset="-120"/>
+              <a:cs typeface="Times New Roman" panose="02020603050405020304" pitchFamily="18" charset="0"/>
+            </a:endParaRPr>
+          </a:p>
+          <a:p>
+            <a:pPr marL="742950" lvl="1" indent="-285750">
+              <a:lnSpc>
+                <a:spcPct val="115000"/>
+              </a:lnSpc>
+              <a:buFont typeface="Aptos" panose="020B0004020202020204" pitchFamily="34" charset="0"/>
+              <a:buChar char="-"/>
+            </a:pPr>
+            <a:r>
+              <a:rPr lang="en-US" altLang="zh-TW" sz="1400" kern="100" dirty="0">
+                <a:effectLst/>
+                <a:latin typeface="Arial" panose="020B0604020202020204" pitchFamily="34" charset="0"/>
+                <a:ea typeface="新細明體" panose="02020500000000000000" pitchFamily="18" charset="-120"/>
+                <a:cs typeface="Times New Roman" panose="02020603050405020304" pitchFamily="18" charset="0"/>
+              </a:rPr>
+              <a:t>pandas</a:t>
+            </a:r>
+            <a:endParaRPr lang="zh-TW" altLang="zh-TW" sz="1200" kern="100" dirty="0">
+              <a:effectLst/>
+              <a:latin typeface="Aptos" panose="020B0004020202020204" pitchFamily="34" charset="0"/>
+              <a:ea typeface="新細明體" panose="02020500000000000000" pitchFamily="18" charset="-120"/>
+              <a:cs typeface="Times New Roman" panose="02020603050405020304" pitchFamily="18" charset="0"/>
+            </a:endParaRPr>
+          </a:p>
+          <a:p>
+            <a:pPr marL="742950" lvl="1" indent="-285750">
+              <a:lnSpc>
+                <a:spcPct val="115000"/>
+              </a:lnSpc>
+              <a:buFont typeface="Aptos" panose="020B0004020202020204" pitchFamily="34" charset="0"/>
+              <a:buChar char="-"/>
+            </a:pPr>
+            <a:r>
+              <a:rPr lang="en-US" altLang="zh-TW" sz="1400" kern="100" dirty="0">
+                <a:effectLst/>
+                <a:latin typeface="Arial" panose="020B0604020202020204" pitchFamily="34" charset="0"/>
+                <a:ea typeface="新細明體" panose="02020500000000000000" pitchFamily="18" charset="-120"/>
+                <a:cs typeface="Times New Roman" panose="02020603050405020304" pitchFamily="18" charset="0"/>
+              </a:rPr>
+              <a:t>click</a:t>
+            </a:r>
+            <a:endParaRPr lang="zh-TW" altLang="zh-TW" sz="1200" kern="100" dirty="0">
+              <a:effectLst/>
+              <a:latin typeface="Aptos" panose="020B0004020202020204" pitchFamily="34" charset="0"/>
+              <a:ea typeface="新細明體" panose="02020500000000000000" pitchFamily="18" charset="-120"/>
+              <a:cs typeface="Times New Roman" panose="02020603050405020304" pitchFamily="18" charset="0"/>
+            </a:endParaRPr>
+          </a:p>
+          <a:p>
+            <a:pPr marL="342900" lvl="0" indent="-342900">
+              <a:lnSpc>
+                <a:spcPct val="115000"/>
+              </a:lnSpc>
+              <a:buFont typeface="Wingdings" panose="05000000000000000000" pitchFamily="2" charset="2"/>
+              <a:buChar char=""/>
+            </a:pPr>
+            <a:r>
+              <a:rPr lang="en-US" altLang="zh-TW" sz="1400" kern="100" dirty="0">
+                <a:effectLst/>
+                <a:latin typeface="Arial" panose="020B0604020202020204" pitchFamily="34" charset="0"/>
+                <a:ea typeface="新細明體" panose="02020500000000000000" pitchFamily="18" charset="-120"/>
+                <a:cs typeface="Times New Roman" panose="02020603050405020304" pitchFamily="18" charset="0"/>
+              </a:rPr>
               <a:t>uv (</a:t>
             </a:r>
             <a:r>
-              <a:rPr lang="zh-TW" altLang="en-US" dirty="0"/>
+              <a:rPr lang="zh-TW" altLang="zh-TW" sz="1400" kern="100" dirty="0">
+                <a:effectLst/>
+                <a:latin typeface="Arial" panose="020B0604020202020204" pitchFamily="34" charset="0"/>
+                <a:ea typeface="新細明體" panose="02020500000000000000" pitchFamily="18" charset="-120"/>
+                <a:cs typeface="Arial" panose="020B0604020202020204" pitchFamily="34" charset="0"/>
+              </a:rPr>
               <a:t>專案</a:t>
             </a:r>
             <a:r>
-              <a:rPr lang="en-US" altLang="zh-TW" dirty="0"/>
+              <a:rPr lang="en-US" altLang="zh-TW" sz="1400" kern="100" dirty="0">
+                <a:effectLst/>
+                <a:latin typeface="Arial" panose="020B0604020202020204" pitchFamily="34" charset="0"/>
+                <a:ea typeface="新細明體" panose="02020500000000000000" pitchFamily="18" charset="-120"/>
+                <a:cs typeface="Times New Roman" panose="02020603050405020304" pitchFamily="18" charset="0"/>
+              </a:rPr>
               <a:t>/</a:t>
             </a:r>
             <a:r>
-              <a:rPr lang="zh-TW" altLang="en-US" dirty="0"/>
+              <a:rPr lang="zh-TW" altLang="zh-TW" sz="1400" kern="100" dirty="0">
+                <a:effectLst/>
+                <a:latin typeface="Arial" panose="020B0604020202020204" pitchFamily="34" charset="0"/>
+                <a:ea typeface="新細明體" panose="02020500000000000000" pitchFamily="18" charset="-120"/>
+                <a:cs typeface="Arial" panose="020B0604020202020204" pitchFamily="34" charset="0"/>
+              </a:rPr>
               <a:t>環境管理</a:t>
             </a:r>
             <a:r>
-              <a:rPr lang="en-US" altLang="zh-TW" dirty="0"/>
+              <a:rPr lang="en-US" altLang="zh-TW" sz="1400" kern="100" dirty="0">
+                <a:effectLst/>
+                <a:latin typeface="Arial" panose="020B0604020202020204" pitchFamily="34" charset="0"/>
+                <a:ea typeface="新細明體" panose="02020500000000000000" pitchFamily="18" charset="-120"/>
+                <a:cs typeface="Times New Roman" panose="02020603050405020304" pitchFamily="18" charset="0"/>
+              </a:rPr>
               <a:t>)</a:t>
             </a:r>
+            <a:endParaRPr lang="zh-TW" altLang="zh-TW" sz="1200" kern="100" dirty="0">
+              <a:effectLst/>
+              <a:latin typeface="Aptos" panose="020B0004020202020204" pitchFamily="34" charset="0"/>
+              <a:ea typeface="新細明體" panose="02020500000000000000" pitchFamily="18" charset="-120"/>
+              <a:cs typeface="Times New Roman" panose="02020603050405020304" pitchFamily="18" charset="0"/>
+            </a:endParaRPr>
           </a:p>
           <a:p>
-            <a:pPr marL="285750" indent="-285750">
+            <a:pPr marL="342900" lvl="0" indent="-342900">
+              <a:lnSpc>
+                <a:spcPct val="115000"/>
+              </a:lnSpc>
               <a:buFont typeface="Wingdings" panose="05000000000000000000" pitchFamily="2" charset="2"/>
-              <a:buChar char="Ø"/>
+              <a:buChar char=""/>
             </a:pPr>
             <a:r>
-              <a:rPr lang="en-US" altLang="zh-TW" dirty="0"/>
-              <a:t>Ruff (Formatter and Linter)</a:t>
+              <a:rPr lang="en-US" altLang="zh-TW" sz="1400" kern="100" dirty="0">
+                <a:effectLst/>
+                <a:latin typeface="Arial" panose="020B0604020202020204" pitchFamily="34" charset="0"/>
+                <a:ea typeface="新細明體" panose="02020500000000000000" pitchFamily="18" charset="-120"/>
+                <a:cs typeface="Times New Roman" panose="02020603050405020304" pitchFamily="18" charset="0"/>
+              </a:rPr>
+              <a:t>MongoDB Altas (store JSON like)</a:t>
             </a:r>
+            <a:endParaRPr lang="zh-TW" altLang="zh-TW" sz="1200" kern="100" dirty="0">
+              <a:effectLst/>
+              <a:latin typeface="Aptos" panose="020B0004020202020204" pitchFamily="34" charset="0"/>
+              <a:ea typeface="新細明體" panose="02020500000000000000" pitchFamily="18" charset="-120"/>
+              <a:cs typeface="Times New Roman" panose="02020603050405020304" pitchFamily="18" charset="0"/>
+            </a:endParaRPr>
           </a:p>
           <a:p>
-            <a:pPr marL="285750" indent="-285750">
+            <a:pPr marL="342900" lvl="0" indent="-342900">
+              <a:lnSpc>
+                <a:spcPct val="115000"/>
+              </a:lnSpc>
+              <a:spcAft>
+                <a:spcPts val="800"/>
+              </a:spcAft>
               <a:buFont typeface="Wingdings" panose="05000000000000000000" pitchFamily="2" charset="2"/>
-              <a:buChar char="Ø"/>
+              <a:buChar char=""/>
             </a:pPr>
             <a:r>
-              <a:rPr lang="en-US" altLang="zh-TW" dirty="0"/>
-              <a:t>MongoDB</a:t>
-            </a:r>
-            <a:r>
-              <a:rPr lang="zh-TW" altLang="en-US" dirty="0"/>
-              <a:t> </a:t>
-            </a:r>
-            <a:r>
-              <a:rPr lang="en-US" altLang="zh-TW" dirty="0"/>
-              <a:t>Altas</a:t>
-            </a:r>
-            <a:r>
-              <a:rPr lang="zh-TW" altLang="en-US" dirty="0"/>
-              <a:t> </a:t>
-            </a:r>
-            <a:r>
-              <a:rPr lang="en-US" altLang="zh-TW" dirty="0"/>
-              <a:t>(store JSON</a:t>
-            </a:r>
-            <a:r>
-              <a:rPr lang="zh-TW" altLang="en-US" dirty="0"/>
-              <a:t> </a:t>
-            </a:r>
-            <a:r>
-              <a:rPr lang="en-US" altLang="zh-TW" dirty="0"/>
-              <a:t>like)</a:t>
-            </a:r>
-          </a:p>
-          <a:p>
-            <a:pPr marL="285750" indent="-285750">
-              <a:buFont typeface="Wingdings" panose="05000000000000000000" pitchFamily="2" charset="2"/>
-              <a:buChar char="Ø"/>
-            </a:pPr>
-            <a:r>
-              <a:rPr lang="en-US" altLang="zh-TW" dirty="0"/>
+              <a:rPr lang="en-US" altLang="zh-TW" sz="1400" kern="100" dirty="0">
+                <a:effectLst/>
+                <a:latin typeface="Arial" panose="020B0604020202020204" pitchFamily="34" charset="0"/>
+                <a:ea typeface="新細明體" panose="02020500000000000000" pitchFamily="18" charset="-120"/>
+                <a:cs typeface="Times New Roman" panose="02020603050405020304" pitchFamily="18" charset="0"/>
+              </a:rPr>
               <a:t>Power BI</a:t>
             </a:r>
-          </a:p>
-          <a:p>
-            <a:pPr marL="285750" indent="-285750">
-              <a:buFont typeface="Wingdings" panose="05000000000000000000" pitchFamily="2" charset="2"/>
-              <a:buChar char="Ø"/>
-            </a:pPr>
-            <a:r>
-              <a:rPr lang="en-US" altLang="zh-TW" dirty="0"/>
-              <a:t>Gemini</a:t>
-            </a:r>
-          </a:p>
-          <a:p>
-            <a:pPr marL="285750" indent="-285750">
-              <a:buFont typeface="Arial" panose="020B0604020202020204" pitchFamily="34" charset="0"/>
-              <a:buChar char="•"/>
-            </a:pPr>
-            <a:endParaRPr lang="en-US" altLang="zh-TW" dirty="0"/>
+            <a:endParaRPr lang="zh-TW" altLang="zh-TW" sz="1200" kern="100" dirty="0">
+              <a:effectLst/>
+              <a:latin typeface="Aptos" panose="020B0004020202020204" pitchFamily="34" charset="0"/>
+              <a:ea typeface="新細明體" panose="02020500000000000000" pitchFamily="18" charset="-120"/>
+              <a:cs typeface="Times New Roman" panose="02020603050405020304" pitchFamily="18" charset="0"/>
+            </a:endParaRPr>
           </a:p>
         </p:txBody>
       </p:sp>
@@ -14880,11 +15023,11 @@
               </a:spcAft>
               <a:buNone/>
             </a:pPr>
-            <a:fld id="{00000000-1234-1234-1234-123412341234}" type="slidenum">
-              <a:rPr lang="en"/>
-              <a:t>3</a:t>
-            </a:fld>
-            <a:endParaRPr/>
+            <a:r>
+              <a:rPr lang="en" dirty="0"/>
+              <a:t>2</a:t>
+            </a:r>
+            <a:endParaRPr dirty="0"/>
           </a:p>
         </p:txBody>
       </p:sp>
@@ -16032,11 +16175,11 @@
               </a:spcAft>
               <a:buNone/>
             </a:pPr>
-            <a:fld id="{00000000-1234-1234-1234-123412341234}" type="slidenum">
-              <a:rPr lang="en"/>
-              <a:t>4</a:t>
-            </a:fld>
-            <a:endParaRPr/>
+            <a:r>
+              <a:rPr lang="en" dirty="0"/>
+              <a:t>3</a:t>
+            </a:r>
+            <a:endParaRPr dirty="0"/>
           </a:p>
         </p:txBody>
       </p:sp>
@@ -16235,7 +16378,7 @@
         </p:nvSpPr>
         <p:spPr>
           <a:xfrm>
-            <a:off x="6813251" y="979520"/>
+            <a:off x="6675129" y="941870"/>
             <a:ext cx="1566672" cy="307777"/>
           </a:xfrm>
           <a:prstGeom prst="rect">
@@ -16251,7 +16394,7 @@
           <a:p>
             <a:r>
               <a:rPr lang="en-US" altLang="zh-TW" dirty="0"/>
-              <a:t>A</a:t>
+              <a:t>Original</a:t>
             </a:r>
             <a:r>
               <a:rPr lang="zh-TW" altLang="en-US" dirty="0"/>
@@ -16287,8 +16430,8 @@
         </p:blipFill>
         <p:spPr>
           <a:xfrm>
-            <a:off x="6889790" y="1287297"/>
-            <a:ext cx="1236169" cy="1648886"/>
+            <a:off x="6797704" y="1279027"/>
+            <a:ext cx="1321522" cy="1762736"/>
           </a:xfrm>
           <a:prstGeom prst="rect">
             <a:avLst/>
@@ -16437,14 +16580,15 @@
             </a:extLst>
           </p:cNvPr>
           <p:cNvCxnSpPr>
+            <a:cxnSpLocks/>
             <a:stCxn id="335" idx="2"/>
           </p:cNvCxnSpPr>
           <p:nvPr/>
         </p:nvCxnSpPr>
         <p:spPr>
           <a:xfrm>
-            <a:off x="7507875" y="2936183"/>
-            <a:ext cx="6756" cy="283884"/>
+            <a:off x="7458465" y="3041763"/>
+            <a:ext cx="0" cy="257469"/>
           </a:xfrm>
           <a:prstGeom prst="straightConnector1">
             <a:avLst/>
@@ -16570,11 +16714,11 @@
               </a:spcAft>
               <a:buNone/>
             </a:pPr>
-            <a:fld id="{00000000-1234-1234-1234-123412341234}" type="slidenum">
-              <a:rPr lang="en"/>
-              <a:t>5</a:t>
-            </a:fld>
-            <a:endParaRPr/>
+            <a:r>
+              <a:rPr lang="en" dirty="0"/>
+              <a:t>4</a:t>
+            </a:r>
+            <a:endParaRPr dirty="0"/>
           </a:p>
         </p:txBody>
       </p:sp>
@@ -17035,11 +17179,11 @@
               </a:spcAft>
               <a:buNone/>
             </a:pPr>
-            <a:fld id="{00000000-1234-1234-1234-123412341234}" type="slidenum">
-              <a:rPr lang="en"/>
-              <a:t>6</a:t>
-            </a:fld>
-            <a:endParaRPr/>
+            <a:r>
+              <a:rPr lang="en" dirty="0"/>
+              <a:t>5</a:t>
+            </a:r>
+            <a:endParaRPr dirty="0"/>
           </a:p>
         </p:txBody>
       </p:sp>
@@ -17374,8 +17518,8 @@
         </p:blipFill>
         <p:spPr>
           <a:xfrm>
-            <a:off x="6596911" y="3108296"/>
-            <a:ext cx="1287136" cy="531199"/>
+            <a:off x="6557965" y="3020705"/>
+            <a:ext cx="1548000" cy="638857"/>
           </a:xfrm>
           <a:prstGeom prst="rect">
             <a:avLst/>
@@ -17404,8 +17548,8 @@
         </p:blipFill>
         <p:spPr>
           <a:xfrm>
-            <a:off x="6596911" y="2257598"/>
-            <a:ext cx="1471543" cy="572627"/>
+            <a:off x="6557966" y="1647998"/>
+            <a:ext cx="1548000" cy="602379"/>
           </a:xfrm>
           <a:prstGeom prst="rect">
             <a:avLst/>
@@ -17434,8 +17578,68 @@
         </p:blipFill>
         <p:spPr>
           <a:xfrm>
-            <a:off x="6596911" y="1404702"/>
-            <a:ext cx="1546570" cy="532153"/>
+            <a:off x="6559396" y="1024128"/>
+            <a:ext cx="1546570" cy="560465"/>
+          </a:xfrm>
+          <a:prstGeom prst="rect">
+            <a:avLst/>
+          </a:prstGeom>
+        </p:spPr>
+      </p:pic>
+      <p:pic>
+        <p:nvPicPr>
+          <p:cNvPr id="3" name="圖片 2">
+            <a:extLst>
+              <a:ext uri="{FF2B5EF4-FFF2-40B4-BE49-F238E27FC236}">
+                <a16:creationId xmlns:a16="http://schemas.microsoft.com/office/drawing/2014/main" id="{8E11C3EB-4470-9F46-27A2-962E1B6DBAFC}"/>
+              </a:ext>
+            </a:extLst>
+          </p:cNvPr>
+          <p:cNvPicPr>
+            <a:picLocks noChangeAspect="1"/>
+          </p:cNvPicPr>
+          <p:nvPr/>
+        </p:nvPicPr>
+        <p:blipFill>
+          <a:blip r:embed="rId10"/>
+          <a:stretch>
+            <a:fillRect/>
+          </a:stretch>
+        </p:blipFill>
+        <p:spPr>
+          <a:xfrm>
+            <a:off x="6557965" y="3750404"/>
+            <a:ext cx="1548000" cy="705824"/>
+          </a:xfrm>
+          <a:prstGeom prst="rect">
+            <a:avLst/>
+          </a:prstGeom>
+        </p:spPr>
+      </p:pic>
+      <p:pic>
+        <p:nvPicPr>
+          <p:cNvPr id="5" name="圖片 4">
+            <a:extLst>
+              <a:ext uri="{FF2B5EF4-FFF2-40B4-BE49-F238E27FC236}">
+                <a16:creationId xmlns:a16="http://schemas.microsoft.com/office/drawing/2014/main" id="{3A27B790-684A-A807-56F4-8A529B09CF43}"/>
+              </a:ext>
+            </a:extLst>
+          </p:cNvPr>
+          <p:cNvPicPr>
+            <a:picLocks noChangeAspect="1"/>
+          </p:cNvPicPr>
+          <p:nvPr/>
+        </p:nvPicPr>
+        <p:blipFill>
+          <a:blip r:embed="rId11"/>
+          <a:stretch>
+            <a:fillRect/>
+          </a:stretch>
+        </p:blipFill>
+        <p:spPr>
+          <a:xfrm>
+            <a:off x="6557966" y="2341219"/>
+            <a:ext cx="1548000" cy="588644"/>
           </a:xfrm>
           <a:prstGeom prst="rect">
             <a:avLst/>
@@ -17503,8 +17707,8 @@
               <a:buNone/>
             </a:pPr>
             <a:r>
-              <a:rPr lang="en-US" altLang="zh-TW" dirty="0"/>
-              <a:t>2</a:t>
+              <a:rPr lang="en-US" dirty="0"/>
+              <a:t>6</a:t>
             </a:r>
             <a:endParaRPr lang="en" dirty="0"/>
           </a:p>
@@ -17675,11 +17879,11 @@
               </a:spcAft>
               <a:buNone/>
             </a:pPr>
-            <a:fld id="{00000000-1234-1234-1234-123412341234}" type="slidenum">
-              <a:rPr lang="en"/>
-              <a:t>8</a:t>
-            </a:fld>
-            <a:endParaRPr/>
+            <a:r>
+              <a:rPr lang="en" dirty="0"/>
+              <a:t>7</a:t>
+            </a:r>
+            <a:endParaRPr dirty="0"/>
           </a:p>
         </p:txBody>
       </p:sp>
@@ -17870,11 +18074,11 @@
               </a:spcAft>
               <a:buNone/>
             </a:pPr>
-            <a:fld id="{00000000-1234-1234-1234-123412341234}" type="slidenum">
-              <a:rPr lang="en"/>
-              <a:t>9</a:t>
-            </a:fld>
-            <a:endParaRPr/>
+            <a:r>
+              <a:rPr lang="en" dirty="0"/>
+              <a:t>8</a:t>
+            </a:r>
+            <a:endParaRPr dirty="0"/>
           </a:p>
         </p:txBody>
       </p:sp>

--- a/程式介紹與展示.pptx
+++ b/程式介紹與展示.pptx
@@ -12446,93 +12446,6 @@
       </p:grpSpPr>
       <p:sp>
         <p:nvSpPr>
-          <p:cNvPr id="353" name="Google Shape;353;p34"/>
-          <p:cNvSpPr txBox="1">
-            <a:spLocks noGrp="1"/>
-          </p:cNvSpPr>
-          <p:nvPr>
-            <p:ph type="subTitle" idx="1"/>
-          </p:nvPr>
-        </p:nvSpPr>
-        <p:spPr>
-          <a:xfrm>
-            <a:off x="969900" y="1312625"/>
-            <a:ext cx="7204200" cy="1478400"/>
-          </a:xfrm>
-          <a:prstGeom prst="rect">
-            <a:avLst/>
-          </a:prstGeom>
-        </p:spPr>
-        <p:txBody>
-          <a:bodyPr spcFirstLastPara="1" wrap="square" lIns="91425" tIns="91425" rIns="91425" bIns="91425" anchor="ctr" anchorCtr="0">
-            <a:noAutofit/>
-          </a:bodyPr>
-          <a:lstStyle/>
-          <a:p>
-            <a:pPr marL="0" lvl="0" indent="0" algn="ctr" rtl="0">
-              <a:spcBef>
-                <a:spcPts val="0"/>
-              </a:spcBef>
-              <a:spcAft>
-                <a:spcPts val="0"/>
-              </a:spcAft>
-              <a:buNone/>
-            </a:pPr>
-            <a:r>
-              <a:rPr lang="en" dirty="0"/>
-              <a:t>“This is a quote. Words full of wisdom that someone important said and can make the reader get inspired.”</a:t>
-            </a:r>
-            <a:endParaRPr dirty="0"/>
-          </a:p>
-        </p:txBody>
-      </p:sp>
-      <p:sp>
-        <p:nvSpPr>
-          <p:cNvPr id="354" name="Google Shape;354;p34"/>
-          <p:cNvSpPr txBox="1">
-            <a:spLocks noGrp="1"/>
-          </p:cNvSpPr>
-          <p:nvPr>
-            <p:ph type="title"/>
-          </p:nvPr>
-        </p:nvSpPr>
-        <p:spPr>
-          <a:xfrm>
-            <a:off x="969900" y="3387600"/>
-            <a:ext cx="7204200" cy="531900"/>
-          </a:xfrm>
-          <a:prstGeom prst="rect">
-            <a:avLst/>
-          </a:prstGeom>
-          <a:ln>
-            <a:noFill/>
-          </a:ln>
-        </p:spPr>
-        <p:txBody>
-          <a:bodyPr spcFirstLastPara="1" wrap="square" lIns="91425" tIns="91425" rIns="91425" bIns="91425" anchor="ctr" anchorCtr="0">
-            <a:noAutofit/>
-          </a:bodyPr>
-          <a:lstStyle/>
-          <a:p>
-            <a:pPr marL="0" lvl="0" indent="0" algn="ctr" rtl="0">
-              <a:spcBef>
-                <a:spcPts val="0"/>
-              </a:spcBef>
-              <a:spcAft>
-                <a:spcPts val="0"/>
-              </a:spcAft>
-              <a:buNone/>
-            </a:pPr>
-            <a:r>
-              <a:rPr lang="en"/>
-              <a:t>—Someone Famous</a:t>
-            </a:r>
-            <a:endParaRPr/>
-          </a:p>
-        </p:txBody>
-      </p:sp>
-      <p:sp>
-        <p:nvSpPr>
           <p:cNvPr id="355" name="Google Shape;355;p34"/>
           <p:cNvSpPr txBox="1">
             <a:spLocks noGrp="1"/>
@@ -12573,58 +12486,131 @@
           </a:p>
         </p:txBody>
       </p:sp>
-      <p:cxnSp>
-        <p:nvCxnSpPr>
-          <p:cNvPr id="356" name="Google Shape;356;p34"/>
-          <p:cNvCxnSpPr/>
+      <p:pic>
+        <p:nvPicPr>
+          <p:cNvPr id="7" name="圖片 6">
+            <a:extLst>
+              <a:ext uri="{FF2B5EF4-FFF2-40B4-BE49-F238E27FC236}">
+                <a16:creationId xmlns:a16="http://schemas.microsoft.com/office/drawing/2014/main" id="{F5E276D0-C0C1-593E-AB48-C60167AD822A}"/>
+              </a:ext>
+            </a:extLst>
+          </p:cNvPr>
+          <p:cNvPicPr>
+            <a:picLocks noChangeAspect="1"/>
+          </p:cNvPicPr>
           <p:nvPr/>
-        </p:nvCxnSpPr>
-        <p:spPr>
-          <a:xfrm rot="10800000" flipH="1">
-            <a:off x="2553150" y="3923150"/>
-            <a:ext cx="4037700" cy="6600"/>
-          </a:xfrm>
-          <a:prstGeom prst="straightConnector1">
+        </p:nvPicPr>
+        <p:blipFill>
+          <a:blip r:embed="rId3"/>
+          <a:stretch>
+            <a:fillRect/>
+          </a:stretch>
+        </p:blipFill>
+        <p:spPr>
+          <a:xfrm>
+            <a:off x="4983450" y="1433035"/>
+            <a:ext cx="2178987" cy="2488216"/>
+          </a:xfrm>
+          <a:prstGeom prst="rect">
+            <a:avLst/>
+          </a:prstGeom>
+        </p:spPr>
+      </p:pic>
+      <p:sp>
+        <p:nvSpPr>
+          <p:cNvPr id="8" name="矩形 7">
+            <a:extLst>
+              <a:ext uri="{FF2B5EF4-FFF2-40B4-BE49-F238E27FC236}">
+                <a16:creationId xmlns:a16="http://schemas.microsoft.com/office/drawing/2014/main" id="{6E112CBB-87F6-D409-9024-26C7575578AE}"/>
+              </a:ext>
+            </a:extLst>
+          </p:cNvPr>
+          <p:cNvSpPr/>
+          <p:nvPr/>
+        </p:nvSpPr>
+        <p:spPr>
+          <a:xfrm>
+            <a:off x="2887085" y="379924"/>
+            <a:ext cx="3369833" cy="553998"/>
+          </a:xfrm>
+          <a:prstGeom prst="rect">
             <a:avLst/>
           </a:prstGeom>
           <a:noFill/>
-          <a:ln w="19050" cap="flat" cmpd="sng">
-            <a:solidFill>
-              <a:schemeClr val="lt1"/>
-            </a:solidFill>
-            <a:prstDash val="solid"/>
-            <a:round/>
-            <a:headEnd type="oval" w="med" len="med"/>
-            <a:tailEnd type="oval" w="med" len="med"/>
-          </a:ln>
-        </p:spPr>
-      </p:cxnSp>
-      <p:cxnSp>
-        <p:nvCxnSpPr>
-          <p:cNvPr id="357" name="Google Shape;357;p34"/>
-          <p:cNvCxnSpPr/>
+        </p:spPr>
+        <p:txBody>
+          <a:bodyPr wrap="none" lIns="91440" tIns="45720" rIns="91440" bIns="45720">
+            <a:spAutoFit/>
+          </a:bodyPr>
+          <a:lstStyle/>
+          <a:p>
+            <a:pPr algn="ctr"/>
+            <a:r>
+              <a:rPr lang="zh-TW" altLang="en-US" sz="3000" b="0" cap="none" spc="0" dirty="0">
+                <a:ln w="0"/>
+                <a:solidFill>
+                  <a:schemeClr val="tx1"/>
+                </a:solidFill>
+                <a:effectLst>
+                  <a:outerShdw blurRad="38100" dist="19050" dir="2700000" algn="tl" rotWithShape="0">
+                    <a:schemeClr val="dk1">
+                      <a:alpha val="40000"/>
+                    </a:schemeClr>
+                  </a:outerShdw>
+                </a:effectLst>
+              </a:rPr>
+              <a:t>後續主要開發方向</a:t>
+            </a:r>
+          </a:p>
+        </p:txBody>
+      </p:sp>
+      <p:sp>
+        <p:nvSpPr>
+          <p:cNvPr id="9" name="文字方塊 8">
+            <a:extLst>
+              <a:ext uri="{FF2B5EF4-FFF2-40B4-BE49-F238E27FC236}">
+                <a16:creationId xmlns:a16="http://schemas.microsoft.com/office/drawing/2014/main" id="{17622955-9E76-BA44-9074-62C215B236F8}"/>
+              </a:ext>
+            </a:extLst>
+          </p:cNvPr>
+          <p:cNvSpPr txBox="1"/>
           <p:nvPr/>
-        </p:nvCxnSpPr>
-        <p:spPr>
-          <a:xfrm rot="10800000" flipH="1">
-            <a:off x="2553150" y="3325025"/>
-            <a:ext cx="4037700" cy="6600"/>
-          </a:xfrm>
-          <a:prstGeom prst="straightConnector1">
+        </p:nvSpPr>
+        <p:spPr>
+          <a:xfrm>
+            <a:off x="1475232" y="1615440"/>
+            <a:ext cx="2648712" cy="523220"/>
+          </a:xfrm>
+          <a:prstGeom prst="rect">
             <a:avLst/>
           </a:prstGeom>
           <a:noFill/>
-          <a:ln w="19050" cap="flat" cmpd="sng">
-            <a:solidFill>
-              <a:schemeClr val="lt1"/>
-            </a:solidFill>
-            <a:prstDash val="solid"/>
-            <a:round/>
-            <a:headEnd type="oval" w="med" len="med"/>
-            <a:tailEnd type="oval" w="med" len="med"/>
-          </a:ln>
-        </p:spPr>
-      </p:cxnSp>
+        </p:spPr>
+        <p:txBody>
+          <a:bodyPr wrap="square" rtlCol="0">
+            <a:spAutoFit/>
+          </a:bodyPr>
+          <a:lstStyle/>
+          <a:p>
+            <a:pPr marL="285750" indent="-285750">
+              <a:buFont typeface="Arial" panose="020B0604020202020204" pitchFamily="34" charset="0"/>
+              <a:buChar char="•"/>
+            </a:pPr>
+            <a:r>
+              <a:rPr lang="zh-TW" altLang="en-US" dirty="0"/>
+              <a:t>從非結構化資料中提取資訊</a:t>
+            </a:r>
+            <a:endParaRPr lang="en-US" altLang="zh-TW" dirty="0"/>
+          </a:p>
+          <a:p>
+            <a:pPr marL="285750" indent="-285750">
+              <a:buFont typeface="Arial" panose="020B0604020202020204" pitchFamily="34" charset="0"/>
+              <a:buChar char="•"/>
+            </a:pPr>
+            <a:endParaRPr lang="zh-TW" altLang="en-US" dirty="0"/>
+          </a:p>
+        </p:txBody>
+      </p:sp>
     </p:spTree>
   </p:cSld>
   <p:clrMapOvr>

--- a/程式介紹與展示.pptx
+++ b/程式介紹與展示.pptx
@@ -5,7 +5,7 @@
     <p:sldMasterId id="2147483674" r:id="rId1"/>
   </p:sldMasterIdLst>
   <p:notesMasterIdLst>
-    <p:notesMasterId r:id="rId13"/>
+    <p:notesMasterId r:id="rId14"/>
   </p:notesMasterIdLst>
   <p:sldIdLst>
     <p:sldId id="256" r:id="rId2"/>
@@ -17,32 +17,33 @@
     <p:sldId id="304" r:id="rId8"/>
     <p:sldId id="308" r:id="rId9"/>
     <p:sldId id="257" r:id="rId10"/>
-    <p:sldId id="261" r:id="rId11"/>
-    <p:sldId id="284" r:id="rId12"/>
+    <p:sldId id="309" r:id="rId11"/>
+    <p:sldId id="261" r:id="rId12"/>
+    <p:sldId id="284" r:id="rId13"/>
   </p:sldIdLst>
   <p:sldSz cx="9144000" cy="5143500" type="screen16x9"/>
   <p:notesSz cx="6858000" cy="9144000"/>
   <p:embeddedFontLst>
     <p:embeddedFont>
-      <p:font typeface="Bebas Neue" panose="020B0606020202050201" pitchFamily="34" charset="0"/>
-      <p:regular r:id="rId14"/>
+      <p:font typeface="Bebas Neue" panose="02020500000000000000" charset="0"/>
+      <p:regular r:id="rId15"/>
     </p:embeddedFont>
     <p:embeddedFont>
       <p:font typeface="Mulish" panose="02020500000000000000" charset="0"/>
-      <p:regular r:id="rId15"/>
-      <p:bold r:id="rId16"/>
-      <p:italic r:id="rId17"/>
-      <p:boldItalic r:id="rId18"/>
+      <p:regular r:id="rId16"/>
+      <p:bold r:id="rId17"/>
+      <p:italic r:id="rId18"/>
+      <p:boldItalic r:id="rId19"/>
     </p:embeddedFont>
     <p:embeddedFont>
-      <p:font typeface="Nunito Light" pitchFamily="2" charset="0"/>
-      <p:regular r:id="rId19"/>
-      <p:italic r:id="rId20"/>
+      <p:font typeface="Nunito Light" panose="02020500000000000000" charset="0"/>
+      <p:regular r:id="rId20"/>
+      <p:italic r:id="rId21"/>
     </p:embeddedFont>
     <p:embeddedFont>
       <p:font typeface="Quicksand" panose="02020500000000000000" charset="0"/>
-      <p:regular r:id="rId21"/>
-      <p:bold r:id="rId22"/>
+      <p:regular r:id="rId22"/>
+      <p:bold r:id="rId23"/>
     </p:embeddedFont>
   </p:embeddedFontLst>
   <p:defaultTextStyle>
@@ -858,6 +859,251 @@
   <p:cSld>
     <p:spTree>
       <p:nvGrpSpPr>
+        <p:cNvPr id="1" name="Shape 349">
+          <a:extLst>
+            <a:ext uri="{FF2B5EF4-FFF2-40B4-BE49-F238E27FC236}">
+              <a16:creationId xmlns:a16="http://schemas.microsoft.com/office/drawing/2014/main" id="{4B8B47C6-0DE6-7E5D-DDE9-57518D26E18D}"/>
+            </a:ext>
+          </a:extLst>
+        </p:cNvPr>
+        <p:cNvGrpSpPr/>
+        <p:nvPr/>
+      </p:nvGrpSpPr>
+      <p:grpSpPr>
+        <a:xfrm>
+          <a:off x="0" y="0"/>
+          <a:ext cx="0" cy="0"/>
+          <a:chOff x="0" y="0"/>
+          <a:chExt cx="0" cy="0"/>
+        </a:xfrm>
+      </p:grpSpPr>
+      <p:sp>
+        <p:nvSpPr>
+          <p:cNvPr id="350" name="Google Shape;350;ged9256fe6f_0_23:notes">
+            <a:extLst>
+              <a:ext uri="{FF2B5EF4-FFF2-40B4-BE49-F238E27FC236}">
+                <a16:creationId xmlns:a16="http://schemas.microsoft.com/office/drawing/2014/main" id="{8139641A-7950-E38F-F172-4F8A5250E8AE}"/>
+              </a:ext>
+            </a:extLst>
+          </p:cNvPr>
+          <p:cNvSpPr>
+            <a:spLocks noGrp="1" noRot="1" noChangeAspect="1"/>
+          </p:cNvSpPr>
+          <p:nvPr>
+            <p:ph type="sldImg" idx="2"/>
+          </p:nvPr>
+        </p:nvSpPr>
+        <p:spPr>
+          <a:xfrm>
+            <a:off x="381000" y="685800"/>
+            <a:ext cx="6096000" cy="3429000"/>
+          </a:xfrm>
+          <a:custGeom>
+            <a:avLst/>
+            <a:gdLst/>
+            <a:ahLst/>
+            <a:cxnLst/>
+            <a:rect l="l" t="t" r="r" b="b"/>
+            <a:pathLst>
+              <a:path w="120000" h="120000" extrusionOk="0">
+                <a:moveTo>
+                  <a:pt x="0" y="0"/>
+                </a:moveTo>
+                <a:lnTo>
+                  <a:pt x="120000" y="0"/>
+                </a:lnTo>
+                <a:lnTo>
+                  <a:pt x="120000" y="120000"/>
+                </a:lnTo>
+                <a:lnTo>
+                  <a:pt x="0" y="120000"/>
+                </a:lnTo>
+                <a:close/>
+              </a:path>
+            </a:pathLst>
+          </a:custGeom>
+        </p:spPr>
+        <p:txBody>
+          <a:bodyPr/>
+          <a:lstStyle/>
+          <a:p>
+            <a:endParaRPr lang="zh-TW" altLang="en-US"/>
+          </a:p>
+        </p:txBody>
+      </p:sp>
+      <p:sp>
+        <p:nvSpPr>
+          <p:cNvPr id="351" name="Google Shape;351;ged9256fe6f_0_23:notes">
+            <a:extLst>
+              <a:ext uri="{FF2B5EF4-FFF2-40B4-BE49-F238E27FC236}">
+                <a16:creationId xmlns:a16="http://schemas.microsoft.com/office/drawing/2014/main" id="{07C478F5-38FF-FCC6-6B02-3A98895327D3}"/>
+              </a:ext>
+            </a:extLst>
+          </p:cNvPr>
+          <p:cNvSpPr txBox="1">
+            <a:spLocks noGrp="1"/>
+          </p:cNvSpPr>
+          <p:nvPr>
+            <p:ph type="body" idx="1"/>
+          </p:nvPr>
+        </p:nvSpPr>
+        <p:spPr>
+          <a:xfrm>
+            <a:off x="685800" y="4343400"/>
+            <a:ext cx="5486400" cy="4114800"/>
+          </a:xfrm>
+          <a:prstGeom prst="rect">
+            <a:avLst/>
+          </a:prstGeom>
+        </p:spPr>
+        <p:txBody>
+          <a:bodyPr spcFirstLastPara="1" wrap="square" lIns="91425" tIns="91425" rIns="91425" bIns="91425" anchor="t" anchorCtr="0">
+            <a:noAutofit/>
+          </a:bodyPr>
+          <a:lstStyle/>
+          <a:p>
+            <a:pPr marL="0" lvl="0" indent="0" algn="l" rtl="0">
+              <a:spcBef>
+                <a:spcPts val="0"/>
+              </a:spcBef>
+              <a:spcAft>
+                <a:spcPts val="0"/>
+              </a:spcAft>
+              <a:buNone/>
+            </a:pPr>
+            <a:endParaRPr/>
+          </a:p>
+        </p:txBody>
+      </p:sp>
+    </p:spTree>
+    <p:extLst>
+      <p:ext uri="{BB962C8B-B14F-4D97-AF65-F5344CB8AC3E}">
+        <p14:creationId xmlns:p14="http://schemas.microsoft.com/office/powerpoint/2010/main" val="2083211988"/>
+      </p:ext>
+    </p:extLst>
+  </p:cSld>
+  <p:clrMapOvr>
+    <a:masterClrMapping/>
+  </p:clrMapOvr>
+</p:notes>
+</file>
+
+<file path=ppt/notesSlides/notesSlide11.xml><?xml version="1.0" encoding="utf-8"?>
+<p:notes xmlns:a="http://schemas.openxmlformats.org/drawingml/2006/main" xmlns:r="http://schemas.openxmlformats.org/officeDocument/2006/relationships" xmlns:p="http://schemas.openxmlformats.org/presentationml/2006/main" showMasterSp="0" showMasterPhAnim="0">
+  <p:cSld>
+    <p:spTree>
+      <p:nvGrpSpPr>
+        <p:cNvPr id="1" name="Shape 349"/>
+        <p:cNvGrpSpPr/>
+        <p:nvPr/>
+      </p:nvGrpSpPr>
+      <p:grpSpPr>
+        <a:xfrm>
+          <a:off x="0" y="0"/>
+          <a:ext cx="0" cy="0"/>
+          <a:chOff x="0" y="0"/>
+          <a:chExt cx="0" cy="0"/>
+        </a:xfrm>
+      </p:grpSpPr>
+      <p:sp>
+        <p:nvSpPr>
+          <p:cNvPr id="350" name="Google Shape;350;ged9256fe6f_0_23:notes"/>
+          <p:cNvSpPr>
+            <a:spLocks noGrp="1" noRot="1" noChangeAspect="1"/>
+          </p:cNvSpPr>
+          <p:nvPr>
+            <p:ph type="sldImg" idx="2"/>
+          </p:nvPr>
+        </p:nvSpPr>
+        <p:spPr>
+          <a:xfrm>
+            <a:off x="381000" y="685800"/>
+            <a:ext cx="6096000" cy="3429000"/>
+          </a:xfrm>
+          <a:custGeom>
+            <a:avLst/>
+            <a:gdLst/>
+            <a:ahLst/>
+            <a:cxnLst/>
+            <a:rect l="l" t="t" r="r" b="b"/>
+            <a:pathLst>
+              <a:path w="120000" h="120000" extrusionOk="0">
+                <a:moveTo>
+                  <a:pt x="0" y="0"/>
+                </a:moveTo>
+                <a:lnTo>
+                  <a:pt x="120000" y="0"/>
+                </a:lnTo>
+                <a:lnTo>
+                  <a:pt x="120000" y="120000"/>
+                </a:lnTo>
+                <a:lnTo>
+                  <a:pt x="0" y="120000"/>
+                </a:lnTo>
+                <a:close/>
+              </a:path>
+            </a:pathLst>
+          </a:custGeom>
+        </p:spPr>
+        <p:txBody>
+          <a:bodyPr/>
+          <a:lstStyle/>
+          <a:p>
+            <a:endParaRPr lang="zh-TW" altLang="en-US"/>
+          </a:p>
+        </p:txBody>
+      </p:sp>
+      <p:sp>
+        <p:nvSpPr>
+          <p:cNvPr id="351" name="Google Shape;351;ged9256fe6f_0_23:notes"/>
+          <p:cNvSpPr txBox="1">
+            <a:spLocks noGrp="1"/>
+          </p:cNvSpPr>
+          <p:nvPr>
+            <p:ph type="body" idx="1"/>
+          </p:nvPr>
+        </p:nvSpPr>
+        <p:spPr>
+          <a:xfrm>
+            <a:off x="685800" y="4343400"/>
+            <a:ext cx="5486400" cy="4114800"/>
+          </a:xfrm>
+          <a:prstGeom prst="rect">
+            <a:avLst/>
+          </a:prstGeom>
+        </p:spPr>
+        <p:txBody>
+          <a:bodyPr spcFirstLastPara="1" wrap="square" lIns="91425" tIns="91425" rIns="91425" bIns="91425" anchor="t" anchorCtr="0">
+            <a:noAutofit/>
+          </a:bodyPr>
+          <a:lstStyle/>
+          <a:p>
+            <a:pPr marL="0" lvl="0" indent="0" algn="l" rtl="0">
+              <a:spcBef>
+                <a:spcPts val="0"/>
+              </a:spcBef>
+              <a:spcAft>
+                <a:spcPts val="0"/>
+              </a:spcAft>
+              <a:buNone/>
+            </a:pPr>
+            <a:endParaRPr/>
+          </a:p>
+        </p:txBody>
+      </p:sp>
+    </p:spTree>
+  </p:cSld>
+  <p:clrMapOvr>
+    <a:masterClrMapping/>
+  </p:clrMapOvr>
+</p:notes>
+</file>
+
+<file path=ppt/notesSlides/notesSlide12.xml><?xml version="1.0" encoding="utf-8"?>
+<p:notes xmlns:a="http://schemas.openxmlformats.org/drawingml/2006/main" xmlns:r="http://schemas.openxmlformats.org/officeDocument/2006/relationships" xmlns:p="http://schemas.openxmlformats.org/presentationml/2006/main" showMasterSp="0" showMasterPhAnim="0">
+  <p:cSld>
+    <p:spTree>
+      <p:nvGrpSpPr>
         <p:cNvPr id="1" name="Shape 819"/>
         <p:cNvGrpSpPr/>
         <p:nvPr/>
@@ -1589,6 +1835,72 @@
 </file>
 
 <file path=ppt/notesSlides/notesSlide7.xml><?xml version="1.0" encoding="utf-8"?>
+<p:notes xmlns:a="http://schemas.openxmlformats.org/drawingml/2006/main" xmlns:r="http://schemas.openxmlformats.org/officeDocument/2006/relationships" xmlns:p="http://schemas.openxmlformats.org/presentationml/2006/main">
+  <p:cSld>
+    <p:spTree>
+      <p:nvGrpSpPr>
+        <p:cNvPr id="1" name=""/>
+        <p:cNvGrpSpPr/>
+        <p:nvPr/>
+      </p:nvGrpSpPr>
+      <p:grpSpPr>
+        <a:xfrm>
+          <a:off x="0" y="0"/>
+          <a:ext cx="0" cy="0"/>
+          <a:chOff x="0" y="0"/>
+          <a:chExt cx="0" cy="0"/>
+        </a:xfrm>
+      </p:grpSpPr>
+      <p:sp>
+        <p:nvSpPr>
+          <p:cNvPr id="2" name="投影片影像版面配置區 1"/>
+          <p:cNvSpPr>
+            <a:spLocks noGrp="1" noRot="1" noChangeAspect="1"/>
+          </p:cNvSpPr>
+          <p:nvPr>
+            <p:ph type="sldImg"/>
+          </p:nvPr>
+        </p:nvSpPr>
+        <p:spPr>
+          <a:xfrm>
+            <a:off x="381000" y="685800"/>
+            <a:ext cx="6096000" cy="3429000"/>
+          </a:xfrm>
+        </p:spPr>
+      </p:sp>
+      <p:sp>
+        <p:nvSpPr>
+          <p:cNvPr id="3" name="備忘稿版面配置區 2"/>
+          <p:cNvSpPr>
+            <a:spLocks noGrp="1"/>
+          </p:cNvSpPr>
+          <p:nvPr>
+            <p:ph type="body" idx="1"/>
+          </p:nvPr>
+        </p:nvSpPr>
+        <p:spPr/>
+        <p:txBody>
+          <a:bodyPr/>
+          <a:lstStyle/>
+          <a:p>
+            <a:endParaRPr lang="zh-TW" altLang="en-US" dirty="0"/>
+          </a:p>
+        </p:txBody>
+      </p:sp>
+    </p:spTree>
+    <p:extLst>
+      <p:ext uri="{BB962C8B-B14F-4D97-AF65-F5344CB8AC3E}">
+        <p14:creationId xmlns:p14="http://schemas.microsoft.com/office/powerpoint/2010/main" val="2452635957"/>
+      </p:ext>
+    </p:extLst>
+  </p:cSld>
+  <p:clrMapOvr>
+    <a:masterClrMapping/>
+  </p:clrMapOvr>
+</p:notes>
+</file>
+
+<file path=ppt/notesSlides/notesSlide8.xml><?xml version="1.0" encoding="utf-8"?>
 <p:notes xmlns:a="http://schemas.openxmlformats.org/drawingml/2006/main" xmlns:r="http://schemas.openxmlformats.org/officeDocument/2006/relationships" xmlns:p="http://schemas.openxmlformats.org/presentationml/2006/main" showMasterSp="0" showMasterPhAnim="0">
   <p:cSld>
     <p:spTree>
@@ -1722,7 +2034,7 @@
 </p:notes>
 </file>
 
-<file path=ppt/notesSlides/notesSlide8.xml><?xml version="1.0" encoding="utf-8"?>
+<file path=ppt/notesSlides/notesSlide9.xml><?xml version="1.0" encoding="utf-8"?>
 <p:notes xmlns:a="http://schemas.openxmlformats.org/drawingml/2006/main" xmlns:r="http://schemas.openxmlformats.org/officeDocument/2006/relationships" xmlns:p="http://schemas.openxmlformats.org/presentationml/2006/main" showMasterSp="0" showMasterPhAnim="0">
   <p:cSld>
     <p:spTree>
@@ -1790,117 +2102,6 @@
       <p:sp>
         <p:nvSpPr>
           <p:cNvPr id="293" name="Google Shape;293;g133f6155f6d_0_3:notes"/>
-          <p:cNvSpPr txBox="1">
-            <a:spLocks noGrp="1"/>
-          </p:cNvSpPr>
-          <p:nvPr>
-            <p:ph type="body" idx="1"/>
-          </p:nvPr>
-        </p:nvSpPr>
-        <p:spPr>
-          <a:xfrm>
-            <a:off x="685800" y="4343400"/>
-            <a:ext cx="5486400" cy="4114800"/>
-          </a:xfrm>
-          <a:prstGeom prst="rect">
-            <a:avLst/>
-          </a:prstGeom>
-        </p:spPr>
-        <p:txBody>
-          <a:bodyPr spcFirstLastPara="1" wrap="square" lIns="91425" tIns="91425" rIns="91425" bIns="91425" anchor="t" anchorCtr="0">
-            <a:noAutofit/>
-          </a:bodyPr>
-          <a:lstStyle/>
-          <a:p>
-            <a:pPr marL="0" lvl="0" indent="0" algn="l" rtl="0">
-              <a:spcBef>
-                <a:spcPts val="0"/>
-              </a:spcBef>
-              <a:spcAft>
-                <a:spcPts val="0"/>
-              </a:spcAft>
-              <a:buNone/>
-            </a:pPr>
-            <a:endParaRPr/>
-          </a:p>
-        </p:txBody>
-      </p:sp>
-    </p:spTree>
-  </p:cSld>
-  <p:clrMapOvr>
-    <a:masterClrMapping/>
-  </p:clrMapOvr>
-</p:notes>
-</file>
-
-<file path=ppt/notesSlides/notesSlide9.xml><?xml version="1.0" encoding="utf-8"?>
-<p:notes xmlns:a="http://schemas.openxmlformats.org/drawingml/2006/main" xmlns:r="http://schemas.openxmlformats.org/officeDocument/2006/relationships" xmlns:p="http://schemas.openxmlformats.org/presentationml/2006/main" showMasterSp="0" showMasterPhAnim="0">
-  <p:cSld>
-    <p:spTree>
-      <p:nvGrpSpPr>
-        <p:cNvPr id="1" name="Shape 349"/>
-        <p:cNvGrpSpPr/>
-        <p:nvPr/>
-      </p:nvGrpSpPr>
-      <p:grpSpPr>
-        <a:xfrm>
-          <a:off x="0" y="0"/>
-          <a:ext cx="0" cy="0"/>
-          <a:chOff x="0" y="0"/>
-          <a:chExt cx="0" cy="0"/>
-        </a:xfrm>
-      </p:grpSpPr>
-      <p:sp>
-        <p:nvSpPr>
-          <p:cNvPr id="350" name="Google Shape;350;ged9256fe6f_0_23:notes"/>
-          <p:cNvSpPr>
-            <a:spLocks noGrp="1" noRot="1" noChangeAspect="1"/>
-          </p:cNvSpPr>
-          <p:nvPr>
-            <p:ph type="sldImg" idx="2"/>
-          </p:nvPr>
-        </p:nvSpPr>
-        <p:spPr>
-          <a:xfrm>
-            <a:off x="381000" y="685800"/>
-            <a:ext cx="6096000" cy="3429000"/>
-          </a:xfrm>
-          <a:custGeom>
-            <a:avLst/>
-            <a:gdLst/>
-            <a:ahLst/>
-            <a:cxnLst/>
-            <a:rect l="l" t="t" r="r" b="b"/>
-            <a:pathLst>
-              <a:path w="120000" h="120000" extrusionOk="0">
-                <a:moveTo>
-                  <a:pt x="0" y="0"/>
-                </a:moveTo>
-                <a:lnTo>
-                  <a:pt x="120000" y="0"/>
-                </a:lnTo>
-                <a:lnTo>
-                  <a:pt x="120000" y="120000"/>
-                </a:lnTo>
-                <a:lnTo>
-                  <a:pt x="0" y="120000"/>
-                </a:lnTo>
-                <a:close/>
-              </a:path>
-            </a:pathLst>
-          </a:custGeom>
-        </p:spPr>
-        <p:txBody>
-          <a:bodyPr/>
-          <a:lstStyle/>
-          <a:p>
-            <a:endParaRPr lang="zh-TW" altLang="en-US"/>
-          </a:p>
-        </p:txBody>
-      </p:sp>
-      <p:sp>
-        <p:nvSpPr>
-          <p:cNvPr id="351" name="Google Shape;351;ged9256fe6f_0_23:notes"/>
           <p:cNvSpPr txBox="1">
             <a:spLocks noGrp="1"/>
           </p:cNvSpPr>
@@ -12432,6 +12633,176 @@
   <p:cSld>
     <p:spTree>
       <p:nvGrpSpPr>
+        <p:cNvPr id="1" name="Shape 352">
+          <a:extLst>
+            <a:ext uri="{FF2B5EF4-FFF2-40B4-BE49-F238E27FC236}">
+              <a16:creationId xmlns:a16="http://schemas.microsoft.com/office/drawing/2014/main" id="{F5B0BC03-2AA9-600D-FBBE-77D998CEAE9E}"/>
+            </a:ext>
+          </a:extLst>
+        </p:cNvPr>
+        <p:cNvGrpSpPr/>
+        <p:nvPr/>
+      </p:nvGrpSpPr>
+      <p:grpSpPr>
+        <a:xfrm>
+          <a:off x="0" y="0"/>
+          <a:ext cx="0" cy="0"/>
+          <a:chOff x="0" y="0"/>
+          <a:chExt cx="0" cy="0"/>
+        </a:xfrm>
+      </p:grpSpPr>
+      <p:sp>
+        <p:nvSpPr>
+          <p:cNvPr id="355" name="Google Shape;355;p34">
+            <a:extLst>
+              <a:ext uri="{FF2B5EF4-FFF2-40B4-BE49-F238E27FC236}">
+                <a16:creationId xmlns:a16="http://schemas.microsoft.com/office/drawing/2014/main" id="{4A7A125A-0EE4-A7D0-00F1-EFBA1EC76214}"/>
+              </a:ext>
+            </a:extLst>
+          </p:cNvPr>
+          <p:cNvSpPr txBox="1">
+            <a:spLocks noGrp="1"/>
+          </p:cNvSpPr>
+          <p:nvPr>
+            <p:ph type="sldNum" idx="12"/>
+          </p:nvPr>
+        </p:nvSpPr>
+        <p:spPr>
+          <a:xfrm>
+            <a:off x="4297650" y="4602875"/>
+            <a:ext cx="548700" cy="333600"/>
+          </a:xfrm>
+          <a:prstGeom prst="rect">
+            <a:avLst/>
+          </a:prstGeom>
+        </p:spPr>
+        <p:txBody>
+          <a:bodyPr spcFirstLastPara="1" wrap="square" lIns="91425" tIns="91425" rIns="91425" bIns="91425" anchor="t" anchorCtr="0">
+            <a:noAutofit/>
+          </a:bodyPr>
+          <a:lstStyle/>
+          <a:p>
+            <a:pPr marL="0" lvl="0" indent="0" algn="ctr" rtl="0">
+              <a:spcBef>
+                <a:spcPts val="0"/>
+              </a:spcBef>
+              <a:spcAft>
+                <a:spcPts val="0"/>
+              </a:spcAft>
+              <a:buNone/>
+            </a:pPr>
+            <a:r>
+              <a:rPr lang="en-US" altLang="zh-TW" dirty="0"/>
+              <a:t>9</a:t>
+            </a:r>
+            <a:endParaRPr dirty="0"/>
+          </a:p>
+        </p:txBody>
+      </p:sp>
+      <p:sp>
+        <p:nvSpPr>
+          <p:cNvPr id="14" name="文字方塊 13">
+            <a:extLst>
+              <a:ext uri="{FF2B5EF4-FFF2-40B4-BE49-F238E27FC236}">
+                <a16:creationId xmlns:a16="http://schemas.microsoft.com/office/drawing/2014/main" id="{E7C98D4C-83D3-20C7-FEBF-D561132C09C7}"/>
+              </a:ext>
+            </a:extLst>
+          </p:cNvPr>
+          <p:cNvSpPr txBox="1"/>
+          <p:nvPr/>
+        </p:nvSpPr>
+        <p:spPr>
+          <a:xfrm>
+            <a:off x="2286000" y="376464"/>
+            <a:ext cx="4572000" cy="523220"/>
+          </a:xfrm>
+          <a:prstGeom prst="rect">
+            <a:avLst/>
+          </a:prstGeom>
+          <a:noFill/>
+        </p:spPr>
+        <p:txBody>
+          <a:bodyPr wrap="square">
+            <a:spAutoFit/>
+          </a:bodyPr>
+          <a:lstStyle/>
+          <a:p>
+            <a:pPr algn="ctr"/>
+            <a:r>
+              <a:rPr lang="zh-TW" altLang="en-US" sz="2800" dirty="0">
+                <a:ln w="0"/>
+                <a:gradFill>
+                  <a:gsLst>
+                    <a:gs pos="21000">
+                      <a:srgbClr val="53575C"/>
+                    </a:gs>
+                    <a:gs pos="88000">
+                      <a:srgbClr val="C5C7CA"/>
+                    </a:gs>
+                  </a:gsLst>
+                  <a:lin ang="5400000"/>
+                </a:gradFill>
+              </a:rPr>
+              <a:t>圖表展示</a:t>
+            </a:r>
+          </a:p>
+        </p:txBody>
+      </p:sp>
+      <p:pic>
+        <p:nvPicPr>
+          <p:cNvPr id="3" name="圖片 2">
+            <a:extLst>
+              <a:ext uri="{FF2B5EF4-FFF2-40B4-BE49-F238E27FC236}">
+                <a16:creationId xmlns:a16="http://schemas.microsoft.com/office/drawing/2014/main" id="{4A6B7435-C897-4B5A-817A-96EF38533240}"/>
+              </a:ext>
+            </a:extLst>
+          </p:cNvPr>
+          <p:cNvPicPr>
+            <a:picLocks noChangeAspect="1"/>
+          </p:cNvPicPr>
+          <p:nvPr/>
+        </p:nvPicPr>
+        <p:blipFill>
+          <a:blip r:embed="rId3"/>
+          <a:stretch>
+            <a:fillRect/>
+          </a:stretch>
+        </p:blipFill>
+        <p:spPr>
+          <a:xfrm>
+            <a:off x="1221426" y="833556"/>
+            <a:ext cx="6722196" cy="3835447"/>
+          </a:xfrm>
+          <a:prstGeom prst="rect">
+            <a:avLst/>
+          </a:prstGeom>
+          <a:ln w="12700">
+            <a:solidFill>
+              <a:schemeClr val="bg1">
+                <a:lumMod val="10000"/>
+              </a:schemeClr>
+            </a:solidFill>
+          </a:ln>
+        </p:spPr>
+      </p:pic>
+    </p:spTree>
+    <p:extLst>
+      <p:ext uri="{BB962C8B-B14F-4D97-AF65-F5344CB8AC3E}">
+        <p14:creationId xmlns:p14="http://schemas.microsoft.com/office/powerpoint/2010/main" val="241514042"/>
+      </p:ext>
+    </p:extLst>
+  </p:cSld>
+  <p:clrMapOvr>
+    <a:masterClrMapping/>
+  </p:clrMapOvr>
+</p:sld>
+</file>
+
+<file path=ppt/slides/slide11.xml><?xml version="1.0" encoding="utf-8"?>
+<p:sld xmlns:a="http://schemas.openxmlformats.org/drawingml/2006/main" xmlns:r="http://schemas.openxmlformats.org/officeDocument/2006/relationships" xmlns:p="http://schemas.openxmlformats.org/presentationml/2006/main">
+  <p:cSld>
+    <p:spTree>
+      <p:nvGrpSpPr>
         <p:cNvPr id="1" name="Shape 352"/>
         <p:cNvGrpSpPr/>
         <p:nvPr/>
@@ -12478,11 +12849,11 @@
               </a:spcAft>
               <a:buNone/>
             </a:pPr>
-            <a:fld id="{00000000-1234-1234-1234-123412341234}" type="slidenum">
-              <a:rPr lang="en"/>
+            <a:r>
+              <a:rPr lang="en-US" altLang="zh-TW" dirty="0"/>
               <a:t>10</a:t>
-            </a:fld>
-            <a:endParaRPr/>
+            </a:r>
+            <a:endParaRPr dirty="0"/>
           </a:p>
         </p:txBody>
       </p:sp>
@@ -12508,8 +12879,8 @@
         </p:blipFill>
         <p:spPr>
           <a:xfrm>
-            <a:off x="4983450" y="1433035"/>
-            <a:ext cx="2178987" cy="2488216"/>
+            <a:off x="5193117" y="1313164"/>
+            <a:ext cx="2880874" cy="3289711"/>
           </a:xfrm>
           <a:prstGeom prst="rect">
             <a:avLst/>
@@ -12578,8 +12949,8 @@
         </p:nvSpPr>
         <p:spPr>
           <a:xfrm>
-            <a:off x="1475232" y="1615440"/>
-            <a:ext cx="2648712" cy="523220"/>
+            <a:off x="1011078" y="1716488"/>
+            <a:ext cx="3089404" cy="523220"/>
           </a:xfrm>
           <a:prstGeom prst="rect">
             <a:avLst/>
@@ -12598,16 +12969,65 @@
             </a:pPr>
             <a:r>
               <a:rPr lang="zh-TW" altLang="en-US" dirty="0"/>
-              <a:t>從非結構化資料中提取資訊</a:t>
+              <a:t>從非結構化文本中提取有價值的資訊</a:t>
             </a:r>
-            <a:endParaRPr lang="en-US" altLang="zh-TW" dirty="0"/>
+            <a:r>
+              <a:rPr lang="en-US" altLang="zh-TW" dirty="0"/>
+              <a:t>, </a:t>
+            </a:r>
+            <a:r>
+              <a:rPr lang="zh-TW" altLang="en-US" dirty="0"/>
+              <a:t>以此建構求職市場的脈絡</a:t>
+            </a:r>
           </a:p>
+        </p:txBody>
+      </p:sp>
+      <p:sp>
+        <p:nvSpPr>
+          <p:cNvPr id="2" name="箭號: 向右 1">
+            <a:extLst>
+              <a:ext uri="{FF2B5EF4-FFF2-40B4-BE49-F238E27FC236}">
+                <a16:creationId xmlns:a16="http://schemas.microsoft.com/office/drawing/2014/main" id="{94B6D5DF-6066-48BD-9B44-98C9CED2F80E}"/>
+              </a:ext>
+            </a:extLst>
+          </p:cNvPr>
+          <p:cNvSpPr/>
+          <p:nvPr/>
+        </p:nvSpPr>
+        <p:spPr>
+          <a:xfrm rot="1393167">
+            <a:off x="4110554" y="1760792"/>
+            <a:ext cx="881028" cy="604540"/>
+          </a:xfrm>
+          <a:prstGeom prst="rightArrow">
+            <a:avLst/>
+          </a:prstGeom>
+          <a:solidFill>
+            <a:srgbClr val="FFFF00"/>
+          </a:solidFill>
+        </p:spPr>
+        <p:style>
+          <a:lnRef idx="2">
+            <a:schemeClr val="accent1">
+              <a:shade val="50000"/>
+            </a:schemeClr>
+          </a:lnRef>
+          <a:fillRef idx="1">
+            <a:schemeClr val="accent1"/>
+          </a:fillRef>
+          <a:effectRef idx="0">
+            <a:schemeClr val="accent1"/>
+          </a:effectRef>
+          <a:fontRef idx="minor">
+            <a:schemeClr val="lt1"/>
+          </a:fontRef>
+        </p:style>
+        <p:txBody>
+          <a:bodyPr rtlCol="0" anchor="ctr"/>
+          <a:lstStyle/>
           <a:p>
-            <a:pPr marL="285750" indent="-285750">
-              <a:buFont typeface="Arial" panose="020B0604020202020204" pitchFamily="34" charset="0"/>
-              <a:buChar char="•"/>
-            </a:pPr>
-            <a:endParaRPr lang="zh-TW" altLang="en-US" dirty="0"/>
+            <a:pPr algn="ctr"/>
+            <a:endParaRPr lang="zh-TW" altLang="en-US"/>
           </a:p>
         </p:txBody>
       </p:sp>
@@ -12619,7 +13039,7 @@
 </p:sld>
 </file>
 
-<file path=ppt/slides/slide11.xml><?xml version="1.0" encoding="utf-8"?>
+<file path=ppt/slides/slide12.xml><?xml version="1.0" encoding="utf-8"?>
 <p:sld xmlns:a="http://schemas.openxmlformats.org/drawingml/2006/main" xmlns:r="http://schemas.openxmlformats.org/officeDocument/2006/relationships" xmlns:p="http://schemas.openxmlformats.org/presentationml/2006/main">
   <p:cSld>
     <p:spTree>
@@ -12670,11 +13090,11 @@
               </a:spcAft>
               <a:buNone/>
             </a:pPr>
-            <a:fld id="{00000000-1234-1234-1234-123412341234}" type="slidenum">
-              <a:rPr lang="en"/>
+            <a:r>
+              <a:rPr lang="en-US" altLang="zh-TW" dirty="0"/>
               <a:t>11</a:t>
-            </a:fld>
-            <a:endParaRPr/>
+            </a:r>
+            <a:endParaRPr dirty="0"/>
           </a:p>
         </p:txBody>
       </p:sp>
@@ -16897,7 +17317,7 @@
         </p:blipFill>
         <p:spPr>
           <a:xfrm>
-            <a:off x="6682062" y="1442027"/>
+            <a:off x="6741775" y="1442027"/>
             <a:ext cx="2102770" cy="2743048"/>
           </a:xfrm>
           <a:prstGeom prst="rect">
@@ -17065,7 +17485,7 @@
         <p:spPr>
           <a:xfrm>
             <a:off x="6361176" y="2810584"/>
-            <a:ext cx="320886" cy="2967"/>
+            <a:ext cx="380599" cy="2967"/>
           </a:xfrm>
           <a:prstGeom prst="straightConnector1">
             <a:avLst/>
@@ -17752,7 +18172,7 @@
       <p:pic>
         <p:nvPicPr>
           <p:cNvPr id="4" name="Picture" title="This slide contains the following visuals: textbox ,textbox ,Top 15 Skills ,Top 15 Tools. Please refer to the notes on this slide for details">
-            <a:hlinkClick r:id="rId2"/>
+            <a:hlinkClick r:id="rId3"/>
             <a:extLst>
               <a:ext uri="{FF2B5EF4-FFF2-40B4-BE49-F238E27FC236}">
                 <a16:creationId xmlns:a16="http://schemas.microsoft.com/office/drawing/2014/main" id="{44AF0090-901E-A0E3-95CB-DFDBC29E897D}"/>
@@ -17765,7 +18185,7 @@
           <p:nvPr/>
         </p:nvPicPr>
         <p:blipFill>
-          <a:blip r:embed="rId3"/>
+          <a:blip r:embed="rId4"/>
           <a:srcRect t="3274" r="1344" b="6425"/>
           <a:stretch>
             <a:fillRect/>
@@ -17896,7 +18316,7 @@
         <p:spPr>
           <a:xfrm>
             <a:off x="217898" y="967990"/>
-            <a:ext cx="4354101" cy="3359499"/>
+            <a:ext cx="4354101" cy="3510568"/>
           </a:xfrm>
           <a:prstGeom prst="rect">
             <a:avLst/>
@@ -17932,8 +18352,8 @@
         </p:blipFill>
         <p:spPr>
           <a:xfrm>
-            <a:off x="4572000" y="967991"/>
-            <a:ext cx="4354100" cy="3359498"/>
+            <a:off x="4572000" y="967990"/>
+            <a:ext cx="4354100" cy="3510567"/>
           </a:xfrm>
           <a:prstGeom prst="rect">
             <a:avLst/>

--- a/程式介紹與展示.pptx
+++ b/程式介紹與展示.pptx
@@ -5,7 +5,7 @@
     <p:sldMasterId id="2147483674" r:id="rId1"/>
   </p:sldMasterIdLst>
   <p:notesMasterIdLst>
-    <p:notesMasterId r:id="rId14"/>
+    <p:notesMasterId r:id="rId13"/>
   </p:notesMasterIdLst>
   <p:sldIdLst>
     <p:sldId id="256" r:id="rId2"/>
@@ -15,35 +15,34 @@
     <p:sldId id="306" r:id="rId6"/>
     <p:sldId id="307" r:id="rId7"/>
     <p:sldId id="304" r:id="rId8"/>
-    <p:sldId id="308" r:id="rId9"/>
-    <p:sldId id="257" r:id="rId10"/>
-    <p:sldId id="309" r:id="rId11"/>
-    <p:sldId id="261" r:id="rId12"/>
-    <p:sldId id="284" r:id="rId13"/>
+    <p:sldId id="257" r:id="rId9"/>
+    <p:sldId id="310" r:id="rId10"/>
+    <p:sldId id="261" r:id="rId11"/>
+    <p:sldId id="284" r:id="rId12"/>
   </p:sldIdLst>
   <p:sldSz cx="9144000" cy="5143500" type="screen16x9"/>
   <p:notesSz cx="6858000" cy="9144000"/>
   <p:embeddedFontLst>
     <p:embeddedFont>
-      <p:font typeface="Bebas Neue" panose="02020500000000000000" charset="0"/>
-      <p:regular r:id="rId15"/>
+      <p:font typeface="Bebas Neue" panose="020B0606020202050201" pitchFamily="34" charset="0"/>
+      <p:regular r:id="rId14"/>
     </p:embeddedFont>
     <p:embeddedFont>
       <p:font typeface="Mulish" panose="02020500000000000000" charset="0"/>
-      <p:regular r:id="rId16"/>
-      <p:bold r:id="rId17"/>
-      <p:italic r:id="rId18"/>
-      <p:boldItalic r:id="rId19"/>
+      <p:regular r:id="rId15"/>
+      <p:bold r:id="rId16"/>
+      <p:italic r:id="rId17"/>
+      <p:boldItalic r:id="rId18"/>
     </p:embeddedFont>
     <p:embeddedFont>
-      <p:font typeface="Nunito Light" panose="02020500000000000000" charset="0"/>
-      <p:regular r:id="rId20"/>
-      <p:italic r:id="rId21"/>
+      <p:font typeface="Nunito Light" pitchFamily="2" charset="0"/>
+      <p:regular r:id="rId19"/>
+      <p:italic r:id="rId20"/>
     </p:embeddedFont>
     <p:embeddedFont>
       <p:font typeface="Quicksand" panose="02020500000000000000" charset="0"/>
-      <p:regular r:id="rId22"/>
-      <p:bold r:id="rId23"/>
+      <p:regular r:id="rId21"/>
+      <p:bold r:id="rId22"/>
     </p:embeddedFont>
   </p:embeddedFontLst>
   <p:defaultTextStyle>
@@ -859,13 +858,7 @@
   <p:cSld>
     <p:spTree>
       <p:nvGrpSpPr>
-        <p:cNvPr id="1" name="Shape 349">
-          <a:extLst>
-            <a:ext uri="{FF2B5EF4-FFF2-40B4-BE49-F238E27FC236}">
-              <a16:creationId xmlns:a16="http://schemas.microsoft.com/office/drawing/2014/main" id="{4B8B47C6-0DE6-7E5D-DDE9-57518D26E18D}"/>
-            </a:ext>
-          </a:extLst>
-        </p:cNvPr>
+        <p:cNvPr id="1" name="Shape 349"/>
         <p:cNvGrpSpPr/>
         <p:nvPr/>
       </p:nvGrpSpPr>
@@ -879,13 +872,7 @@
       </p:grpSpPr>
       <p:sp>
         <p:nvSpPr>
-          <p:cNvPr id="350" name="Google Shape;350;ged9256fe6f_0_23:notes">
-            <a:extLst>
-              <a:ext uri="{FF2B5EF4-FFF2-40B4-BE49-F238E27FC236}">
-                <a16:creationId xmlns:a16="http://schemas.microsoft.com/office/drawing/2014/main" id="{8139641A-7950-E38F-F172-4F8A5250E8AE}"/>
-              </a:ext>
-            </a:extLst>
-          </p:cNvPr>
+          <p:cNvPr id="350" name="Google Shape;350;ged9256fe6f_0_23:notes"/>
           <p:cNvSpPr>
             <a:spLocks noGrp="1" noRot="1" noChangeAspect="1"/>
           </p:cNvSpPr>
@@ -933,128 +920,6 @@
       </p:sp>
       <p:sp>
         <p:nvSpPr>
-          <p:cNvPr id="351" name="Google Shape;351;ged9256fe6f_0_23:notes">
-            <a:extLst>
-              <a:ext uri="{FF2B5EF4-FFF2-40B4-BE49-F238E27FC236}">
-                <a16:creationId xmlns:a16="http://schemas.microsoft.com/office/drawing/2014/main" id="{07C478F5-38FF-FCC6-6B02-3A98895327D3}"/>
-              </a:ext>
-            </a:extLst>
-          </p:cNvPr>
-          <p:cNvSpPr txBox="1">
-            <a:spLocks noGrp="1"/>
-          </p:cNvSpPr>
-          <p:nvPr>
-            <p:ph type="body" idx="1"/>
-          </p:nvPr>
-        </p:nvSpPr>
-        <p:spPr>
-          <a:xfrm>
-            <a:off x="685800" y="4343400"/>
-            <a:ext cx="5486400" cy="4114800"/>
-          </a:xfrm>
-          <a:prstGeom prst="rect">
-            <a:avLst/>
-          </a:prstGeom>
-        </p:spPr>
-        <p:txBody>
-          <a:bodyPr spcFirstLastPara="1" wrap="square" lIns="91425" tIns="91425" rIns="91425" bIns="91425" anchor="t" anchorCtr="0">
-            <a:noAutofit/>
-          </a:bodyPr>
-          <a:lstStyle/>
-          <a:p>
-            <a:pPr marL="0" lvl="0" indent="0" algn="l" rtl="0">
-              <a:spcBef>
-                <a:spcPts val="0"/>
-              </a:spcBef>
-              <a:spcAft>
-                <a:spcPts val="0"/>
-              </a:spcAft>
-              <a:buNone/>
-            </a:pPr>
-            <a:endParaRPr/>
-          </a:p>
-        </p:txBody>
-      </p:sp>
-    </p:spTree>
-    <p:extLst>
-      <p:ext uri="{BB962C8B-B14F-4D97-AF65-F5344CB8AC3E}">
-        <p14:creationId xmlns:p14="http://schemas.microsoft.com/office/powerpoint/2010/main" val="2083211988"/>
-      </p:ext>
-    </p:extLst>
-  </p:cSld>
-  <p:clrMapOvr>
-    <a:masterClrMapping/>
-  </p:clrMapOvr>
-</p:notes>
-</file>
-
-<file path=ppt/notesSlides/notesSlide11.xml><?xml version="1.0" encoding="utf-8"?>
-<p:notes xmlns:a="http://schemas.openxmlformats.org/drawingml/2006/main" xmlns:r="http://schemas.openxmlformats.org/officeDocument/2006/relationships" xmlns:p="http://schemas.openxmlformats.org/presentationml/2006/main" showMasterSp="0" showMasterPhAnim="0">
-  <p:cSld>
-    <p:spTree>
-      <p:nvGrpSpPr>
-        <p:cNvPr id="1" name="Shape 349"/>
-        <p:cNvGrpSpPr/>
-        <p:nvPr/>
-      </p:nvGrpSpPr>
-      <p:grpSpPr>
-        <a:xfrm>
-          <a:off x="0" y="0"/>
-          <a:ext cx="0" cy="0"/>
-          <a:chOff x="0" y="0"/>
-          <a:chExt cx="0" cy="0"/>
-        </a:xfrm>
-      </p:grpSpPr>
-      <p:sp>
-        <p:nvSpPr>
-          <p:cNvPr id="350" name="Google Shape;350;ged9256fe6f_0_23:notes"/>
-          <p:cNvSpPr>
-            <a:spLocks noGrp="1" noRot="1" noChangeAspect="1"/>
-          </p:cNvSpPr>
-          <p:nvPr>
-            <p:ph type="sldImg" idx="2"/>
-          </p:nvPr>
-        </p:nvSpPr>
-        <p:spPr>
-          <a:xfrm>
-            <a:off x="381000" y="685800"/>
-            <a:ext cx="6096000" cy="3429000"/>
-          </a:xfrm>
-          <a:custGeom>
-            <a:avLst/>
-            <a:gdLst/>
-            <a:ahLst/>
-            <a:cxnLst/>
-            <a:rect l="l" t="t" r="r" b="b"/>
-            <a:pathLst>
-              <a:path w="120000" h="120000" extrusionOk="0">
-                <a:moveTo>
-                  <a:pt x="0" y="0"/>
-                </a:moveTo>
-                <a:lnTo>
-                  <a:pt x="120000" y="0"/>
-                </a:lnTo>
-                <a:lnTo>
-                  <a:pt x="120000" y="120000"/>
-                </a:lnTo>
-                <a:lnTo>
-                  <a:pt x="0" y="120000"/>
-                </a:lnTo>
-                <a:close/>
-              </a:path>
-            </a:pathLst>
-          </a:custGeom>
-        </p:spPr>
-        <p:txBody>
-          <a:bodyPr/>
-          <a:lstStyle/>
-          <a:p>
-            <a:endParaRPr lang="zh-TW" altLang="en-US"/>
-          </a:p>
-        </p:txBody>
-      </p:sp>
-      <p:sp>
-        <p:nvSpPr>
           <p:cNvPr id="351" name="Google Shape;351;ged9256fe6f_0_23:notes"/>
           <p:cNvSpPr txBox="1">
             <a:spLocks noGrp="1"/>
@@ -1099,7 +964,7 @@
 </p:notes>
 </file>
 
-<file path=ppt/notesSlides/notesSlide12.xml><?xml version="1.0" encoding="utf-8"?>
+<file path=ppt/notesSlides/notesSlide11.xml><?xml version="1.0" encoding="utf-8"?>
 <p:notes xmlns:a="http://schemas.openxmlformats.org/drawingml/2006/main" xmlns:r="http://schemas.openxmlformats.org/officeDocument/2006/relationships" xmlns:p="http://schemas.openxmlformats.org/presentationml/2006/main" showMasterSp="0" showMasterPhAnim="0">
   <p:cSld>
     <p:spTree>
@@ -1905,13 +1770,7 @@
   <p:cSld>
     <p:spTree>
       <p:nvGrpSpPr>
-        <p:cNvPr id="1" name="Shape 349">
-          <a:extLst>
-            <a:ext uri="{FF2B5EF4-FFF2-40B4-BE49-F238E27FC236}">
-              <a16:creationId xmlns:a16="http://schemas.microsoft.com/office/drawing/2014/main" id="{4B8B47C6-0DE6-7E5D-DDE9-57518D26E18D}"/>
-            </a:ext>
-          </a:extLst>
-        </p:cNvPr>
+        <p:cNvPr id="1" name="Shape 291"/>
         <p:cNvGrpSpPr/>
         <p:nvPr/>
       </p:nvGrpSpPr>
@@ -1925,13 +1784,7 @@
       </p:grpSpPr>
       <p:sp>
         <p:nvSpPr>
-          <p:cNvPr id="350" name="Google Shape;350;ged9256fe6f_0_23:notes">
-            <a:extLst>
-              <a:ext uri="{FF2B5EF4-FFF2-40B4-BE49-F238E27FC236}">
-                <a16:creationId xmlns:a16="http://schemas.microsoft.com/office/drawing/2014/main" id="{8139641A-7950-E38F-F172-4F8A5250E8AE}"/>
-              </a:ext>
-            </a:extLst>
-          </p:cNvPr>
+          <p:cNvPr id="292" name="Google Shape;292;g133f6155f6d_0_3:notes"/>
           <p:cNvSpPr>
             <a:spLocks noGrp="1" noRot="1" noChangeAspect="1"/>
           </p:cNvSpPr>
@@ -1979,13 +1832,7 @@
       </p:sp>
       <p:sp>
         <p:nvSpPr>
-          <p:cNvPr id="351" name="Google Shape;351;ged9256fe6f_0_23:notes">
-            <a:extLst>
-              <a:ext uri="{FF2B5EF4-FFF2-40B4-BE49-F238E27FC236}">
-                <a16:creationId xmlns:a16="http://schemas.microsoft.com/office/drawing/2014/main" id="{07C478F5-38FF-FCC6-6B02-3A98895327D3}"/>
-              </a:ext>
-            </a:extLst>
-          </p:cNvPr>
+          <p:cNvPr id="293" name="Google Shape;293;g133f6155f6d_0_3:notes"/>
           <p:cNvSpPr txBox="1">
             <a:spLocks noGrp="1"/>
           </p:cNvSpPr>
@@ -2022,11 +1869,6 @@
         </p:txBody>
       </p:sp>
     </p:spTree>
-    <p:extLst>
-      <p:ext uri="{BB962C8B-B14F-4D97-AF65-F5344CB8AC3E}">
-        <p14:creationId xmlns:p14="http://schemas.microsoft.com/office/powerpoint/2010/main" val="3265544753"/>
-      </p:ext>
-    </p:extLst>
   </p:cSld>
   <p:clrMapOvr>
     <a:masterClrMapping/>
@@ -2039,7 +1881,13 @@
   <p:cSld>
     <p:spTree>
       <p:nvGrpSpPr>
-        <p:cNvPr id="1" name="Shape 291"/>
+        <p:cNvPr id="1" name="Shape 291">
+          <a:extLst>
+            <a:ext uri="{FF2B5EF4-FFF2-40B4-BE49-F238E27FC236}">
+              <a16:creationId xmlns:a16="http://schemas.microsoft.com/office/drawing/2014/main" id="{CA010337-7295-458C-92FB-2A5E6BE1BAE8}"/>
+            </a:ext>
+          </a:extLst>
+        </p:cNvPr>
         <p:cNvGrpSpPr/>
         <p:nvPr/>
       </p:nvGrpSpPr>
@@ -2053,7 +1901,13 @@
       </p:grpSpPr>
       <p:sp>
         <p:nvSpPr>
-          <p:cNvPr id="292" name="Google Shape;292;g133f6155f6d_0_3:notes"/>
+          <p:cNvPr id="292" name="Google Shape;292;g133f6155f6d_0_3:notes">
+            <a:extLst>
+              <a:ext uri="{FF2B5EF4-FFF2-40B4-BE49-F238E27FC236}">
+                <a16:creationId xmlns:a16="http://schemas.microsoft.com/office/drawing/2014/main" id="{DD9AB43E-4FE1-9B79-448D-612144D91DF0}"/>
+              </a:ext>
+            </a:extLst>
+          </p:cNvPr>
           <p:cNvSpPr>
             <a:spLocks noGrp="1" noRot="1" noChangeAspect="1"/>
           </p:cNvSpPr>
@@ -2101,7 +1955,13 @@
       </p:sp>
       <p:sp>
         <p:nvSpPr>
-          <p:cNvPr id="293" name="Google Shape;293;g133f6155f6d_0_3:notes"/>
+          <p:cNvPr id="293" name="Google Shape;293;g133f6155f6d_0_3:notes">
+            <a:extLst>
+              <a:ext uri="{FF2B5EF4-FFF2-40B4-BE49-F238E27FC236}">
+                <a16:creationId xmlns:a16="http://schemas.microsoft.com/office/drawing/2014/main" id="{48E729D9-8EA5-D7B1-7369-3220C4EC4CC8}"/>
+              </a:ext>
+            </a:extLst>
+          </p:cNvPr>
           <p:cNvSpPr txBox="1">
             <a:spLocks noGrp="1"/>
           </p:cNvSpPr>
@@ -2138,6 +1998,11 @@
         </p:txBody>
       </p:sp>
     </p:spTree>
+    <p:extLst>
+      <p:ext uri="{BB962C8B-B14F-4D97-AF65-F5344CB8AC3E}">
+        <p14:creationId xmlns:p14="http://schemas.microsoft.com/office/powerpoint/2010/main" val="2195808436"/>
+      </p:ext>
+    </p:extLst>
   </p:cSld>
   <p:clrMapOvr>
     <a:masterClrMapping/>
@@ -12633,176 +12498,6 @@
   <p:cSld>
     <p:spTree>
       <p:nvGrpSpPr>
-        <p:cNvPr id="1" name="Shape 352">
-          <a:extLst>
-            <a:ext uri="{FF2B5EF4-FFF2-40B4-BE49-F238E27FC236}">
-              <a16:creationId xmlns:a16="http://schemas.microsoft.com/office/drawing/2014/main" id="{F5B0BC03-2AA9-600D-FBBE-77D998CEAE9E}"/>
-            </a:ext>
-          </a:extLst>
-        </p:cNvPr>
-        <p:cNvGrpSpPr/>
-        <p:nvPr/>
-      </p:nvGrpSpPr>
-      <p:grpSpPr>
-        <a:xfrm>
-          <a:off x="0" y="0"/>
-          <a:ext cx="0" cy="0"/>
-          <a:chOff x="0" y="0"/>
-          <a:chExt cx="0" cy="0"/>
-        </a:xfrm>
-      </p:grpSpPr>
-      <p:sp>
-        <p:nvSpPr>
-          <p:cNvPr id="355" name="Google Shape;355;p34">
-            <a:extLst>
-              <a:ext uri="{FF2B5EF4-FFF2-40B4-BE49-F238E27FC236}">
-                <a16:creationId xmlns:a16="http://schemas.microsoft.com/office/drawing/2014/main" id="{4A7A125A-0EE4-A7D0-00F1-EFBA1EC76214}"/>
-              </a:ext>
-            </a:extLst>
-          </p:cNvPr>
-          <p:cNvSpPr txBox="1">
-            <a:spLocks noGrp="1"/>
-          </p:cNvSpPr>
-          <p:nvPr>
-            <p:ph type="sldNum" idx="12"/>
-          </p:nvPr>
-        </p:nvSpPr>
-        <p:spPr>
-          <a:xfrm>
-            <a:off x="4297650" y="4602875"/>
-            <a:ext cx="548700" cy="333600"/>
-          </a:xfrm>
-          <a:prstGeom prst="rect">
-            <a:avLst/>
-          </a:prstGeom>
-        </p:spPr>
-        <p:txBody>
-          <a:bodyPr spcFirstLastPara="1" wrap="square" lIns="91425" tIns="91425" rIns="91425" bIns="91425" anchor="t" anchorCtr="0">
-            <a:noAutofit/>
-          </a:bodyPr>
-          <a:lstStyle/>
-          <a:p>
-            <a:pPr marL="0" lvl="0" indent="0" algn="ctr" rtl="0">
-              <a:spcBef>
-                <a:spcPts val="0"/>
-              </a:spcBef>
-              <a:spcAft>
-                <a:spcPts val="0"/>
-              </a:spcAft>
-              <a:buNone/>
-            </a:pPr>
-            <a:r>
-              <a:rPr lang="en-US" altLang="zh-TW" dirty="0"/>
-              <a:t>9</a:t>
-            </a:r>
-            <a:endParaRPr dirty="0"/>
-          </a:p>
-        </p:txBody>
-      </p:sp>
-      <p:sp>
-        <p:nvSpPr>
-          <p:cNvPr id="14" name="文字方塊 13">
-            <a:extLst>
-              <a:ext uri="{FF2B5EF4-FFF2-40B4-BE49-F238E27FC236}">
-                <a16:creationId xmlns:a16="http://schemas.microsoft.com/office/drawing/2014/main" id="{E7C98D4C-83D3-20C7-FEBF-D561132C09C7}"/>
-              </a:ext>
-            </a:extLst>
-          </p:cNvPr>
-          <p:cNvSpPr txBox="1"/>
-          <p:nvPr/>
-        </p:nvSpPr>
-        <p:spPr>
-          <a:xfrm>
-            <a:off x="2286000" y="376464"/>
-            <a:ext cx="4572000" cy="523220"/>
-          </a:xfrm>
-          <a:prstGeom prst="rect">
-            <a:avLst/>
-          </a:prstGeom>
-          <a:noFill/>
-        </p:spPr>
-        <p:txBody>
-          <a:bodyPr wrap="square">
-            <a:spAutoFit/>
-          </a:bodyPr>
-          <a:lstStyle/>
-          <a:p>
-            <a:pPr algn="ctr"/>
-            <a:r>
-              <a:rPr lang="zh-TW" altLang="en-US" sz="2800" dirty="0">
-                <a:ln w="0"/>
-                <a:gradFill>
-                  <a:gsLst>
-                    <a:gs pos="21000">
-                      <a:srgbClr val="53575C"/>
-                    </a:gs>
-                    <a:gs pos="88000">
-                      <a:srgbClr val="C5C7CA"/>
-                    </a:gs>
-                  </a:gsLst>
-                  <a:lin ang="5400000"/>
-                </a:gradFill>
-              </a:rPr>
-              <a:t>圖表展示</a:t>
-            </a:r>
-          </a:p>
-        </p:txBody>
-      </p:sp>
-      <p:pic>
-        <p:nvPicPr>
-          <p:cNvPr id="3" name="圖片 2">
-            <a:extLst>
-              <a:ext uri="{FF2B5EF4-FFF2-40B4-BE49-F238E27FC236}">
-                <a16:creationId xmlns:a16="http://schemas.microsoft.com/office/drawing/2014/main" id="{4A6B7435-C897-4B5A-817A-96EF38533240}"/>
-              </a:ext>
-            </a:extLst>
-          </p:cNvPr>
-          <p:cNvPicPr>
-            <a:picLocks noChangeAspect="1"/>
-          </p:cNvPicPr>
-          <p:nvPr/>
-        </p:nvPicPr>
-        <p:blipFill>
-          <a:blip r:embed="rId3"/>
-          <a:stretch>
-            <a:fillRect/>
-          </a:stretch>
-        </p:blipFill>
-        <p:spPr>
-          <a:xfrm>
-            <a:off x="1221426" y="833556"/>
-            <a:ext cx="6722196" cy="3835447"/>
-          </a:xfrm>
-          <a:prstGeom prst="rect">
-            <a:avLst/>
-          </a:prstGeom>
-          <a:ln w="12700">
-            <a:solidFill>
-              <a:schemeClr val="bg1">
-                <a:lumMod val="10000"/>
-              </a:schemeClr>
-            </a:solidFill>
-          </a:ln>
-        </p:spPr>
-      </p:pic>
-    </p:spTree>
-    <p:extLst>
-      <p:ext uri="{BB962C8B-B14F-4D97-AF65-F5344CB8AC3E}">
-        <p14:creationId xmlns:p14="http://schemas.microsoft.com/office/powerpoint/2010/main" val="241514042"/>
-      </p:ext>
-    </p:extLst>
-  </p:cSld>
-  <p:clrMapOvr>
-    <a:masterClrMapping/>
-  </p:clrMapOvr>
-</p:sld>
-</file>
-
-<file path=ppt/slides/slide11.xml><?xml version="1.0" encoding="utf-8"?>
-<p:sld xmlns:a="http://schemas.openxmlformats.org/drawingml/2006/main" xmlns:r="http://schemas.openxmlformats.org/officeDocument/2006/relationships" xmlns:p="http://schemas.openxmlformats.org/presentationml/2006/main">
-  <p:cSld>
-    <p:spTree>
-      <p:nvGrpSpPr>
         <p:cNvPr id="1" name="Shape 352"/>
         <p:cNvGrpSpPr/>
         <p:nvPr/>
@@ -13039,7 +12734,7 @@
 </p:sld>
 </file>
 
-<file path=ppt/slides/slide12.xml><?xml version="1.0" encoding="utf-8"?>
+<file path=ppt/slides/slide11.xml><?xml version="1.0" encoding="utf-8"?>
 <p:sld xmlns:a="http://schemas.openxmlformats.org/drawingml/2006/main" xmlns:r="http://schemas.openxmlformats.org/officeDocument/2006/relationships" xmlns:p="http://schemas.openxmlformats.org/presentationml/2006/main">
   <p:cSld>
     <p:spTree>
@@ -14893,7 +14588,7 @@
         </p:nvSpPr>
         <p:spPr>
           <a:xfrm>
-            <a:off x="1642873" y="2601468"/>
+            <a:off x="1642873" y="2351532"/>
             <a:ext cx="2350008" cy="1169551"/>
           </a:xfrm>
           <a:prstGeom prst="rect">
@@ -15328,6 +15023,79 @@
           </a:p>
         </p:txBody>
       </p:sp>
+      <p:sp>
+        <p:nvSpPr>
+          <p:cNvPr id="2" name="文字方塊 1">
+            <a:extLst>
+              <a:ext uri="{FF2B5EF4-FFF2-40B4-BE49-F238E27FC236}">
+                <a16:creationId xmlns:a16="http://schemas.microsoft.com/office/drawing/2014/main" id="{A2D5AFB7-4AAB-7B8F-309B-7C337574D8E0}"/>
+              </a:ext>
+            </a:extLst>
+          </p:cNvPr>
+          <p:cNvSpPr txBox="1"/>
+          <p:nvPr/>
+        </p:nvSpPr>
+        <p:spPr>
+          <a:xfrm>
+            <a:off x="1642873" y="3521083"/>
+            <a:ext cx="2807208" cy="954107"/>
+          </a:xfrm>
+          <a:prstGeom prst="rect">
+            <a:avLst/>
+          </a:prstGeom>
+          <a:noFill/>
+        </p:spPr>
+        <p:txBody>
+          <a:bodyPr wrap="square" rtlCol="0">
+            <a:spAutoFit/>
+          </a:bodyPr>
+          <a:lstStyle/>
+          <a:p>
+            <a:r>
+              <a:rPr lang="en-US" altLang="zh-TW" dirty="0"/>
+              <a:t>Why output csv instead of graph?</a:t>
+            </a:r>
+          </a:p>
+          <a:p>
+            <a:r>
+              <a:rPr lang="zh-TW" altLang="en-US" dirty="0"/>
+              <a:t>我可以使用 </a:t>
+            </a:r>
+            <a:r>
+              <a:rPr lang="en-US" altLang="zh-TW" dirty="0"/>
+              <a:t>.csv </a:t>
+            </a:r>
+            <a:r>
+              <a:rPr lang="zh-TW" altLang="en-US" dirty="0"/>
+              <a:t>快速的製作任何有特定需求的圖表</a:t>
+            </a:r>
+            <a:r>
+              <a:rPr lang="en-US" altLang="zh-TW" dirty="0"/>
+              <a:t>, </a:t>
+            </a:r>
+            <a:r>
+              <a:rPr lang="zh-TW" altLang="en-US" dirty="0"/>
+              <a:t>相反地</a:t>
+            </a:r>
+            <a:r>
+              <a:rPr lang="en-US" altLang="zh-TW" dirty="0"/>
+              <a:t>, </a:t>
+            </a:r>
+            <a:r>
+              <a:rPr lang="zh-TW" altLang="en-US" dirty="0"/>
+              <a:t>將圖表製作成 </a:t>
+            </a:r>
+            <a:r>
+              <a:rPr lang="en-US" altLang="zh-TW" dirty="0"/>
+              <a:t>.csv</a:t>
+            </a:r>
+            <a:r>
+              <a:rPr lang="zh-TW" altLang="en-US" dirty="0"/>
+              <a:t> 會很不方便</a:t>
+            </a:r>
+          </a:p>
+        </p:txBody>
+      </p:sp>
     </p:spTree>
   </p:cSld>
   <p:clrMapOvr>
@@ -18171,11 +17939,11 @@
       </p:sp>
       <p:pic>
         <p:nvPicPr>
-          <p:cNvPr id="4" name="Picture" title="This slide contains the following visuals: textbox ,textbox ,Top 15 Skills ,Top 15 Tools. Please refer to the notes on this slide for details">
+          <p:cNvPr id="2" name="Picture" title="This slide contains the following visuals: textbox ,textbox ,Top 15 Skills ,Top 15 Tools. Please refer to the notes on this slide for details">
             <a:hlinkClick r:id="rId3"/>
             <a:extLst>
               <a:ext uri="{FF2B5EF4-FFF2-40B4-BE49-F238E27FC236}">
-                <a16:creationId xmlns:a16="http://schemas.microsoft.com/office/drawing/2014/main" id="{44AF0090-901E-A0E3-95CB-DFDBC29E897D}"/>
+                <a16:creationId xmlns:a16="http://schemas.microsoft.com/office/drawing/2014/main" id="{3F28D09B-E7A6-BD85-D95D-B3411043D09E}"/>
               </a:ext>
             </a:extLst>
           </p:cNvPr>
@@ -18186,15 +17954,15 @@
         </p:nvPicPr>
         <p:blipFill>
           <a:blip r:embed="rId4"/>
-          <a:srcRect t="3274" r="1344" b="6425"/>
+          <a:srcRect l="1390" t="3676" r="2444" b="7822"/>
           <a:stretch>
             <a:fillRect/>
           </a:stretch>
         </p:blipFill>
         <p:spPr>
           <a:xfrm>
-            <a:off x="973112" y="927127"/>
-            <a:ext cx="7197777" cy="3758638"/>
+            <a:off x="940936" y="866027"/>
+            <a:ext cx="7262123" cy="3813048"/>
           </a:xfrm>
           <a:prstGeom prst="rect">
             <a:avLst/>
@@ -18223,213 +17991,6 @@
 </file>
 
 <file path=ppt/slides/slide8.xml><?xml version="1.0" encoding="utf-8"?>
-<p:sld xmlns:a="http://schemas.openxmlformats.org/drawingml/2006/main" xmlns:r="http://schemas.openxmlformats.org/officeDocument/2006/relationships" xmlns:p="http://schemas.openxmlformats.org/presentationml/2006/main">
-  <p:cSld>
-    <p:spTree>
-      <p:nvGrpSpPr>
-        <p:cNvPr id="1" name="Shape 352">
-          <a:extLst>
-            <a:ext uri="{FF2B5EF4-FFF2-40B4-BE49-F238E27FC236}">
-              <a16:creationId xmlns:a16="http://schemas.microsoft.com/office/drawing/2014/main" id="{F5B0BC03-2AA9-600D-FBBE-77D998CEAE9E}"/>
-            </a:ext>
-          </a:extLst>
-        </p:cNvPr>
-        <p:cNvGrpSpPr/>
-        <p:nvPr/>
-      </p:nvGrpSpPr>
-      <p:grpSpPr>
-        <a:xfrm>
-          <a:off x="0" y="0"/>
-          <a:ext cx="0" cy="0"/>
-          <a:chOff x="0" y="0"/>
-          <a:chExt cx="0" cy="0"/>
-        </a:xfrm>
-      </p:grpSpPr>
-      <p:sp>
-        <p:nvSpPr>
-          <p:cNvPr id="355" name="Google Shape;355;p34">
-            <a:extLst>
-              <a:ext uri="{FF2B5EF4-FFF2-40B4-BE49-F238E27FC236}">
-                <a16:creationId xmlns:a16="http://schemas.microsoft.com/office/drawing/2014/main" id="{4A7A125A-0EE4-A7D0-00F1-EFBA1EC76214}"/>
-              </a:ext>
-            </a:extLst>
-          </p:cNvPr>
-          <p:cNvSpPr txBox="1">
-            <a:spLocks noGrp="1"/>
-          </p:cNvSpPr>
-          <p:nvPr>
-            <p:ph type="sldNum" idx="12"/>
-          </p:nvPr>
-        </p:nvSpPr>
-        <p:spPr>
-          <a:xfrm>
-            <a:off x="4297650" y="4602875"/>
-            <a:ext cx="548700" cy="333600"/>
-          </a:xfrm>
-          <a:prstGeom prst="rect">
-            <a:avLst/>
-          </a:prstGeom>
-        </p:spPr>
-        <p:txBody>
-          <a:bodyPr spcFirstLastPara="1" wrap="square" lIns="91425" tIns="91425" rIns="91425" bIns="91425" anchor="t" anchorCtr="0">
-            <a:noAutofit/>
-          </a:bodyPr>
-          <a:lstStyle/>
-          <a:p>
-            <a:pPr marL="0" lvl="0" indent="0" algn="ctr" rtl="0">
-              <a:spcBef>
-                <a:spcPts val="0"/>
-              </a:spcBef>
-              <a:spcAft>
-                <a:spcPts val="0"/>
-              </a:spcAft>
-              <a:buNone/>
-            </a:pPr>
-            <a:r>
-              <a:rPr lang="en" dirty="0"/>
-              <a:t>7</a:t>
-            </a:r>
-            <a:endParaRPr dirty="0"/>
-          </a:p>
-        </p:txBody>
-      </p:sp>
-      <p:pic>
-        <p:nvPicPr>
-          <p:cNvPr id="11" name="圖片 10">
-            <a:extLst>
-              <a:ext uri="{FF2B5EF4-FFF2-40B4-BE49-F238E27FC236}">
-                <a16:creationId xmlns:a16="http://schemas.microsoft.com/office/drawing/2014/main" id="{9137114D-2CD8-AD80-EACD-6589E5B1DE94}"/>
-              </a:ext>
-            </a:extLst>
-          </p:cNvPr>
-          <p:cNvPicPr>
-            <a:picLocks noChangeAspect="1"/>
-          </p:cNvPicPr>
-          <p:nvPr/>
-        </p:nvPicPr>
-        <p:blipFill>
-          <a:blip r:embed="rId3"/>
-          <a:stretch>
-            <a:fillRect/>
-          </a:stretch>
-        </p:blipFill>
-        <p:spPr>
-          <a:xfrm>
-            <a:off x="217898" y="967990"/>
-            <a:ext cx="4354101" cy="3510568"/>
-          </a:xfrm>
-          <a:prstGeom prst="rect">
-            <a:avLst/>
-          </a:prstGeom>
-          <a:ln>
-            <a:solidFill>
-              <a:schemeClr val="bg1">
-                <a:lumMod val="10000"/>
-              </a:schemeClr>
-            </a:solidFill>
-          </a:ln>
-        </p:spPr>
-      </p:pic>
-      <p:pic>
-        <p:nvPicPr>
-          <p:cNvPr id="13" name="圖片 12">
-            <a:extLst>
-              <a:ext uri="{FF2B5EF4-FFF2-40B4-BE49-F238E27FC236}">
-                <a16:creationId xmlns:a16="http://schemas.microsoft.com/office/drawing/2014/main" id="{0DB0C4A7-E7E1-0F2F-2A0A-80B1216CA969}"/>
-              </a:ext>
-            </a:extLst>
-          </p:cNvPr>
-          <p:cNvPicPr>
-            <a:picLocks noChangeAspect="1"/>
-          </p:cNvPicPr>
-          <p:nvPr/>
-        </p:nvPicPr>
-        <p:blipFill>
-          <a:blip r:embed="rId4"/>
-          <a:stretch>
-            <a:fillRect/>
-          </a:stretch>
-        </p:blipFill>
-        <p:spPr>
-          <a:xfrm>
-            <a:off x="4572000" y="967990"/>
-            <a:ext cx="4354100" cy="3510567"/>
-          </a:xfrm>
-          <a:prstGeom prst="rect">
-            <a:avLst/>
-          </a:prstGeom>
-          <a:ln>
-            <a:solidFill>
-              <a:schemeClr val="bg1">
-                <a:lumMod val="10000"/>
-              </a:schemeClr>
-            </a:solidFill>
-          </a:ln>
-        </p:spPr>
-      </p:pic>
-      <p:sp>
-        <p:nvSpPr>
-          <p:cNvPr id="14" name="文字方塊 13">
-            <a:extLst>
-              <a:ext uri="{FF2B5EF4-FFF2-40B4-BE49-F238E27FC236}">
-                <a16:creationId xmlns:a16="http://schemas.microsoft.com/office/drawing/2014/main" id="{E7C98D4C-83D3-20C7-FEBF-D561132C09C7}"/>
-              </a:ext>
-            </a:extLst>
-          </p:cNvPr>
-          <p:cNvSpPr txBox="1"/>
-          <p:nvPr/>
-        </p:nvSpPr>
-        <p:spPr>
-          <a:xfrm>
-            <a:off x="2286000" y="376464"/>
-            <a:ext cx="4572000" cy="523220"/>
-          </a:xfrm>
-          <a:prstGeom prst="rect">
-            <a:avLst/>
-          </a:prstGeom>
-          <a:noFill/>
-        </p:spPr>
-        <p:txBody>
-          <a:bodyPr wrap="square">
-            <a:spAutoFit/>
-          </a:bodyPr>
-          <a:lstStyle/>
-          <a:p>
-            <a:pPr algn="ctr"/>
-            <a:r>
-              <a:rPr lang="zh-TW" altLang="en-US" sz="2800" dirty="0">
-                <a:ln w="0"/>
-                <a:gradFill>
-                  <a:gsLst>
-                    <a:gs pos="21000">
-                      <a:srgbClr val="53575C"/>
-                    </a:gs>
-                    <a:gs pos="88000">
-                      <a:srgbClr val="C5C7CA"/>
-                    </a:gs>
-                  </a:gsLst>
-                  <a:lin ang="5400000"/>
-                </a:gradFill>
-              </a:rPr>
-              <a:t>圖表展示</a:t>
-            </a:r>
-          </a:p>
-        </p:txBody>
-      </p:sp>
-    </p:spTree>
-    <p:extLst>
-      <p:ext uri="{BB962C8B-B14F-4D97-AF65-F5344CB8AC3E}">
-        <p14:creationId xmlns:p14="http://schemas.microsoft.com/office/powerpoint/2010/main" val="2726357564"/>
-      </p:ext>
-    </p:extLst>
-  </p:cSld>
-  <p:clrMapOvr>
-    <a:masterClrMapping/>
-  </p:clrMapOvr>
-</p:sld>
-</file>
-
-<file path=ppt/slides/slide9.xml><?xml version="1.0" encoding="utf-8"?>
 <p:sld xmlns:a="http://schemas.openxmlformats.org/drawingml/2006/main" xmlns:r="http://schemas.openxmlformats.org/officeDocument/2006/relationships" xmlns:p="http://schemas.openxmlformats.org/presentationml/2006/main">
   <p:cSld>
     <p:spTree>
@@ -18539,10 +18100,10 @@
       </p:sp>
       <p:pic>
         <p:nvPicPr>
-          <p:cNvPr id="5" name="圖片 4">
+          <p:cNvPr id="3" name="圖片 2">
             <a:extLst>
               <a:ext uri="{FF2B5EF4-FFF2-40B4-BE49-F238E27FC236}">
-                <a16:creationId xmlns:a16="http://schemas.microsoft.com/office/drawing/2014/main" id="{9337E5DD-E7CA-FC86-1A6C-F11F55A44CDE}"/>
+                <a16:creationId xmlns:a16="http://schemas.microsoft.com/office/drawing/2014/main" id="{5ED34386-CE03-0960-55EC-08246B85BD21}"/>
               </a:ext>
             </a:extLst>
           </p:cNvPr>
@@ -18559,8 +18120,8 @@
         </p:blipFill>
         <p:spPr>
           <a:xfrm>
-            <a:off x="1118445" y="899684"/>
-            <a:ext cx="6907110" cy="3767515"/>
+            <a:off x="1502664" y="851485"/>
+            <a:ext cx="6138672" cy="3799589"/>
           </a:xfrm>
           <a:prstGeom prst="rect">
             <a:avLst/>
@@ -18575,6 +18136,213 @@
         </p:spPr>
       </p:pic>
     </p:spTree>
+  </p:cSld>
+  <p:clrMapOvr>
+    <a:masterClrMapping/>
+  </p:clrMapOvr>
+</p:sld>
+</file>
+
+<file path=ppt/slides/slide9.xml><?xml version="1.0" encoding="utf-8"?>
+<p:sld xmlns:a="http://schemas.openxmlformats.org/drawingml/2006/main" xmlns:r="http://schemas.openxmlformats.org/officeDocument/2006/relationships" xmlns:p="http://schemas.openxmlformats.org/presentationml/2006/main">
+  <p:cSld>
+    <p:spTree>
+      <p:nvGrpSpPr>
+        <p:cNvPr id="1" name="Shape 294">
+          <a:extLst>
+            <a:ext uri="{FF2B5EF4-FFF2-40B4-BE49-F238E27FC236}">
+              <a16:creationId xmlns:a16="http://schemas.microsoft.com/office/drawing/2014/main" id="{D049356B-CF66-52EB-6F65-01368B6BB8CA}"/>
+            </a:ext>
+          </a:extLst>
+        </p:cNvPr>
+        <p:cNvGrpSpPr/>
+        <p:nvPr/>
+      </p:nvGrpSpPr>
+      <p:grpSpPr>
+        <a:xfrm>
+          <a:off x="0" y="0"/>
+          <a:ext cx="0" cy="0"/>
+          <a:chOff x="0" y="0"/>
+          <a:chExt cx="0" cy="0"/>
+        </a:xfrm>
+      </p:grpSpPr>
+      <p:sp>
+        <p:nvSpPr>
+          <p:cNvPr id="300" name="Google Shape;300;p30">
+            <a:extLst>
+              <a:ext uri="{FF2B5EF4-FFF2-40B4-BE49-F238E27FC236}">
+                <a16:creationId xmlns:a16="http://schemas.microsoft.com/office/drawing/2014/main" id="{E64D6DD2-4C56-334A-6CDA-651F7C5714D8}"/>
+              </a:ext>
+            </a:extLst>
+          </p:cNvPr>
+          <p:cNvSpPr txBox="1">
+            <a:spLocks noGrp="1"/>
+          </p:cNvSpPr>
+          <p:nvPr>
+            <p:ph type="sldNum" idx="12"/>
+          </p:nvPr>
+        </p:nvSpPr>
+        <p:spPr>
+          <a:xfrm>
+            <a:off x="4297650" y="4602875"/>
+            <a:ext cx="548700" cy="333600"/>
+          </a:xfrm>
+          <a:prstGeom prst="rect">
+            <a:avLst/>
+          </a:prstGeom>
+        </p:spPr>
+        <p:txBody>
+          <a:bodyPr spcFirstLastPara="1" wrap="square" lIns="91425" tIns="91425" rIns="91425" bIns="91425" anchor="t" anchorCtr="0">
+            <a:noAutofit/>
+          </a:bodyPr>
+          <a:lstStyle/>
+          <a:p>
+            <a:pPr marL="0" lvl="0" indent="0" algn="ctr" rtl="0">
+              <a:spcBef>
+                <a:spcPts val="0"/>
+              </a:spcBef>
+              <a:spcAft>
+                <a:spcPts val="0"/>
+              </a:spcAft>
+              <a:buNone/>
+            </a:pPr>
+            <a:r>
+              <a:rPr lang="en" dirty="0"/>
+              <a:t>8</a:t>
+            </a:r>
+            <a:endParaRPr dirty="0"/>
+          </a:p>
+        </p:txBody>
+      </p:sp>
+      <p:sp>
+        <p:nvSpPr>
+          <p:cNvPr id="11" name="文字方塊 10">
+            <a:extLst>
+              <a:ext uri="{FF2B5EF4-FFF2-40B4-BE49-F238E27FC236}">
+                <a16:creationId xmlns:a16="http://schemas.microsoft.com/office/drawing/2014/main" id="{9038CC45-9AD5-43AD-9861-EDC4FE1629A2}"/>
+              </a:ext>
+            </a:extLst>
+          </p:cNvPr>
+          <p:cNvSpPr txBox="1"/>
+          <p:nvPr/>
+        </p:nvSpPr>
+        <p:spPr>
+          <a:xfrm>
+            <a:off x="2286000" y="376464"/>
+            <a:ext cx="4572000" cy="523220"/>
+          </a:xfrm>
+          <a:prstGeom prst="rect">
+            <a:avLst/>
+          </a:prstGeom>
+          <a:noFill/>
+        </p:spPr>
+        <p:txBody>
+          <a:bodyPr wrap="square">
+            <a:spAutoFit/>
+          </a:bodyPr>
+          <a:lstStyle/>
+          <a:p>
+            <a:pPr algn="ctr"/>
+            <a:r>
+              <a:rPr lang="zh-TW" altLang="en-US" sz="2800" dirty="0">
+                <a:ln w="0"/>
+                <a:gradFill>
+                  <a:gsLst>
+                    <a:gs pos="21000">
+                      <a:srgbClr val="53575C"/>
+                    </a:gs>
+                    <a:gs pos="88000">
+                      <a:srgbClr val="C5C7CA"/>
+                    </a:gs>
+                  </a:gsLst>
+                  <a:lin ang="5400000"/>
+                </a:gradFill>
+              </a:rPr>
+              <a:t>圖表展示</a:t>
+            </a:r>
+          </a:p>
+        </p:txBody>
+      </p:sp>
+      <p:pic>
+        <p:nvPicPr>
+          <p:cNvPr id="10" name="圖片 9">
+            <a:extLst>
+              <a:ext uri="{FF2B5EF4-FFF2-40B4-BE49-F238E27FC236}">
+                <a16:creationId xmlns:a16="http://schemas.microsoft.com/office/drawing/2014/main" id="{627E0BA1-7A81-A5EA-7771-85FBE28CA9D8}"/>
+              </a:ext>
+            </a:extLst>
+          </p:cNvPr>
+          <p:cNvPicPr>
+            <a:picLocks noChangeAspect="1"/>
+          </p:cNvPicPr>
+          <p:nvPr/>
+        </p:nvPicPr>
+        <p:blipFill>
+          <a:blip r:embed="rId3"/>
+          <a:stretch>
+            <a:fillRect/>
+          </a:stretch>
+        </p:blipFill>
+        <p:spPr>
+          <a:xfrm>
+            <a:off x="210660" y="899684"/>
+            <a:ext cx="4348800" cy="3474345"/>
+          </a:xfrm>
+          <a:prstGeom prst="rect">
+            <a:avLst/>
+          </a:prstGeom>
+          <a:ln w="12700">
+            <a:solidFill>
+              <a:schemeClr val="bg1">
+                <a:lumMod val="10000"/>
+              </a:schemeClr>
+            </a:solidFill>
+          </a:ln>
+        </p:spPr>
+      </p:pic>
+      <p:pic>
+        <p:nvPicPr>
+          <p:cNvPr id="12" name="圖片 11">
+            <a:extLst>
+              <a:ext uri="{FF2B5EF4-FFF2-40B4-BE49-F238E27FC236}">
+                <a16:creationId xmlns:a16="http://schemas.microsoft.com/office/drawing/2014/main" id="{B81F9596-BA47-B826-C0E8-DB9FFB92DCD2}"/>
+              </a:ext>
+            </a:extLst>
+          </p:cNvPr>
+          <p:cNvPicPr>
+            <a:picLocks noChangeAspect="1"/>
+          </p:cNvPicPr>
+          <p:nvPr/>
+        </p:nvPicPr>
+        <p:blipFill>
+          <a:blip r:embed="rId4"/>
+          <a:stretch>
+            <a:fillRect/>
+          </a:stretch>
+        </p:blipFill>
+        <p:spPr>
+          <a:xfrm>
+            <a:off x="4583844" y="899716"/>
+            <a:ext cx="4349496" cy="3474313"/>
+          </a:xfrm>
+          <a:prstGeom prst="rect">
+            <a:avLst/>
+          </a:prstGeom>
+          <a:ln w="12700">
+            <a:solidFill>
+              <a:schemeClr val="bg1">
+                <a:lumMod val="10000"/>
+              </a:schemeClr>
+            </a:solidFill>
+          </a:ln>
+        </p:spPr>
+      </p:pic>
+    </p:spTree>
+    <p:extLst>
+      <p:ext uri="{BB962C8B-B14F-4D97-AF65-F5344CB8AC3E}">
+        <p14:creationId xmlns:p14="http://schemas.microsoft.com/office/powerpoint/2010/main" val="1050173502"/>
+      </p:ext>
+    </p:extLst>
   </p:cSld>
   <p:clrMapOvr>
     <a:masterClrMapping/>

--- a/程式介紹與展示.pptx
+++ b/程式介紹與展示.pptx
@@ -15,8 +15,8 @@
     <p:sldId id="306" r:id="rId6"/>
     <p:sldId id="307" r:id="rId7"/>
     <p:sldId id="304" r:id="rId8"/>
-    <p:sldId id="257" r:id="rId9"/>
-    <p:sldId id="310" r:id="rId10"/>
+    <p:sldId id="310" r:id="rId9"/>
+    <p:sldId id="257" r:id="rId10"/>
     <p:sldId id="261" r:id="rId11"/>
     <p:sldId id="284" r:id="rId12"/>
   </p:sldIdLst>
@@ -1419,7 +1419,7 @@
               </a:spcAft>
               <a:buNone/>
             </a:pPr>
-            <a:endParaRPr/>
+            <a:endParaRPr dirty="0"/>
           </a:p>
         </p:txBody>
       </p:sp>
@@ -1732,6 +1732,13 @@
             <a:ext cx="6096000" cy="3429000"/>
           </a:xfrm>
         </p:spPr>
+        <p:txBody>
+          <a:bodyPr/>
+          <a:lstStyle/>
+          <a:p>
+            <a:endParaRPr lang="zh-TW" altLang="en-US"/>
+          </a:p>
+        </p:txBody>
       </p:sp>
       <p:sp>
         <p:nvSpPr>
@@ -1770,117 +1777,6 @@
   <p:cSld>
     <p:spTree>
       <p:nvGrpSpPr>
-        <p:cNvPr id="1" name="Shape 291"/>
-        <p:cNvGrpSpPr/>
-        <p:nvPr/>
-      </p:nvGrpSpPr>
-      <p:grpSpPr>
-        <a:xfrm>
-          <a:off x="0" y="0"/>
-          <a:ext cx="0" cy="0"/>
-          <a:chOff x="0" y="0"/>
-          <a:chExt cx="0" cy="0"/>
-        </a:xfrm>
-      </p:grpSpPr>
-      <p:sp>
-        <p:nvSpPr>
-          <p:cNvPr id="292" name="Google Shape;292;g133f6155f6d_0_3:notes"/>
-          <p:cNvSpPr>
-            <a:spLocks noGrp="1" noRot="1" noChangeAspect="1"/>
-          </p:cNvSpPr>
-          <p:nvPr>
-            <p:ph type="sldImg" idx="2"/>
-          </p:nvPr>
-        </p:nvSpPr>
-        <p:spPr>
-          <a:xfrm>
-            <a:off x="381000" y="685800"/>
-            <a:ext cx="6096000" cy="3429000"/>
-          </a:xfrm>
-          <a:custGeom>
-            <a:avLst/>
-            <a:gdLst/>
-            <a:ahLst/>
-            <a:cxnLst/>
-            <a:rect l="l" t="t" r="r" b="b"/>
-            <a:pathLst>
-              <a:path w="120000" h="120000" extrusionOk="0">
-                <a:moveTo>
-                  <a:pt x="0" y="0"/>
-                </a:moveTo>
-                <a:lnTo>
-                  <a:pt x="120000" y="0"/>
-                </a:lnTo>
-                <a:lnTo>
-                  <a:pt x="120000" y="120000"/>
-                </a:lnTo>
-                <a:lnTo>
-                  <a:pt x="0" y="120000"/>
-                </a:lnTo>
-                <a:close/>
-              </a:path>
-            </a:pathLst>
-          </a:custGeom>
-        </p:spPr>
-        <p:txBody>
-          <a:bodyPr/>
-          <a:lstStyle/>
-          <a:p>
-            <a:endParaRPr lang="zh-TW" altLang="en-US"/>
-          </a:p>
-        </p:txBody>
-      </p:sp>
-      <p:sp>
-        <p:nvSpPr>
-          <p:cNvPr id="293" name="Google Shape;293;g133f6155f6d_0_3:notes"/>
-          <p:cNvSpPr txBox="1">
-            <a:spLocks noGrp="1"/>
-          </p:cNvSpPr>
-          <p:nvPr>
-            <p:ph type="body" idx="1"/>
-          </p:nvPr>
-        </p:nvSpPr>
-        <p:spPr>
-          <a:xfrm>
-            <a:off x="685800" y="4343400"/>
-            <a:ext cx="5486400" cy="4114800"/>
-          </a:xfrm>
-          <a:prstGeom prst="rect">
-            <a:avLst/>
-          </a:prstGeom>
-        </p:spPr>
-        <p:txBody>
-          <a:bodyPr spcFirstLastPara="1" wrap="square" lIns="91425" tIns="91425" rIns="91425" bIns="91425" anchor="t" anchorCtr="0">
-            <a:noAutofit/>
-          </a:bodyPr>
-          <a:lstStyle/>
-          <a:p>
-            <a:pPr marL="0" lvl="0" indent="0" algn="l" rtl="0">
-              <a:spcBef>
-                <a:spcPts val="0"/>
-              </a:spcBef>
-              <a:spcAft>
-                <a:spcPts val="0"/>
-              </a:spcAft>
-              <a:buNone/>
-            </a:pPr>
-            <a:endParaRPr/>
-          </a:p>
-        </p:txBody>
-      </p:sp>
-    </p:spTree>
-  </p:cSld>
-  <p:clrMapOvr>
-    <a:masterClrMapping/>
-  </p:clrMapOvr>
-</p:notes>
-</file>
-
-<file path=ppt/notesSlides/notesSlide9.xml><?xml version="1.0" encoding="utf-8"?>
-<p:notes xmlns:a="http://schemas.openxmlformats.org/drawingml/2006/main" xmlns:r="http://schemas.openxmlformats.org/officeDocument/2006/relationships" xmlns:p="http://schemas.openxmlformats.org/presentationml/2006/main" showMasterSp="0" showMasterPhAnim="0">
-  <p:cSld>
-    <p:spTree>
-      <p:nvGrpSpPr>
         <p:cNvPr id="1" name="Shape 291">
           <a:extLst>
             <a:ext uri="{FF2B5EF4-FFF2-40B4-BE49-F238E27FC236}">
@@ -2003,6 +1899,117 @@
         <p14:creationId xmlns:p14="http://schemas.microsoft.com/office/powerpoint/2010/main" val="2195808436"/>
       </p:ext>
     </p:extLst>
+  </p:cSld>
+  <p:clrMapOvr>
+    <a:masterClrMapping/>
+  </p:clrMapOvr>
+</p:notes>
+</file>
+
+<file path=ppt/notesSlides/notesSlide9.xml><?xml version="1.0" encoding="utf-8"?>
+<p:notes xmlns:a="http://schemas.openxmlformats.org/drawingml/2006/main" xmlns:r="http://schemas.openxmlformats.org/officeDocument/2006/relationships" xmlns:p="http://schemas.openxmlformats.org/presentationml/2006/main" showMasterSp="0" showMasterPhAnim="0">
+  <p:cSld>
+    <p:spTree>
+      <p:nvGrpSpPr>
+        <p:cNvPr id="1" name="Shape 291"/>
+        <p:cNvGrpSpPr/>
+        <p:nvPr/>
+      </p:nvGrpSpPr>
+      <p:grpSpPr>
+        <a:xfrm>
+          <a:off x="0" y="0"/>
+          <a:ext cx="0" cy="0"/>
+          <a:chOff x="0" y="0"/>
+          <a:chExt cx="0" cy="0"/>
+        </a:xfrm>
+      </p:grpSpPr>
+      <p:sp>
+        <p:nvSpPr>
+          <p:cNvPr id="292" name="Google Shape;292;g133f6155f6d_0_3:notes"/>
+          <p:cNvSpPr>
+            <a:spLocks noGrp="1" noRot="1" noChangeAspect="1"/>
+          </p:cNvSpPr>
+          <p:nvPr>
+            <p:ph type="sldImg" idx="2"/>
+          </p:nvPr>
+        </p:nvSpPr>
+        <p:spPr>
+          <a:xfrm>
+            <a:off x="381000" y="685800"/>
+            <a:ext cx="6096000" cy="3429000"/>
+          </a:xfrm>
+          <a:custGeom>
+            <a:avLst/>
+            <a:gdLst/>
+            <a:ahLst/>
+            <a:cxnLst/>
+            <a:rect l="l" t="t" r="r" b="b"/>
+            <a:pathLst>
+              <a:path w="120000" h="120000" extrusionOk="0">
+                <a:moveTo>
+                  <a:pt x="0" y="0"/>
+                </a:moveTo>
+                <a:lnTo>
+                  <a:pt x="120000" y="0"/>
+                </a:lnTo>
+                <a:lnTo>
+                  <a:pt x="120000" y="120000"/>
+                </a:lnTo>
+                <a:lnTo>
+                  <a:pt x="0" y="120000"/>
+                </a:lnTo>
+                <a:close/>
+              </a:path>
+            </a:pathLst>
+          </a:custGeom>
+        </p:spPr>
+        <p:txBody>
+          <a:bodyPr/>
+          <a:lstStyle/>
+          <a:p>
+            <a:endParaRPr lang="zh-TW" altLang="en-US"/>
+          </a:p>
+        </p:txBody>
+      </p:sp>
+      <p:sp>
+        <p:nvSpPr>
+          <p:cNvPr id="293" name="Google Shape;293;g133f6155f6d_0_3:notes"/>
+          <p:cNvSpPr txBox="1">
+            <a:spLocks noGrp="1"/>
+          </p:cNvSpPr>
+          <p:nvPr>
+            <p:ph type="body" idx="1"/>
+          </p:nvPr>
+        </p:nvSpPr>
+        <p:spPr>
+          <a:xfrm>
+            <a:off x="685800" y="4343400"/>
+            <a:ext cx="5486400" cy="4114800"/>
+          </a:xfrm>
+          <a:prstGeom prst="rect">
+            <a:avLst/>
+          </a:prstGeom>
+        </p:spPr>
+        <p:txBody>
+          <a:bodyPr spcFirstLastPara="1" wrap="square" lIns="91425" tIns="91425" rIns="91425" bIns="91425" anchor="t" anchorCtr="0">
+            <a:noAutofit/>
+          </a:bodyPr>
+          <a:lstStyle/>
+          <a:p>
+            <a:pPr marL="0" lvl="0" indent="0" algn="l" rtl="0">
+              <a:spcBef>
+                <a:spcPts val="0"/>
+              </a:spcBef>
+              <a:spcAft>
+                <a:spcPts val="0"/>
+              </a:spcAft>
+              <a:buNone/>
+            </a:pPr>
+            <a:endParaRPr/>
+          </a:p>
+        </p:txBody>
+      </p:sp>
+    </p:spTree>
   </p:cSld>
   <p:clrMapOvr>
     <a:masterClrMapping/>
@@ -12280,23 +12287,43 @@
             </a:pPr>
             <a:r>
               <a:rPr lang="zh-TW" altLang="en-US" dirty="0">
+                <a:solidFill>
+                  <a:schemeClr val="bg1">
+                    <a:lumMod val="10000"/>
+                  </a:schemeClr>
+                </a:solidFill>
                 <a:latin typeface="+mj-lt"/>
               </a:rPr>
               <a:t>報告人</a:t>
             </a:r>
             <a:r>
               <a:rPr lang="en-US" altLang="zh-TW" dirty="0">
+                <a:solidFill>
+                  <a:schemeClr val="bg1">
+                    <a:lumMod val="10000"/>
+                  </a:schemeClr>
+                </a:solidFill>
                 <a:latin typeface="+mj-lt"/>
               </a:rPr>
               <a:t>:</a:t>
             </a:r>
             <a:r>
               <a:rPr lang="zh-TW" altLang="en-US" dirty="0">
+                <a:solidFill>
+                  <a:schemeClr val="bg1">
+                    <a:lumMod val="10000"/>
+                  </a:schemeClr>
+                </a:solidFill>
                 <a:latin typeface="+mj-lt"/>
               </a:rPr>
               <a:t> 戴伯軒</a:t>
             </a:r>
             <a:endParaRPr dirty="0">
+              <a:solidFill>
+                <a:schemeClr val="bg1">
+                  <a:lumMod val="10000"/>
+                </a:schemeClr>
+              </a:solidFill>
               <a:latin typeface="+mj-lt"/>
             </a:endParaRPr>
           </a:p>
@@ -12546,7 +12573,7 @@
             </a:pPr>
             <a:r>
               <a:rPr lang="en-US" altLang="zh-TW" dirty="0"/>
-              <a:t>10</a:t>
+              <a:t>9</a:t>
             </a:r>
             <a:endParaRPr dirty="0"/>
           </a:p>
@@ -12645,7 +12672,7 @@
         <p:spPr>
           <a:xfrm>
             <a:off x="1011078" y="1716488"/>
-            <a:ext cx="3089404" cy="523220"/>
+            <a:ext cx="3089404" cy="738664"/>
           </a:xfrm>
           <a:prstGeom prst="rect">
             <a:avLst/>
@@ -12672,8 +12699,9 @@
             </a:r>
             <a:r>
               <a:rPr lang="zh-TW" altLang="en-US" dirty="0"/>
-              <a:t>以此建構求職市場的脈絡</a:t>
+              <a:t>來建構更明確的求職市場脈絡</a:t>
             </a:r>
+            <a:endParaRPr lang="en-US" altLang="zh-TW" dirty="0"/>
           </a:p>
         </p:txBody>
       </p:sp>
@@ -12787,7 +12815,7 @@
             </a:pPr>
             <a:r>
               <a:rPr lang="en-US" altLang="zh-TW" dirty="0"/>
-              <a:t>11</a:t>
+              <a:t>10</a:t>
             </a:r>
             <a:endParaRPr dirty="0"/>
           </a:p>
@@ -14293,7 +14321,7 @@
         </p:nvSpPr>
         <p:spPr>
           <a:xfrm>
-            <a:off x="2362954" y="462718"/>
+            <a:off x="2296184" y="1330463"/>
             <a:ext cx="4448100" cy="1255103"/>
           </a:xfrm>
           <a:prstGeom prst="rect">
@@ -14332,12 +14360,14 @@
               </a:ext>
             </a:extLst>
           </p:cNvPr>
-          <p:cNvCxnSpPr/>
+          <p:cNvCxnSpPr>
+            <a:cxnSpLocks/>
+          </p:cNvCxnSpPr>
           <p:nvPr/>
         </p:nvCxnSpPr>
         <p:spPr>
           <a:xfrm>
-            <a:off x="2202000" y="1717825"/>
+            <a:off x="2135230" y="2585570"/>
             <a:ext cx="4740000" cy="0"/>
           </a:xfrm>
           <a:prstGeom prst="straightConnector1">
@@ -14369,7 +14399,7 @@
         </p:nvSpPr>
         <p:spPr>
           <a:xfrm>
-            <a:off x="1650400" y="1074863"/>
+            <a:off x="1583630" y="1942608"/>
             <a:ext cx="239400" cy="239400"/>
           </a:xfrm>
           <a:prstGeom prst="star4">
@@ -14421,7 +14451,7 @@
         </p:nvSpPr>
         <p:spPr>
           <a:xfrm>
-            <a:off x="7254100" y="1074863"/>
+            <a:off x="7187330" y="1942608"/>
             <a:ext cx="239400" cy="239400"/>
           </a:xfrm>
           <a:prstGeom prst="star4">
@@ -14751,7 +14781,7 @@
         </p:nvSpPr>
         <p:spPr>
           <a:xfrm>
-            <a:off x="5047489" y="1531578"/>
+            <a:off x="5047489" y="1527711"/>
             <a:ext cx="3102864" cy="2410596"/>
           </a:xfrm>
           <a:prstGeom prst="rect">
@@ -15038,7 +15068,7 @@
         <p:spPr>
           <a:xfrm>
             <a:off x="1642873" y="3521083"/>
-            <a:ext cx="2807208" cy="954107"/>
+            <a:ext cx="2807208" cy="738664"/>
           </a:xfrm>
           <a:prstGeom prst="rect">
             <a:avLst/>
@@ -15057,42 +15087,24 @@
             </a:r>
           </a:p>
           <a:p>
+            <a:pPr marL="342900" indent="-342900">
+              <a:buAutoNum type="arabicPeriod"/>
+            </a:pPr>
             <a:r>
               <a:rPr lang="zh-TW" altLang="en-US" dirty="0"/>
-              <a:t>我可以使用 </a:t>
+              <a:t>資料標準化</a:t>
             </a:r>
-            <a:r>
-              <a:rPr lang="en-US" altLang="zh-TW" dirty="0"/>
-              <a:t>.csv </a:t>
-            </a:r>
+            <a:endParaRPr lang="en-US" altLang="zh-TW" dirty="0"/>
+          </a:p>
+          <a:p>
+            <a:pPr marL="342900" indent="-342900">
+              <a:buAutoNum type="arabicPeriod"/>
+            </a:pPr>
             <a:r>
               <a:rPr lang="zh-TW" altLang="en-US" dirty="0"/>
-              <a:t>快速的製作任何有特定需求的圖表</a:t>
+              <a:t>具備高度彈性</a:t>
             </a:r>
-            <a:r>
-              <a:rPr lang="en-US" altLang="zh-TW" dirty="0"/>
-              <a:t>, </a:t>
-            </a:r>
-            <a:r>
-              <a:rPr lang="zh-TW" altLang="en-US" dirty="0"/>
-              <a:t>相反地</a:t>
-            </a:r>
-            <a:r>
-              <a:rPr lang="en-US" altLang="zh-TW" dirty="0"/>
-              <a:t>, </a:t>
-            </a:r>
-            <a:r>
-              <a:rPr lang="zh-TW" altLang="en-US" dirty="0"/>
-              <a:t>將圖表製作成 </a:t>
-            </a:r>
-            <a:r>
-              <a:rPr lang="en-US" altLang="zh-TW" dirty="0"/>
-              <a:t>.csv</a:t>
-            </a:r>
-            <a:r>
-              <a:rPr lang="zh-TW" altLang="en-US" dirty="0"/>
-              <a:t> 會很不方便</a:t>
-            </a:r>
+            <a:endParaRPr lang="en-US" altLang="zh-TW" dirty="0"/>
           </a:p>
         </p:txBody>
       </p:sp>
@@ -15650,8 +15662,8 @@
         </p:nvSpPr>
         <p:spPr>
           <a:xfrm>
-            <a:off x="2863146" y="1690521"/>
-            <a:ext cx="1612392" cy="516951"/>
+            <a:off x="2863145" y="1705156"/>
+            <a:ext cx="1677909" cy="516951"/>
           </a:xfrm>
           <a:prstGeom prst="rect">
             <a:avLst/>
@@ -15686,15 +15698,38 @@
                   </a:schemeClr>
                 </a:solidFill>
               </a:rPr>
-              <a:t>Fetch job detail URL list</a:t>
+              <a:t>Request API </a:t>
             </a:r>
-            <a:endParaRPr lang="zh-TW" altLang="en-US" sz="1200" dirty="0">
-              <a:solidFill>
-                <a:schemeClr val="bg1">
-                  <a:lumMod val="10000"/>
-                </a:schemeClr>
-              </a:solidFill>
-            </a:endParaRPr>
+            <a:r>
+              <a:rPr lang="zh-TW" altLang="en-US" sz="1200" dirty="0">
+                <a:solidFill>
+                  <a:schemeClr val="bg1">
+                    <a:lumMod val="10000"/>
+                  </a:schemeClr>
+                </a:solidFill>
+              </a:rPr>
+              <a:t>來建立 </a:t>
+            </a:r>
+            <a:r>
+              <a:rPr lang="en-US" altLang="zh-TW" sz="1200" dirty="0">
+                <a:solidFill>
+                  <a:schemeClr val="bg1">
+                    <a:lumMod val="10000"/>
+                  </a:schemeClr>
+                </a:solidFill>
+              </a:rPr>
+              <a:t>job detail URL</a:t>
+            </a:r>
+            <a:r>
+              <a:rPr lang="zh-TW" altLang="en-US" sz="1200" dirty="0">
+                <a:solidFill>
+                  <a:schemeClr val="bg1">
+                    <a:lumMod val="10000"/>
+                  </a:schemeClr>
+                </a:solidFill>
+              </a:rPr>
+              <a:t> 的清單</a:t>
+            </a:r>
           </a:p>
         </p:txBody>
       </p:sp>
@@ -15716,8 +15751,8 @@
         </p:nvCxnSpPr>
         <p:spPr>
           <a:xfrm flipV="1">
-            <a:off x="2547476" y="1948997"/>
-            <a:ext cx="315670" cy="258475"/>
+            <a:off x="2547476" y="1963632"/>
+            <a:ext cx="315669" cy="243840"/>
           </a:xfrm>
           <a:prstGeom prst="curvedConnector3">
             <a:avLst/>
@@ -15759,8 +15794,8 @@
         </p:nvCxnSpPr>
         <p:spPr>
           <a:xfrm flipV="1">
-            <a:off x="2540720" y="1948997"/>
-            <a:ext cx="322426" cy="608586"/>
+            <a:off x="2540720" y="1963632"/>
+            <a:ext cx="322425" cy="593951"/>
           </a:xfrm>
           <a:prstGeom prst="curvedConnector3">
             <a:avLst/>
@@ -15799,7 +15834,7 @@
         <p:spPr>
           <a:xfrm>
             <a:off x="4807874" y="2093967"/>
-            <a:ext cx="1470207" cy="713233"/>
+            <a:ext cx="1532429" cy="713233"/>
           </a:xfrm>
           <a:prstGeom prst="ellipse">
             <a:avLst/>
@@ -15889,6 +15924,16 @@
           <a:p>
             <a:pPr algn="ctr"/>
             <a:r>
+              <a:rPr lang="zh-TW" altLang="en-US" sz="1200" dirty="0">
+                <a:solidFill>
+                  <a:schemeClr val="bg1">
+                    <a:lumMod val="10000"/>
+                  </a:schemeClr>
+                </a:solidFill>
+              </a:rPr>
+              <a:t>透過 </a:t>
+            </a:r>
+            <a:r>
               <a:rPr lang="en-US" altLang="zh-TW" sz="1200" dirty="0">
                 <a:solidFill>
                   <a:schemeClr val="bg1">
@@ -15896,8 +15941,105 @@
                   </a:schemeClr>
                 </a:solidFill>
               </a:rPr>
-              <a:t>Get detail by For looping the URL list and remove unneeded column to create a detail of list </a:t>
+              <a:t>for-loop </a:t>
             </a:r>
+            <a:r>
+              <a:rPr lang="zh-TW" altLang="en-US" sz="1200" dirty="0">
+                <a:solidFill>
+                  <a:schemeClr val="bg1">
+                    <a:lumMod val="10000"/>
+                  </a:schemeClr>
+                </a:solidFill>
+              </a:rPr>
+              <a:t>遍歷 </a:t>
+            </a:r>
+            <a:r>
+              <a:rPr lang="en-US" altLang="zh-TW" sz="1200" dirty="0">
+                <a:solidFill>
+                  <a:schemeClr val="bg1">
+                    <a:lumMod val="10000"/>
+                  </a:schemeClr>
+                </a:solidFill>
+              </a:rPr>
+              <a:t>URL</a:t>
+            </a:r>
+            <a:r>
+              <a:rPr lang="zh-TW" altLang="en-US" sz="1200" dirty="0">
+                <a:solidFill>
+                  <a:schemeClr val="bg1">
+                    <a:lumMod val="10000"/>
+                  </a:schemeClr>
+                </a:solidFill>
+              </a:rPr>
+              <a:t> </a:t>
+            </a:r>
+            <a:r>
+              <a:rPr lang="en-US" altLang="zh-TW" sz="1200" dirty="0">
+                <a:solidFill>
+                  <a:schemeClr val="bg1">
+                    <a:lumMod val="10000"/>
+                  </a:schemeClr>
+                </a:solidFill>
+              </a:rPr>
+              <a:t>list, </a:t>
+            </a:r>
+            <a:r>
+              <a:rPr lang="zh-TW" altLang="en-US" sz="1200" dirty="0">
+                <a:solidFill>
+                  <a:schemeClr val="bg1">
+                    <a:lumMod val="10000"/>
+                  </a:schemeClr>
+                </a:solidFill>
+              </a:rPr>
+              <a:t>並移除多餘欄位</a:t>
+            </a:r>
+            <a:r>
+              <a:rPr lang="en-US" altLang="zh-TW" sz="1200" dirty="0">
+                <a:solidFill>
+                  <a:schemeClr val="bg1">
+                    <a:lumMod val="10000"/>
+                  </a:schemeClr>
+                </a:solidFill>
+              </a:rPr>
+              <a:t>, </a:t>
+            </a:r>
+            <a:r>
+              <a:rPr lang="zh-TW" altLang="en-US" sz="1200" dirty="0">
+                <a:solidFill>
+                  <a:schemeClr val="bg1">
+                    <a:lumMod val="10000"/>
+                  </a:schemeClr>
+                </a:solidFill>
+              </a:rPr>
+              <a:t>建立 </a:t>
+            </a:r>
+            <a:r>
+              <a:rPr lang="en-US" altLang="zh-TW" sz="1200" dirty="0">
+                <a:solidFill>
+                  <a:schemeClr val="bg1">
+                    <a:lumMod val="10000"/>
+                  </a:schemeClr>
+                </a:solidFill>
+              </a:rPr>
+              <a:t>job detail </a:t>
+            </a:r>
+            <a:r>
+              <a:rPr lang="zh-TW" altLang="en-US" sz="1200" dirty="0">
+                <a:solidFill>
+                  <a:schemeClr val="bg1">
+                    <a:lumMod val="10000"/>
+                  </a:schemeClr>
+                </a:solidFill>
+              </a:rPr>
+              <a:t>清單</a:t>
+            </a:r>
+            <a:endParaRPr lang="en-US" altLang="zh-TW" sz="1200" dirty="0">
+              <a:solidFill>
+                <a:schemeClr val="bg1">
+                  <a:lumMod val="10000"/>
+                </a:schemeClr>
+              </a:solidFill>
+            </a:endParaRPr>
           </a:p>
         </p:txBody>
       </p:sp>
@@ -15912,15 +16054,14 @@
           </p:cNvPr>
           <p:cNvCxnSpPr>
             <a:cxnSpLocks/>
-            <a:stCxn id="304" idx="2"/>
             <a:endCxn id="318" idx="0"/>
           </p:cNvCxnSpPr>
           <p:nvPr/>
         </p:nvCxnSpPr>
         <p:spPr>
           <a:xfrm>
-            <a:off x="3669342" y="2207472"/>
-            <a:ext cx="0" cy="486224"/>
+            <a:off x="3669342" y="2222107"/>
+            <a:ext cx="0" cy="471589"/>
           </a:xfrm>
           <a:prstGeom prst="straightConnector1">
             <a:avLst/>
@@ -16030,6 +16171,16 @@
           <a:p>
             <a:pPr algn="ctr"/>
             <a:r>
+              <a:rPr lang="zh-TW" altLang="en-US" sz="1200" dirty="0">
+                <a:solidFill>
+                  <a:schemeClr val="bg1">
+                    <a:lumMod val="10000"/>
+                  </a:schemeClr>
+                </a:solidFill>
+              </a:rPr>
+              <a:t>從 </a:t>
+            </a:r>
+            <a:r>
               <a:rPr lang="en-US" altLang="zh-TW" sz="1200" dirty="0">
                 <a:solidFill>
                   <a:schemeClr val="bg1">
@@ -16037,15 +16188,18 @@
                   </a:schemeClr>
                 </a:solidFill>
               </a:rPr>
-              <a:t>According keyword select data from db</a:t>
+              <a:t>db </a:t>
             </a:r>
-            <a:endParaRPr lang="zh-TW" altLang="en-US" sz="1200" dirty="0">
-              <a:solidFill>
-                <a:schemeClr val="bg1">
-                  <a:lumMod val="10000"/>
-                </a:schemeClr>
-              </a:solidFill>
-            </a:endParaRPr>
+            <a:r>
+              <a:rPr lang="zh-TW" altLang="en-US" sz="1200" dirty="0">
+                <a:solidFill>
+                  <a:schemeClr val="bg1">
+                    <a:lumMod val="10000"/>
+                  </a:schemeClr>
+                </a:solidFill>
+              </a:rPr>
+              <a:t>拿取資料</a:t>
+            </a:r>
           </a:p>
         </p:txBody>
       </p:sp>
@@ -16059,6 +16213,7 @@
             </a:extLst>
           </p:cNvPr>
           <p:cNvCxnSpPr>
+            <a:cxnSpLocks/>
             <a:stCxn id="310" idx="4"/>
             <a:endCxn id="347" idx="0"/>
           </p:cNvCxnSpPr>
@@ -16067,7 +16222,7 @@
         <p:spPr>
           <a:xfrm flipH="1">
             <a:off x="5542977" y="2807200"/>
-            <a:ext cx="1" cy="1094240"/>
+            <a:ext cx="31112" cy="1094240"/>
           </a:xfrm>
           <a:prstGeom prst="straightConnector1">
             <a:avLst/>
@@ -16224,22 +16379,15 @@
           <a:p>
             <a:pPr algn="ctr"/>
             <a:r>
-              <a:rPr lang="en-US" altLang="zh-TW" dirty="0">
+              <a:rPr lang="zh-TW" altLang="en-US" dirty="0">
                 <a:solidFill>
                   <a:schemeClr val="bg1">
                     <a:lumMod val="10000"/>
                   </a:schemeClr>
                 </a:solidFill>
               </a:rPr>
-              <a:t>Cleaning and output into csv</a:t>
+              <a:t>清洗與輸出</a:t>
             </a:r>
-            <a:endParaRPr lang="zh-TW" altLang="en-US" dirty="0">
-              <a:solidFill>
-                <a:schemeClr val="bg1">
-                  <a:lumMod val="10000"/>
-                </a:schemeClr>
-              </a:solidFill>
-            </a:endParaRPr>
           </a:p>
         </p:txBody>
       </p:sp>
@@ -16700,7 +16848,7 @@
         </p:blipFill>
         <p:spPr>
           <a:xfrm>
-            <a:off x="6889790" y="3503428"/>
+            <a:off x="6797704" y="3503428"/>
             <a:ext cx="1413595" cy="1134004"/>
           </a:xfrm>
           <a:prstGeom prst="rect">
@@ -16722,7 +16870,7 @@
         </p:nvSpPr>
         <p:spPr>
           <a:xfrm>
-            <a:off x="6797704" y="3195651"/>
+            <a:off x="6675129" y="3187116"/>
             <a:ext cx="1768487" cy="307777"/>
           </a:xfrm>
           <a:prstGeom prst="rect">
@@ -16817,11 +16965,435 @@
           </a:prstGeom>
         </p:spPr>
       </p:pic>
+      <p:pic>
+        <p:nvPicPr>
+          <p:cNvPr id="3" name="圖片 2">
+            <a:extLst>
+              <a:ext uri="{FF2B5EF4-FFF2-40B4-BE49-F238E27FC236}">
+                <a16:creationId xmlns:a16="http://schemas.microsoft.com/office/drawing/2014/main" id="{2A6132A5-274B-EB2D-D366-EC95DE478967}"/>
+              </a:ext>
+            </a:extLst>
+          </p:cNvPr>
+          <p:cNvPicPr>
+            <a:picLocks noChangeAspect="1"/>
+          </p:cNvPicPr>
+          <p:nvPr/>
+        </p:nvPicPr>
+        <p:blipFill>
+          <a:blip r:embed="rId11"/>
+          <a:stretch>
+            <a:fillRect/>
+          </a:stretch>
+        </p:blipFill>
+        <p:spPr>
+          <a:xfrm>
+            <a:off x="6530848" y="619860"/>
+            <a:ext cx="2067560" cy="1663053"/>
+          </a:xfrm>
+          <a:prstGeom prst="rect">
+            <a:avLst/>
+          </a:prstGeom>
+        </p:spPr>
+      </p:pic>
+      <p:pic>
+        <p:nvPicPr>
+          <p:cNvPr id="6" name="圖片 5">
+            <a:extLst>
+              <a:ext uri="{FF2B5EF4-FFF2-40B4-BE49-F238E27FC236}">
+                <a16:creationId xmlns:a16="http://schemas.microsoft.com/office/drawing/2014/main" id="{F5EE023C-8BC0-55E7-981F-E11EEC3A1915}"/>
+              </a:ext>
+            </a:extLst>
+          </p:cNvPr>
+          <p:cNvPicPr>
+            <a:picLocks noChangeAspect="1"/>
+          </p:cNvPicPr>
+          <p:nvPr/>
+        </p:nvPicPr>
+        <p:blipFill>
+          <a:blip r:embed="rId12"/>
+          <a:stretch>
+            <a:fillRect/>
+          </a:stretch>
+        </p:blipFill>
+        <p:spPr>
+          <a:xfrm>
+            <a:off x="269565" y="1519309"/>
+            <a:ext cx="2033707" cy="1747171"/>
+          </a:xfrm>
+          <a:prstGeom prst="rect">
+            <a:avLst/>
+          </a:prstGeom>
+        </p:spPr>
+      </p:pic>
+      <p:sp>
+        <p:nvSpPr>
+          <p:cNvPr id="7" name="箭號: 向右 6">
+            <a:extLst>
+              <a:ext uri="{FF2B5EF4-FFF2-40B4-BE49-F238E27FC236}">
+                <a16:creationId xmlns:a16="http://schemas.microsoft.com/office/drawing/2014/main" id="{FECE768D-AC29-9CD1-C104-CB09622190BA}"/>
+              </a:ext>
+            </a:extLst>
+          </p:cNvPr>
+          <p:cNvSpPr/>
+          <p:nvPr/>
+        </p:nvSpPr>
+        <p:spPr>
+          <a:xfrm rot="9431070">
+            <a:off x="2396181" y="2051557"/>
+            <a:ext cx="775972" cy="217674"/>
+          </a:xfrm>
+          <a:prstGeom prst="rightArrow">
+            <a:avLst/>
+          </a:prstGeom>
+        </p:spPr>
+        <p:style>
+          <a:lnRef idx="2">
+            <a:schemeClr val="accent1">
+              <a:shade val="15000"/>
+            </a:schemeClr>
+          </a:lnRef>
+          <a:fillRef idx="1">
+            <a:schemeClr val="accent1"/>
+          </a:fillRef>
+          <a:effectRef idx="0">
+            <a:schemeClr val="accent1"/>
+          </a:effectRef>
+          <a:fontRef idx="minor">
+            <a:schemeClr val="lt1"/>
+          </a:fontRef>
+        </p:style>
+        <p:txBody>
+          <a:bodyPr rtlCol="0" anchor="ctr"/>
+          <a:lstStyle/>
+          <a:p>
+            <a:pPr algn="ctr"/>
+            <a:endParaRPr lang="zh-TW" altLang="en-US"/>
+          </a:p>
+        </p:txBody>
+      </p:sp>
+      <p:sp>
+        <p:nvSpPr>
+          <p:cNvPr id="8" name="箭號: 向右 7">
+            <a:extLst>
+              <a:ext uri="{FF2B5EF4-FFF2-40B4-BE49-F238E27FC236}">
+                <a16:creationId xmlns:a16="http://schemas.microsoft.com/office/drawing/2014/main" id="{0A0455DF-122D-A5E5-90CB-F621B0BAD4B7}"/>
+              </a:ext>
+            </a:extLst>
+          </p:cNvPr>
+          <p:cNvSpPr/>
+          <p:nvPr/>
+        </p:nvSpPr>
+        <p:spPr>
+          <a:xfrm rot="20798185">
+            <a:off x="5418563" y="2807606"/>
+            <a:ext cx="1024909" cy="378304"/>
+          </a:xfrm>
+          <a:prstGeom prst="rightArrow">
+            <a:avLst/>
+          </a:prstGeom>
+        </p:spPr>
+        <p:style>
+          <a:lnRef idx="2">
+            <a:schemeClr val="accent1">
+              <a:shade val="15000"/>
+            </a:schemeClr>
+          </a:lnRef>
+          <a:fillRef idx="1">
+            <a:schemeClr val="accent1"/>
+          </a:fillRef>
+          <a:effectRef idx="0">
+            <a:schemeClr val="accent1"/>
+          </a:effectRef>
+          <a:fontRef idx="minor">
+            <a:schemeClr val="lt1"/>
+          </a:fontRef>
+        </p:style>
+        <p:txBody>
+          <a:bodyPr rtlCol="0" anchor="ctr"/>
+          <a:lstStyle/>
+          <a:p>
+            <a:pPr algn="ctr"/>
+            <a:endParaRPr lang="zh-TW" altLang="en-US"/>
+          </a:p>
+        </p:txBody>
+      </p:sp>
     </p:spTree>
   </p:cSld>
   <p:clrMapOvr>
     <a:masterClrMapping/>
   </p:clrMapOvr>
+  <p:timing>
+    <p:tnLst>
+      <p:par>
+        <p:cTn id="1" dur="indefinite" restart="never" nodeType="tmRoot">
+          <p:childTnLst>
+            <p:seq concurrent="1" nextAc="seek">
+              <p:cTn id="2" dur="indefinite" nodeType="mainSeq">
+                <p:childTnLst>
+                  <p:par>
+                    <p:cTn id="3" fill="hold">
+                      <p:stCondLst>
+                        <p:cond delay="indefinite"/>
+                      </p:stCondLst>
+                      <p:childTnLst>
+                        <p:par>
+                          <p:cTn id="4" fill="hold">
+                            <p:stCondLst>
+                              <p:cond delay="0"/>
+                            </p:stCondLst>
+                            <p:childTnLst>
+                              <p:par>
+                                <p:cTn id="5" presetID="1" presetClass="entr" presetSubtype="0" fill="hold" nodeType="clickEffect">
+                                  <p:stCondLst>
+                                    <p:cond delay="0"/>
+                                  </p:stCondLst>
+                                  <p:childTnLst>
+                                    <p:set>
+                                      <p:cBhvr>
+                                        <p:cTn id="6" dur="1" fill="hold">
+                                          <p:stCondLst>
+                                            <p:cond delay="0"/>
+                                          </p:stCondLst>
+                                        </p:cTn>
+                                        <p:tgtEl>
+                                          <p:spTgt spid="6"/>
+                                        </p:tgtEl>
+                                        <p:attrNameLst>
+                                          <p:attrName>style.visibility</p:attrName>
+                                        </p:attrNameLst>
+                                      </p:cBhvr>
+                                      <p:to>
+                                        <p:strVal val="visible"/>
+                                      </p:to>
+                                    </p:set>
+                                  </p:childTnLst>
+                                </p:cTn>
+                              </p:par>
+                            </p:childTnLst>
+                          </p:cTn>
+                        </p:par>
+                      </p:childTnLst>
+                    </p:cTn>
+                  </p:par>
+                  <p:par>
+                    <p:cTn id="7" fill="hold">
+                      <p:stCondLst>
+                        <p:cond delay="indefinite"/>
+                      </p:stCondLst>
+                      <p:childTnLst>
+                        <p:par>
+                          <p:cTn id="8" fill="hold">
+                            <p:stCondLst>
+                              <p:cond delay="0"/>
+                            </p:stCondLst>
+                            <p:childTnLst>
+                              <p:par>
+                                <p:cTn id="9" presetID="22" presetClass="exit" presetSubtype="4" fill="hold" nodeType="clickEffect">
+                                  <p:stCondLst>
+                                    <p:cond delay="0"/>
+                                  </p:stCondLst>
+                                  <p:childTnLst>
+                                    <p:animEffect transition="out" filter="wipe(down)">
+                                      <p:cBhvr>
+                                        <p:cTn id="10" dur="500"/>
+                                        <p:tgtEl>
+                                          <p:spTgt spid="6"/>
+                                        </p:tgtEl>
+                                      </p:cBhvr>
+                                    </p:animEffect>
+                                    <p:set>
+                                      <p:cBhvr>
+                                        <p:cTn id="11" dur="1" fill="hold">
+                                          <p:stCondLst>
+                                            <p:cond delay="499"/>
+                                          </p:stCondLst>
+                                        </p:cTn>
+                                        <p:tgtEl>
+                                          <p:spTgt spid="6"/>
+                                        </p:tgtEl>
+                                        <p:attrNameLst>
+                                          <p:attrName>style.visibility</p:attrName>
+                                        </p:attrNameLst>
+                                      </p:cBhvr>
+                                      <p:to>
+                                        <p:strVal val="hidden"/>
+                                      </p:to>
+                                    </p:set>
+                                  </p:childTnLst>
+                                </p:cTn>
+                              </p:par>
+                            </p:childTnLst>
+                          </p:cTn>
+                        </p:par>
+                      </p:childTnLst>
+                    </p:cTn>
+                  </p:par>
+                  <p:par>
+                    <p:cTn id="12" fill="hold">
+                      <p:stCondLst>
+                        <p:cond delay="indefinite"/>
+                      </p:stCondLst>
+                      <p:childTnLst>
+                        <p:par>
+                          <p:cTn id="13" fill="hold">
+                            <p:stCondLst>
+                              <p:cond delay="0"/>
+                            </p:stCondLst>
+                            <p:childTnLst>
+                              <p:par>
+                                <p:cTn id="14" presetID="2" presetClass="entr" presetSubtype="4" fill="hold" nodeType="clickEffect">
+                                  <p:stCondLst>
+                                    <p:cond delay="0"/>
+                                  </p:stCondLst>
+                                  <p:childTnLst>
+                                    <p:set>
+                                      <p:cBhvr>
+                                        <p:cTn id="15" dur="1" fill="hold">
+                                          <p:stCondLst>
+                                            <p:cond delay="0"/>
+                                          </p:stCondLst>
+                                        </p:cTn>
+                                        <p:tgtEl>
+                                          <p:spTgt spid="3"/>
+                                        </p:tgtEl>
+                                        <p:attrNameLst>
+                                          <p:attrName>style.visibility</p:attrName>
+                                        </p:attrNameLst>
+                                      </p:cBhvr>
+                                      <p:to>
+                                        <p:strVal val="visible"/>
+                                      </p:to>
+                                    </p:set>
+                                    <p:anim calcmode="lin" valueType="num">
+                                      <p:cBhvr additive="base">
+                                        <p:cTn id="16" dur="500" fill="hold"/>
+                                        <p:tgtEl>
+                                          <p:spTgt spid="3"/>
+                                        </p:tgtEl>
+                                        <p:attrNameLst>
+                                          <p:attrName>ppt_x</p:attrName>
+                                        </p:attrNameLst>
+                                      </p:cBhvr>
+                                      <p:tavLst>
+                                        <p:tav tm="0">
+                                          <p:val>
+                                            <p:strVal val="#ppt_x"/>
+                                          </p:val>
+                                        </p:tav>
+                                        <p:tav tm="100000">
+                                          <p:val>
+                                            <p:strVal val="#ppt_x"/>
+                                          </p:val>
+                                        </p:tav>
+                                      </p:tavLst>
+                                    </p:anim>
+                                    <p:anim calcmode="lin" valueType="num">
+                                      <p:cBhvr additive="base">
+                                        <p:cTn id="17" dur="500" fill="hold"/>
+                                        <p:tgtEl>
+                                          <p:spTgt spid="3"/>
+                                        </p:tgtEl>
+                                        <p:attrNameLst>
+                                          <p:attrName>ppt_y</p:attrName>
+                                        </p:attrNameLst>
+                                      </p:cBhvr>
+                                      <p:tavLst>
+                                        <p:tav tm="0">
+                                          <p:val>
+                                            <p:strVal val="1+#ppt_h/2"/>
+                                          </p:val>
+                                        </p:tav>
+                                        <p:tav tm="100000">
+                                          <p:val>
+                                            <p:strVal val="#ppt_y"/>
+                                          </p:val>
+                                        </p:tav>
+                                      </p:tavLst>
+                                    </p:anim>
+                                  </p:childTnLst>
+                                </p:cTn>
+                              </p:par>
+                            </p:childTnLst>
+                          </p:cTn>
+                        </p:par>
+                      </p:childTnLst>
+                    </p:cTn>
+                  </p:par>
+                  <p:par>
+                    <p:cTn id="18" fill="hold">
+                      <p:stCondLst>
+                        <p:cond delay="indefinite"/>
+                      </p:stCondLst>
+                      <p:childTnLst>
+                        <p:par>
+                          <p:cTn id="19" fill="hold">
+                            <p:stCondLst>
+                              <p:cond delay="0"/>
+                            </p:stCondLst>
+                            <p:childTnLst>
+                              <p:par>
+                                <p:cTn id="20" presetID="10" presetClass="exit" presetSubtype="0" fill="hold" nodeType="clickEffect">
+                                  <p:stCondLst>
+                                    <p:cond delay="0"/>
+                                  </p:stCondLst>
+                                  <p:childTnLst>
+                                    <p:animEffect transition="out" filter="fade">
+                                      <p:cBhvr>
+                                        <p:cTn id="21" dur="500"/>
+                                        <p:tgtEl>
+                                          <p:spTgt spid="3"/>
+                                        </p:tgtEl>
+                                      </p:cBhvr>
+                                    </p:animEffect>
+                                    <p:set>
+                                      <p:cBhvr>
+                                        <p:cTn id="22" dur="1" fill="hold">
+                                          <p:stCondLst>
+                                            <p:cond delay="499"/>
+                                          </p:stCondLst>
+                                        </p:cTn>
+                                        <p:tgtEl>
+                                          <p:spTgt spid="3"/>
+                                        </p:tgtEl>
+                                        <p:attrNameLst>
+                                          <p:attrName>style.visibility</p:attrName>
+                                        </p:attrNameLst>
+                                      </p:cBhvr>
+                                      <p:to>
+                                        <p:strVal val="hidden"/>
+                                      </p:to>
+                                    </p:set>
+                                  </p:childTnLst>
+                                </p:cTn>
+                              </p:par>
+                            </p:childTnLst>
+                          </p:cTn>
+                        </p:par>
+                      </p:childTnLst>
+                    </p:cTn>
+                  </p:par>
+                </p:childTnLst>
+              </p:cTn>
+              <p:prevCondLst>
+                <p:cond evt="onPrev" delay="0">
+                  <p:tgtEl>
+                    <p:sldTgt/>
+                  </p:tgtEl>
+                </p:cond>
+              </p:prevCondLst>
+              <p:nextCondLst>
+                <p:cond evt="onNext" delay="0">
+                  <p:tgtEl>
+                    <p:sldTgt/>
+                  </p:tgtEl>
+                </p:cond>
+              </p:nextCondLst>
+            </p:seq>
+          </p:childTnLst>
+        </p:cTn>
+      </p:par>
+    </p:tnLst>
+  </p:timing>
 </p:sld>
 </file>
 
@@ -17939,11 +18511,11 @@
       </p:sp>
       <p:pic>
         <p:nvPicPr>
-          <p:cNvPr id="2" name="Picture" title="This slide contains the following visuals: textbox ,textbox ,Top 15 Skills ,Top 15 Tools. Please refer to the notes on this slide for details">
+          <p:cNvPr id="4" name="Picture" title="This slide contains the following visuals: textbox ,textbox ,Top 15 Skills ,Top 15 Tools. Please refer to the notes on this slide for details">
             <a:hlinkClick r:id="rId3"/>
             <a:extLst>
               <a:ext uri="{FF2B5EF4-FFF2-40B4-BE49-F238E27FC236}">
-                <a16:creationId xmlns:a16="http://schemas.microsoft.com/office/drawing/2014/main" id="{3F28D09B-E7A6-BD85-D95D-B3411043D09E}"/>
+                <a16:creationId xmlns:a16="http://schemas.microsoft.com/office/drawing/2014/main" id="{D034F34C-CFC4-26A3-9151-EB774D4AB4BB}"/>
               </a:ext>
             </a:extLst>
           </p:cNvPr>
@@ -17954,15 +18526,14 @@
         </p:nvPicPr>
         <p:blipFill>
           <a:blip r:embed="rId4"/>
-          <a:srcRect l="1390" t="3676" r="2444" b="7822"/>
           <a:stretch>
             <a:fillRect/>
           </a:stretch>
         </p:blipFill>
         <p:spPr>
           <a:xfrm>
-            <a:off x="940936" y="866027"/>
-            <a:ext cx="7262123" cy="3813048"/>
+            <a:off x="941400" y="843760"/>
+            <a:ext cx="7261200" cy="3812400"/>
           </a:xfrm>
           <a:prstGeom prst="rect">
             <a:avLst/>
@@ -17991,6 +18562,213 @@
 </file>
 
 <file path=ppt/slides/slide8.xml><?xml version="1.0" encoding="utf-8"?>
+<p:sld xmlns:a="http://schemas.openxmlformats.org/drawingml/2006/main" xmlns:r="http://schemas.openxmlformats.org/officeDocument/2006/relationships" xmlns:p="http://schemas.openxmlformats.org/presentationml/2006/main">
+  <p:cSld>
+    <p:spTree>
+      <p:nvGrpSpPr>
+        <p:cNvPr id="1" name="Shape 294">
+          <a:extLst>
+            <a:ext uri="{FF2B5EF4-FFF2-40B4-BE49-F238E27FC236}">
+              <a16:creationId xmlns:a16="http://schemas.microsoft.com/office/drawing/2014/main" id="{D049356B-CF66-52EB-6F65-01368B6BB8CA}"/>
+            </a:ext>
+          </a:extLst>
+        </p:cNvPr>
+        <p:cNvGrpSpPr/>
+        <p:nvPr/>
+      </p:nvGrpSpPr>
+      <p:grpSpPr>
+        <a:xfrm>
+          <a:off x="0" y="0"/>
+          <a:ext cx="0" cy="0"/>
+          <a:chOff x="0" y="0"/>
+          <a:chExt cx="0" cy="0"/>
+        </a:xfrm>
+      </p:grpSpPr>
+      <p:sp>
+        <p:nvSpPr>
+          <p:cNvPr id="300" name="Google Shape;300;p30">
+            <a:extLst>
+              <a:ext uri="{FF2B5EF4-FFF2-40B4-BE49-F238E27FC236}">
+                <a16:creationId xmlns:a16="http://schemas.microsoft.com/office/drawing/2014/main" id="{E64D6DD2-4C56-334A-6CDA-651F7C5714D8}"/>
+              </a:ext>
+            </a:extLst>
+          </p:cNvPr>
+          <p:cNvSpPr txBox="1">
+            <a:spLocks noGrp="1"/>
+          </p:cNvSpPr>
+          <p:nvPr>
+            <p:ph type="sldNum" idx="12"/>
+          </p:nvPr>
+        </p:nvSpPr>
+        <p:spPr>
+          <a:xfrm>
+            <a:off x="4297650" y="4602875"/>
+            <a:ext cx="548700" cy="333600"/>
+          </a:xfrm>
+          <a:prstGeom prst="rect">
+            <a:avLst/>
+          </a:prstGeom>
+        </p:spPr>
+        <p:txBody>
+          <a:bodyPr spcFirstLastPara="1" wrap="square" lIns="91425" tIns="91425" rIns="91425" bIns="91425" anchor="t" anchorCtr="0">
+            <a:noAutofit/>
+          </a:bodyPr>
+          <a:lstStyle/>
+          <a:p>
+            <a:pPr marL="0" lvl="0" indent="0" algn="ctr" rtl="0">
+              <a:spcBef>
+                <a:spcPts val="0"/>
+              </a:spcBef>
+              <a:spcAft>
+                <a:spcPts val="0"/>
+              </a:spcAft>
+              <a:buNone/>
+            </a:pPr>
+            <a:r>
+              <a:rPr lang="en-US" altLang="zh-TW" dirty="0"/>
+              <a:t>7</a:t>
+            </a:r>
+            <a:endParaRPr dirty="0"/>
+          </a:p>
+        </p:txBody>
+      </p:sp>
+      <p:sp>
+        <p:nvSpPr>
+          <p:cNvPr id="11" name="文字方塊 10">
+            <a:extLst>
+              <a:ext uri="{FF2B5EF4-FFF2-40B4-BE49-F238E27FC236}">
+                <a16:creationId xmlns:a16="http://schemas.microsoft.com/office/drawing/2014/main" id="{9038CC45-9AD5-43AD-9861-EDC4FE1629A2}"/>
+              </a:ext>
+            </a:extLst>
+          </p:cNvPr>
+          <p:cNvSpPr txBox="1"/>
+          <p:nvPr/>
+        </p:nvSpPr>
+        <p:spPr>
+          <a:xfrm>
+            <a:off x="2286000" y="376464"/>
+            <a:ext cx="4572000" cy="523220"/>
+          </a:xfrm>
+          <a:prstGeom prst="rect">
+            <a:avLst/>
+          </a:prstGeom>
+          <a:noFill/>
+        </p:spPr>
+        <p:txBody>
+          <a:bodyPr wrap="square">
+            <a:spAutoFit/>
+          </a:bodyPr>
+          <a:lstStyle/>
+          <a:p>
+            <a:pPr algn="ctr"/>
+            <a:r>
+              <a:rPr lang="zh-TW" altLang="en-US" sz="2800" dirty="0">
+                <a:ln w="0"/>
+                <a:gradFill>
+                  <a:gsLst>
+                    <a:gs pos="21000">
+                      <a:srgbClr val="53575C"/>
+                    </a:gs>
+                    <a:gs pos="88000">
+                      <a:srgbClr val="C5C7CA"/>
+                    </a:gs>
+                  </a:gsLst>
+                  <a:lin ang="5400000"/>
+                </a:gradFill>
+              </a:rPr>
+              <a:t>圖表展示</a:t>
+            </a:r>
+          </a:p>
+        </p:txBody>
+      </p:sp>
+      <p:pic>
+        <p:nvPicPr>
+          <p:cNvPr id="10" name="圖片 9">
+            <a:extLst>
+              <a:ext uri="{FF2B5EF4-FFF2-40B4-BE49-F238E27FC236}">
+                <a16:creationId xmlns:a16="http://schemas.microsoft.com/office/drawing/2014/main" id="{627E0BA1-7A81-A5EA-7771-85FBE28CA9D8}"/>
+              </a:ext>
+            </a:extLst>
+          </p:cNvPr>
+          <p:cNvPicPr>
+            <a:picLocks noChangeAspect="1"/>
+          </p:cNvPicPr>
+          <p:nvPr/>
+        </p:nvPicPr>
+        <p:blipFill>
+          <a:blip r:embed="rId3"/>
+          <a:stretch>
+            <a:fillRect/>
+          </a:stretch>
+        </p:blipFill>
+        <p:spPr>
+          <a:xfrm>
+            <a:off x="210660" y="899684"/>
+            <a:ext cx="4348800" cy="3474345"/>
+          </a:xfrm>
+          <a:prstGeom prst="rect">
+            <a:avLst/>
+          </a:prstGeom>
+          <a:ln w="12700">
+            <a:solidFill>
+              <a:schemeClr val="bg1">
+                <a:lumMod val="10000"/>
+              </a:schemeClr>
+            </a:solidFill>
+          </a:ln>
+        </p:spPr>
+      </p:pic>
+      <p:pic>
+        <p:nvPicPr>
+          <p:cNvPr id="12" name="圖片 11">
+            <a:extLst>
+              <a:ext uri="{FF2B5EF4-FFF2-40B4-BE49-F238E27FC236}">
+                <a16:creationId xmlns:a16="http://schemas.microsoft.com/office/drawing/2014/main" id="{B81F9596-BA47-B826-C0E8-DB9FFB92DCD2}"/>
+              </a:ext>
+            </a:extLst>
+          </p:cNvPr>
+          <p:cNvPicPr>
+            <a:picLocks noChangeAspect="1"/>
+          </p:cNvPicPr>
+          <p:nvPr/>
+        </p:nvPicPr>
+        <p:blipFill>
+          <a:blip r:embed="rId4"/>
+          <a:stretch>
+            <a:fillRect/>
+          </a:stretch>
+        </p:blipFill>
+        <p:spPr>
+          <a:xfrm>
+            <a:off x="4583844" y="899716"/>
+            <a:ext cx="4349496" cy="3474313"/>
+          </a:xfrm>
+          <a:prstGeom prst="rect">
+            <a:avLst/>
+          </a:prstGeom>
+          <a:ln w="12700">
+            <a:solidFill>
+              <a:schemeClr val="bg1">
+                <a:lumMod val="10000"/>
+              </a:schemeClr>
+            </a:solidFill>
+          </a:ln>
+        </p:spPr>
+      </p:pic>
+    </p:spTree>
+    <p:extLst>
+      <p:ext uri="{BB962C8B-B14F-4D97-AF65-F5344CB8AC3E}">
+        <p14:creationId xmlns:p14="http://schemas.microsoft.com/office/powerpoint/2010/main" val="1050173502"/>
+      </p:ext>
+    </p:extLst>
+  </p:cSld>
+  <p:clrMapOvr>
+    <a:masterClrMapping/>
+  </p:clrMapOvr>
+</p:sld>
+</file>
+
+<file path=ppt/slides/slide9.xml><?xml version="1.0" encoding="utf-8"?>
 <p:sld xmlns:a="http://schemas.openxmlformats.org/drawingml/2006/main" xmlns:r="http://schemas.openxmlformats.org/officeDocument/2006/relationships" xmlns:p="http://schemas.openxmlformats.org/presentationml/2006/main">
   <p:cSld>
     <p:spTree>
@@ -18042,7 +18820,7 @@
               <a:buNone/>
             </a:pPr>
             <a:r>
-              <a:rPr lang="en" dirty="0"/>
+              <a:rPr lang="en-US" altLang="zh-TW" dirty="0"/>
               <a:t>8</a:t>
             </a:r>
             <a:endParaRPr dirty="0"/>
@@ -18135,218 +18913,138 @@
           </a:ln>
         </p:spPr>
       </p:pic>
+      <p:sp>
+        <p:nvSpPr>
+          <p:cNvPr id="2" name="箭號: 向右 1">
+            <a:extLst>
+              <a:ext uri="{FF2B5EF4-FFF2-40B4-BE49-F238E27FC236}">
+                <a16:creationId xmlns:a16="http://schemas.microsoft.com/office/drawing/2014/main" id="{CCBF6551-16F4-A95D-A176-7AD39829362C}"/>
+              </a:ext>
+            </a:extLst>
+          </p:cNvPr>
+          <p:cNvSpPr/>
+          <p:nvPr/>
+        </p:nvSpPr>
+        <p:spPr>
+          <a:xfrm>
+            <a:off x="621792" y="2990088"/>
+            <a:ext cx="978408" cy="484632"/>
+          </a:xfrm>
+          <a:prstGeom prst="rightArrow">
+            <a:avLst/>
+          </a:prstGeom>
+          <a:solidFill>
+            <a:srgbClr val="FFC000"/>
+          </a:solidFill>
+        </p:spPr>
+        <p:style>
+          <a:lnRef idx="2">
+            <a:schemeClr val="accent1">
+              <a:shade val="15000"/>
+            </a:schemeClr>
+          </a:lnRef>
+          <a:fillRef idx="1">
+            <a:schemeClr val="accent1"/>
+          </a:fillRef>
+          <a:effectRef idx="0">
+            <a:schemeClr val="accent1"/>
+          </a:effectRef>
+          <a:fontRef idx="minor">
+            <a:schemeClr val="lt1"/>
+          </a:fontRef>
+        </p:style>
+        <p:txBody>
+          <a:bodyPr rtlCol="0" anchor="ctr"/>
+          <a:lstStyle/>
+          <a:p>
+            <a:pPr algn="ctr"/>
+            <a:endParaRPr lang="zh-TW" altLang="en-US"/>
+          </a:p>
+        </p:txBody>
+      </p:sp>
     </p:spTree>
   </p:cSld>
   <p:clrMapOvr>
     <a:masterClrMapping/>
   </p:clrMapOvr>
-</p:sld>
-</file>
-
-<file path=ppt/slides/slide9.xml><?xml version="1.0" encoding="utf-8"?>
-<p:sld xmlns:a="http://schemas.openxmlformats.org/drawingml/2006/main" xmlns:r="http://schemas.openxmlformats.org/officeDocument/2006/relationships" xmlns:p="http://schemas.openxmlformats.org/presentationml/2006/main">
-  <p:cSld>
-    <p:spTree>
-      <p:nvGrpSpPr>
-        <p:cNvPr id="1" name="Shape 294">
-          <a:extLst>
-            <a:ext uri="{FF2B5EF4-FFF2-40B4-BE49-F238E27FC236}">
-              <a16:creationId xmlns:a16="http://schemas.microsoft.com/office/drawing/2014/main" id="{D049356B-CF66-52EB-6F65-01368B6BB8CA}"/>
-            </a:ext>
-          </a:extLst>
-        </p:cNvPr>
-        <p:cNvGrpSpPr/>
-        <p:nvPr/>
-      </p:nvGrpSpPr>
-      <p:grpSpPr>
-        <a:xfrm>
-          <a:off x="0" y="0"/>
-          <a:ext cx="0" cy="0"/>
-          <a:chOff x="0" y="0"/>
-          <a:chExt cx="0" cy="0"/>
-        </a:xfrm>
-      </p:grpSpPr>
-      <p:sp>
-        <p:nvSpPr>
-          <p:cNvPr id="300" name="Google Shape;300;p30">
-            <a:extLst>
-              <a:ext uri="{FF2B5EF4-FFF2-40B4-BE49-F238E27FC236}">
-                <a16:creationId xmlns:a16="http://schemas.microsoft.com/office/drawing/2014/main" id="{E64D6DD2-4C56-334A-6CDA-651F7C5714D8}"/>
-              </a:ext>
-            </a:extLst>
-          </p:cNvPr>
-          <p:cNvSpPr txBox="1">
-            <a:spLocks noGrp="1"/>
-          </p:cNvSpPr>
-          <p:nvPr>
-            <p:ph type="sldNum" idx="12"/>
-          </p:nvPr>
-        </p:nvSpPr>
-        <p:spPr>
-          <a:xfrm>
-            <a:off x="4297650" y="4602875"/>
-            <a:ext cx="548700" cy="333600"/>
-          </a:xfrm>
-          <a:prstGeom prst="rect">
-            <a:avLst/>
-          </a:prstGeom>
-        </p:spPr>
-        <p:txBody>
-          <a:bodyPr spcFirstLastPara="1" wrap="square" lIns="91425" tIns="91425" rIns="91425" bIns="91425" anchor="t" anchorCtr="0">
-            <a:noAutofit/>
-          </a:bodyPr>
-          <a:lstStyle/>
-          <a:p>
-            <a:pPr marL="0" lvl="0" indent="0" algn="ctr" rtl="0">
-              <a:spcBef>
-                <a:spcPts val="0"/>
-              </a:spcBef>
-              <a:spcAft>
-                <a:spcPts val="0"/>
-              </a:spcAft>
-              <a:buNone/>
-            </a:pPr>
-            <a:r>
-              <a:rPr lang="en" dirty="0"/>
-              <a:t>8</a:t>
-            </a:r>
-            <a:endParaRPr dirty="0"/>
-          </a:p>
-        </p:txBody>
-      </p:sp>
-      <p:sp>
-        <p:nvSpPr>
-          <p:cNvPr id="11" name="文字方塊 10">
-            <a:extLst>
-              <a:ext uri="{FF2B5EF4-FFF2-40B4-BE49-F238E27FC236}">
-                <a16:creationId xmlns:a16="http://schemas.microsoft.com/office/drawing/2014/main" id="{9038CC45-9AD5-43AD-9861-EDC4FE1629A2}"/>
-              </a:ext>
-            </a:extLst>
-          </p:cNvPr>
-          <p:cNvSpPr txBox="1"/>
-          <p:nvPr/>
-        </p:nvSpPr>
-        <p:spPr>
-          <a:xfrm>
-            <a:off x="2286000" y="376464"/>
-            <a:ext cx="4572000" cy="523220"/>
-          </a:xfrm>
-          <a:prstGeom prst="rect">
-            <a:avLst/>
-          </a:prstGeom>
-          <a:noFill/>
-        </p:spPr>
-        <p:txBody>
-          <a:bodyPr wrap="square">
-            <a:spAutoFit/>
-          </a:bodyPr>
-          <a:lstStyle/>
-          <a:p>
-            <a:pPr algn="ctr"/>
-            <a:r>
-              <a:rPr lang="zh-TW" altLang="en-US" sz="2800" dirty="0">
-                <a:ln w="0"/>
-                <a:gradFill>
-                  <a:gsLst>
-                    <a:gs pos="21000">
-                      <a:srgbClr val="53575C"/>
-                    </a:gs>
-                    <a:gs pos="88000">
-                      <a:srgbClr val="C5C7CA"/>
-                    </a:gs>
-                  </a:gsLst>
-                  <a:lin ang="5400000"/>
-                </a:gradFill>
-              </a:rPr>
-              <a:t>圖表展示</a:t>
-            </a:r>
-          </a:p>
-        </p:txBody>
-      </p:sp>
-      <p:pic>
-        <p:nvPicPr>
-          <p:cNvPr id="10" name="圖片 9">
-            <a:extLst>
-              <a:ext uri="{FF2B5EF4-FFF2-40B4-BE49-F238E27FC236}">
-                <a16:creationId xmlns:a16="http://schemas.microsoft.com/office/drawing/2014/main" id="{627E0BA1-7A81-A5EA-7771-85FBE28CA9D8}"/>
-              </a:ext>
-            </a:extLst>
-          </p:cNvPr>
-          <p:cNvPicPr>
-            <a:picLocks noChangeAspect="1"/>
-          </p:cNvPicPr>
-          <p:nvPr/>
-        </p:nvPicPr>
-        <p:blipFill>
-          <a:blip r:embed="rId3"/>
-          <a:stretch>
-            <a:fillRect/>
-          </a:stretch>
-        </p:blipFill>
-        <p:spPr>
-          <a:xfrm>
-            <a:off x="210660" y="899684"/>
-            <a:ext cx="4348800" cy="3474345"/>
-          </a:xfrm>
-          <a:prstGeom prst="rect">
-            <a:avLst/>
-          </a:prstGeom>
-          <a:ln w="12700">
-            <a:solidFill>
-              <a:schemeClr val="bg1">
-                <a:lumMod val="10000"/>
-              </a:schemeClr>
-            </a:solidFill>
-          </a:ln>
-        </p:spPr>
-      </p:pic>
-      <p:pic>
-        <p:nvPicPr>
-          <p:cNvPr id="12" name="圖片 11">
-            <a:extLst>
-              <a:ext uri="{FF2B5EF4-FFF2-40B4-BE49-F238E27FC236}">
-                <a16:creationId xmlns:a16="http://schemas.microsoft.com/office/drawing/2014/main" id="{B81F9596-BA47-B826-C0E8-DB9FFB92DCD2}"/>
-              </a:ext>
-            </a:extLst>
-          </p:cNvPr>
-          <p:cNvPicPr>
-            <a:picLocks noChangeAspect="1"/>
-          </p:cNvPicPr>
-          <p:nvPr/>
-        </p:nvPicPr>
-        <p:blipFill>
-          <a:blip r:embed="rId4"/>
-          <a:stretch>
-            <a:fillRect/>
-          </a:stretch>
-        </p:blipFill>
-        <p:spPr>
-          <a:xfrm>
-            <a:off x="4583844" y="899716"/>
-            <a:ext cx="4349496" cy="3474313"/>
-          </a:xfrm>
-          <a:prstGeom prst="rect">
-            <a:avLst/>
-          </a:prstGeom>
-          <a:ln w="12700">
-            <a:solidFill>
-              <a:schemeClr val="bg1">
-                <a:lumMod val="10000"/>
-              </a:schemeClr>
-            </a:solidFill>
-          </a:ln>
-        </p:spPr>
-      </p:pic>
-    </p:spTree>
-    <p:extLst>
-      <p:ext uri="{BB962C8B-B14F-4D97-AF65-F5344CB8AC3E}">
-        <p14:creationId xmlns:p14="http://schemas.microsoft.com/office/powerpoint/2010/main" val="1050173502"/>
-      </p:ext>
-    </p:extLst>
-  </p:cSld>
-  <p:clrMapOvr>
-    <a:masterClrMapping/>
-  </p:clrMapOvr>
+  <p:timing>
+    <p:tnLst>
+      <p:par>
+        <p:cTn id="1" dur="indefinite" restart="never" nodeType="tmRoot">
+          <p:childTnLst>
+            <p:seq concurrent="1" nextAc="seek">
+              <p:cTn id="2" dur="indefinite" nodeType="mainSeq">
+                <p:childTnLst>
+                  <p:par>
+                    <p:cTn id="3" fill="hold">
+                      <p:stCondLst>
+                        <p:cond delay="indefinite"/>
+                      </p:stCondLst>
+                      <p:childTnLst>
+                        <p:par>
+                          <p:cTn id="4" fill="hold">
+                            <p:stCondLst>
+                              <p:cond delay="0"/>
+                            </p:stCondLst>
+                            <p:childTnLst>
+                              <p:par>
+                                <p:cTn id="5" presetID="1" presetClass="entr" presetSubtype="0" fill="hold" grpId="0" nodeType="clickEffect">
+                                  <p:stCondLst>
+                                    <p:cond delay="0"/>
+                                  </p:stCondLst>
+                                  <p:childTnLst>
+                                    <p:set>
+                                      <p:cBhvr>
+                                        <p:cTn id="6" dur="1" fill="hold">
+                                          <p:stCondLst>
+                                            <p:cond delay="0"/>
+                                          </p:stCondLst>
+                                        </p:cTn>
+                                        <p:tgtEl>
+                                          <p:spTgt spid="2"/>
+                                        </p:tgtEl>
+                                        <p:attrNameLst>
+                                          <p:attrName>style.visibility</p:attrName>
+                                        </p:attrNameLst>
+                                      </p:cBhvr>
+                                      <p:to>
+                                        <p:strVal val="visible"/>
+                                      </p:to>
+                                    </p:set>
+                                  </p:childTnLst>
+                                </p:cTn>
+                              </p:par>
+                            </p:childTnLst>
+                          </p:cTn>
+                        </p:par>
+                      </p:childTnLst>
+                    </p:cTn>
+                  </p:par>
+                </p:childTnLst>
+              </p:cTn>
+              <p:prevCondLst>
+                <p:cond evt="onPrev" delay="0">
+                  <p:tgtEl>
+                    <p:sldTgt/>
+                  </p:tgtEl>
+                </p:cond>
+              </p:prevCondLst>
+              <p:nextCondLst>
+                <p:cond evt="onNext" delay="0">
+                  <p:tgtEl>
+                    <p:sldTgt/>
+                  </p:tgtEl>
+                </p:cond>
+              </p:nextCondLst>
+            </p:seq>
+          </p:childTnLst>
+        </p:cTn>
+      </p:par>
+    </p:tnLst>
+    <p:bldLst>
+      <p:bldP spid="2" grpId="0" animBg="1"/>
+    </p:bldLst>
+  </p:timing>
 </p:sld>
 </file>
 
